--- a/presentations/project1_presentation.pptx
+++ b/presentations/project1_presentation.pptx
@@ -1,45 +1,140 @@
 
 <file path=ppt/presentation.xml><?xml version="1.0" encoding="utf-8"?>
-<p:presentation xmlns:a="http://schemas.openxmlformats.org/drawingml/2006/main" xmlns:p="http://schemas.openxmlformats.org/presentationml/2006/main" xmlns:r="http://schemas.openxmlformats.org/officeDocument/2006/relationships" xmlns:p14="http://schemas.microsoft.com/office/powerpoint/2010/main" xmlns:p15="http://schemas.microsoft.com/office/powerpoint/2012/main" xmlns:mc="http://schemas.openxmlformats.org/markup-compatibility/2006">
+<p:presentation xmlns:a="http://schemas.openxmlformats.org/drawingml/2006/main" xmlns:r="http://schemas.openxmlformats.org/officeDocument/2006/relationships" xmlns:p="http://schemas.openxmlformats.org/presentationml/2006/main">
   <p:sldMasterIdLst>
-    <p:sldMasterId id="2147483648" r:id="rId2"/>
-    <p:sldMasterId id="2147483652" r:id="rId3"/>
+    <p:sldMasterId id="2147483648" r:id="rId1"/>
+    <p:sldMasterId id="2147483652" r:id="rId2"/>
   </p:sldMasterIdLst>
   <p:notesMasterIdLst>
-    <p:notesMasterId r:id="rId4"/>
+    <p:notesMasterId r:id="rId19"/>
   </p:notesMasterIdLst>
   <p:sldIdLst>
-    <p:sldId id="256" r:id="rId5"/>
-    <p:sldId id="257" r:id="rId6"/>
-    <p:sldId id="258" r:id="rId7"/>
-    <p:sldId id="259" r:id="rId8"/>
-    <p:sldId id="260" r:id="rId9"/>
-    <p:sldId id="261" r:id="rId10"/>
-    <p:sldId id="262" r:id="rId11"/>
-    <p:sldId id="263" r:id="rId12"/>
-    <p:sldId id="264" r:id="rId13"/>
-    <p:sldId id="265" r:id="rId14"/>
-    <p:sldId id="266" r:id="rId15"/>
-    <p:sldId id="267" r:id="rId16"/>
-    <p:sldId id="268" r:id="rId17"/>
-    <p:sldId id="269" r:id="rId18"/>
-    <p:sldId id="270" r:id="rId19"/>
-    <p:sldId id="271" r:id="rId20"/>
+    <p:sldId id="256" r:id="rId3"/>
+    <p:sldId id="257" r:id="rId4"/>
+    <p:sldId id="258" r:id="rId5"/>
+    <p:sldId id="259" r:id="rId6"/>
+    <p:sldId id="260" r:id="rId7"/>
+    <p:sldId id="261" r:id="rId8"/>
+    <p:sldId id="262" r:id="rId9"/>
+    <p:sldId id="263" r:id="rId10"/>
+    <p:sldId id="264" r:id="rId11"/>
+    <p:sldId id="265" r:id="rId12"/>
+    <p:sldId id="266" r:id="rId13"/>
+    <p:sldId id="267" r:id="rId14"/>
+    <p:sldId id="268" r:id="rId15"/>
+    <p:sldId id="269" r:id="rId16"/>
+    <p:sldId id="270" r:id="rId17"/>
+    <p:sldId id="271" r:id="rId18"/>
   </p:sldIdLst>
   <p:sldSz cx="10080625" cy="5670550"/>
   <p:notesSz cx="7772400" cy="10058400"/>
+  <p:defaultTextStyle>
+    <a:defPPr>
+      <a:defRPr lang="en-US"/>
+    </a:defPPr>
+    <a:lvl1pPr marL="0" algn="l" defTabSz="914400" rtl="0" eaLnBrk="1" latinLnBrk="0" hangingPunct="1">
+      <a:defRPr sz="1800" kern="1200">
+        <a:solidFill>
+          <a:schemeClr val="tx1"/>
+        </a:solidFill>
+        <a:latin typeface="+mn-lt"/>
+        <a:ea typeface="+mn-ea"/>
+        <a:cs typeface="+mn-cs"/>
+      </a:defRPr>
+    </a:lvl1pPr>
+    <a:lvl2pPr marL="457200" algn="l" defTabSz="914400" rtl="0" eaLnBrk="1" latinLnBrk="0" hangingPunct="1">
+      <a:defRPr sz="1800" kern="1200">
+        <a:solidFill>
+          <a:schemeClr val="tx1"/>
+        </a:solidFill>
+        <a:latin typeface="+mn-lt"/>
+        <a:ea typeface="+mn-ea"/>
+        <a:cs typeface="+mn-cs"/>
+      </a:defRPr>
+    </a:lvl2pPr>
+    <a:lvl3pPr marL="914400" algn="l" defTabSz="914400" rtl="0" eaLnBrk="1" latinLnBrk="0" hangingPunct="1">
+      <a:defRPr sz="1800" kern="1200">
+        <a:solidFill>
+          <a:schemeClr val="tx1"/>
+        </a:solidFill>
+        <a:latin typeface="+mn-lt"/>
+        <a:ea typeface="+mn-ea"/>
+        <a:cs typeface="+mn-cs"/>
+      </a:defRPr>
+    </a:lvl3pPr>
+    <a:lvl4pPr marL="1371600" algn="l" defTabSz="914400" rtl="0" eaLnBrk="1" latinLnBrk="0" hangingPunct="1">
+      <a:defRPr sz="1800" kern="1200">
+        <a:solidFill>
+          <a:schemeClr val="tx1"/>
+        </a:solidFill>
+        <a:latin typeface="+mn-lt"/>
+        <a:ea typeface="+mn-ea"/>
+        <a:cs typeface="+mn-cs"/>
+      </a:defRPr>
+    </a:lvl4pPr>
+    <a:lvl5pPr marL="1828800" algn="l" defTabSz="914400" rtl="0" eaLnBrk="1" latinLnBrk="0" hangingPunct="1">
+      <a:defRPr sz="1800" kern="1200">
+        <a:solidFill>
+          <a:schemeClr val="tx1"/>
+        </a:solidFill>
+        <a:latin typeface="+mn-lt"/>
+        <a:ea typeface="+mn-ea"/>
+        <a:cs typeface="+mn-cs"/>
+      </a:defRPr>
+    </a:lvl5pPr>
+    <a:lvl6pPr marL="2286000" algn="l" defTabSz="914400" rtl="0" eaLnBrk="1" latinLnBrk="0" hangingPunct="1">
+      <a:defRPr sz="1800" kern="1200">
+        <a:solidFill>
+          <a:schemeClr val="tx1"/>
+        </a:solidFill>
+        <a:latin typeface="+mn-lt"/>
+        <a:ea typeface="+mn-ea"/>
+        <a:cs typeface="+mn-cs"/>
+      </a:defRPr>
+    </a:lvl6pPr>
+    <a:lvl7pPr marL="2743200" algn="l" defTabSz="914400" rtl="0" eaLnBrk="1" latinLnBrk="0" hangingPunct="1">
+      <a:defRPr sz="1800" kern="1200">
+        <a:solidFill>
+          <a:schemeClr val="tx1"/>
+        </a:solidFill>
+        <a:latin typeface="+mn-lt"/>
+        <a:ea typeface="+mn-ea"/>
+        <a:cs typeface="+mn-cs"/>
+      </a:defRPr>
+    </a:lvl7pPr>
+    <a:lvl8pPr marL="3200400" algn="l" defTabSz="914400" rtl="0" eaLnBrk="1" latinLnBrk="0" hangingPunct="1">
+      <a:defRPr sz="1800" kern="1200">
+        <a:solidFill>
+          <a:schemeClr val="tx1"/>
+        </a:solidFill>
+        <a:latin typeface="+mn-lt"/>
+        <a:ea typeface="+mn-ea"/>
+        <a:cs typeface="+mn-cs"/>
+      </a:defRPr>
+    </a:lvl8pPr>
+    <a:lvl9pPr marL="3657600" algn="l" defTabSz="914400" rtl="0" eaLnBrk="1" latinLnBrk="0" hangingPunct="1">
+      <a:defRPr sz="1800" kern="1200">
+        <a:solidFill>
+          <a:schemeClr val="tx1"/>
+        </a:solidFill>
+        <a:latin typeface="+mn-lt"/>
+        <a:ea typeface="+mn-ea"/>
+        <a:cs typeface="+mn-cs"/>
+      </a:defRPr>
+    </a:lvl9pPr>
+  </p:defaultTextStyle>
 </p:presentation>
 </file>
 
 <file path=ppt/commentAuthors.xml><?xml version="1.0" encoding="utf-8"?>
-<p:cmAuthorLst xmlns:p="http://schemas.openxmlformats.org/presentationml/2006/main">
+<p:cmAuthorLst xmlns:a="http://schemas.openxmlformats.org/drawingml/2006/main" xmlns:r="http://schemas.openxmlformats.org/officeDocument/2006/relationships" xmlns:p="http://schemas.openxmlformats.org/presentationml/2006/main">
   <p:cmAuthor id="0" name="" initials="" lastIdx="1" clrIdx="0"/>
 </p:cmAuthorLst>
 </file>
 
-<file path=ppt/comments/comment3.xml><?xml version="1.0" encoding="utf-8"?>
-<p:cmLst xmlns:p="http://schemas.openxmlformats.org/presentationml/2006/main">
-  <p:cm authorId="0" dt="2026-06-13T19:08:30.000000000" idx="1">
+<file path=ppt/comments/comment1.xml><?xml version="1.0" encoding="utf-8"?>
+<p:cmLst xmlns:a="http://schemas.openxmlformats.org/drawingml/2006/main" xmlns:r="http://schemas.openxmlformats.org/officeDocument/2006/relationships" xmlns:p="http://schemas.openxmlformats.org/presentationml/2006/main">
+  <p:cm authorId="0" dt="2026-06-13T19:08:30" idx="1">
     <p:pos x="0" y="0"/>
     <p:text>The model estimates that each additional year of age decreases vehicle value by approximately 13.8%, while every additional 10,000 miles reduces value by approximately 2.2%. Vehicle condition had a smaller but statistically significant effect, increasing value by approximately 2.0% for each one-point improvement in condition rating. </p:text>
   </p:cm>
@@ -47,8 +142,13 @@
 </file>
 
 <file path=ppt/notesMasters/notesMaster1.xml><?xml version="1.0" encoding="utf-8"?>
-<p:notesMaster xmlns:a="http://schemas.openxmlformats.org/drawingml/2006/main" xmlns:p="http://schemas.openxmlformats.org/presentationml/2006/main" xmlns:r="http://schemas.openxmlformats.org/officeDocument/2006/relationships" xmlns:p14="http://schemas.microsoft.com/office/powerpoint/2010/main" xmlns:p15="http://schemas.microsoft.com/office/powerpoint/2012/main" xmlns:mc="http://schemas.openxmlformats.org/markup-compatibility/2006">
+<p:notesMaster xmlns:a="http://schemas.openxmlformats.org/drawingml/2006/main" xmlns:r="http://schemas.openxmlformats.org/officeDocument/2006/relationships" xmlns:p="http://schemas.openxmlformats.org/presentationml/2006/main">
   <p:cSld>
+    <p:bg>
+      <p:bgRef idx="1001">
+        <a:schemeClr val="bg1"/>
+      </p:bgRef>
+    </p:bg>
     <p:spTree>
       <p:nvGrpSpPr>
         <p:cNvPr id="1" name=""/>
@@ -67,7 +167,7 @@
         <p:nvSpPr>
           <p:cNvPr id="31" name="PlaceHolder 1"/>
           <p:cNvSpPr>
-            <a:spLocks noGrp="1"/>
+            <a:spLocks noGrp="1" noRot="1" noChangeAspect="1"/>
           </p:cNvSpPr>
           <p:nvPr>
             <p:ph type="sldImg"/>
@@ -90,6 +190,7 @@
           <a:bodyPr lIns="0" tIns="0" rIns="0" bIns="0" anchor="ctr">
             <a:noAutofit/>
           </a:bodyPr>
+          <a:lstStyle/>
           <a:p>
             <a:pPr algn="ctr"/>
             <a:r>
@@ -103,14 +204,6 @@
               </a:rPr>
               <a:t>Click to move the slide</a:t>
             </a:r>
-            <a:endParaRPr lang="en-US" sz="3100" b="0" u="none" strike="noStrike">
-              <a:solidFill>
-                <a:srgbClr val="DD4100"/>
-              </a:solidFill>
-              <a:effectLst/>
-              <a:uFillTx/>
-              <a:latin typeface="Times New Roman"/>
-            </a:endParaRPr>
           </a:p>
         </p:txBody>
       </p:sp>
@@ -141,6 +234,7 @@
           <a:bodyPr lIns="0" tIns="0" rIns="0" bIns="0" anchor="t">
             <a:noAutofit/>
           </a:bodyPr>
+          <a:lstStyle/>
           <a:p>
             <a:pPr marL="216000" indent="-216000" algn="l">
               <a:buNone/>
@@ -159,17 +253,6 @@
               </a:rPr>
               <a:t>Click to edit the notes format</a:t>
             </a:r>
-            <a:endParaRPr lang="en-US" sz="2760" b="0" u="none" strike="noStrike">
-              <a:solidFill>
-                <a:srgbClr val="000000"/>
-              </a:solidFill>
-              <a:effectLst/>
-              <a:highlight>
-                <a:srgbClr val="FFFFFF"/>
-              </a:highlight>
-              <a:uFillTx/>
-              <a:latin typeface="Times New Roman"/>
-            </a:endParaRPr>
           </a:p>
         </p:txBody>
       </p:sp>
@@ -200,6 +283,7 @@
           <a:bodyPr lIns="0" tIns="0" rIns="0" bIns="0" anchor="t">
             <a:noAutofit/>
           </a:bodyPr>
+          <a:lstStyle/>
           <a:p>
             <a:pPr indent="0" algn="l">
               <a:buNone/>
@@ -411,7 +495,7 @@
                 <a:uFillTx/>
                 <a:latin typeface="Times New Roman"/>
               </a:rPr>
-              <a:t>1</a:t>
+              <a:t>‹#›</a:t>
             </a:fld>
             <a:endParaRPr lang="en-US" sz="1400" b="0" u="none" strike="noStrike">
               <a:solidFill>
@@ -426,12 +510,104 @@
       </p:sp>
     </p:spTree>
   </p:cSld>
-  <p:clrMap bg1="lt1" bg2="lt2" tx1="dk1" tx2="dk2" accent1="accent1" accent2="accent2" accent3="accent3" accent4="accent4" accent5="accent5" accent6="accent6" hlink="hlink" folHlink="folHlink"/>
+  <p:clrMap bg1="lt1" tx1="dk1" bg2="lt2" tx2="dk2" accent1="accent1" accent2="accent2" accent3="accent3" accent4="accent4" accent5="accent5" accent6="accent6" hlink="hlink" folHlink="folHlink"/>
+  <p:notesStyle>
+    <a:lvl1pPr marL="0" algn="l" defTabSz="914400" rtl="0" eaLnBrk="1" latinLnBrk="0" hangingPunct="1">
+      <a:defRPr sz="1200" kern="1200">
+        <a:solidFill>
+          <a:schemeClr val="tx1"/>
+        </a:solidFill>
+        <a:latin typeface="+mn-lt"/>
+        <a:ea typeface="+mn-ea"/>
+        <a:cs typeface="+mn-cs"/>
+      </a:defRPr>
+    </a:lvl1pPr>
+    <a:lvl2pPr marL="457200" algn="l" defTabSz="914400" rtl="0" eaLnBrk="1" latinLnBrk="0" hangingPunct="1">
+      <a:defRPr sz="1200" kern="1200">
+        <a:solidFill>
+          <a:schemeClr val="tx1"/>
+        </a:solidFill>
+        <a:latin typeface="+mn-lt"/>
+        <a:ea typeface="+mn-ea"/>
+        <a:cs typeface="+mn-cs"/>
+      </a:defRPr>
+    </a:lvl2pPr>
+    <a:lvl3pPr marL="914400" algn="l" defTabSz="914400" rtl="0" eaLnBrk="1" latinLnBrk="0" hangingPunct="1">
+      <a:defRPr sz="1200" kern="1200">
+        <a:solidFill>
+          <a:schemeClr val="tx1"/>
+        </a:solidFill>
+        <a:latin typeface="+mn-lt"/>
+        <a:ea typeface="+mn-ea"/>
+        <a:cs typeface="+mn-cs"/>
+      </a:defRPr>
+    </a:lvl3pPr>
+    <a:lvl4pPr marL="1371600" algn="l" defTabSz="914400" rtl="0" eaLnBrk="1" latinLnBrk="0" hangingPunct="1">
+      <a:defRPr sz="1200" kern="1200">
+        <a:solidFill>
+          <a:schemeClr val="tx1"/>
+        </a:solidFill>
+        <a:latin typeface="+mn-lt"/>
+        <a:ea typeface="+mn-ea"/>
+        <a:cs typeface="+mn-cs"/>
+      </a:defRPr>
+    </a:lvl4pPr>
+    <a:lvl5pPr marL="1828800" algn="l" defTabSz="914400" rtl="0" eaLnBrk="1" latinLnBrk="0" hangingPunct="1">
+      <a:defRPr sz="1200" kern="1200">
+        <a:solidFill>
+          <a:schemeClr val="tx1"/>
+        </a:solidFill>
+        <a:latin typeface="+mn-lt"/>
+        <a:ea typeface="+mn-ea"/>
+        <a:cs typeface="+mn-cs"/>
+      </a:defRPr>
+    </a:lvl5pPr>
+    <a:lvl6pPr marL="2286000" algn="l" defTabSz="914400" rtl="0" eaLnBrk="1" latinLnBrk="0" hangingPunct="1">
+      <a:defRPr sz="1200" kern="1200">
+        <a:solidFill>
+          <a:schemeClr val="tx1"/>
+        </a:solidFill>
+        <a:latin typeface="+mn-lt"/>
+        <a:ea typeface="+mn-ea"/>
+        <a:cs typeface="+mn-cs"/>
+      </a:defRPr>
+    </a:lvl6pPr>
+    <a:lvl7pPr marL="2743200" algn="l" defTabSz="914400" rtl="0" eaLnBrk="1" latinLnBrk="0" hangingPunct="1">
+      <a:defRPr sz="1200" kern="1200">
+        <a:solidFill>
+          <a:schemeClr val="tx1"/>
+        </a:solidFill>
+        <a:latin typeface="+mn-lt"/>
+        <a:ea typeface="+mn-ea"/>
+        <a:cs typeface="+mn-cs"/>
+      </a:defRPr>
+    </a:lvl7pPr>
+    <a:lvl8pPr marL="3200400" algn="l" defTabSz="914400" rtl="0" eaLnBrk="1" latinLnBrk="0" hangingPunct="1">
+      <a:defRPr sz="1200" kern="1200">
+        <a:solidFill>
+          <a:schemeClr val="tx1"/>
+        </a:solidFill>
+        <a:latin typeface="+mn-lt"/>
+        <a:ea typeface="+mn-ea"/>
+        <a:cs typeface="+mn-cs"/>
+      </a:defRPr>
+    </a:lvl8pPr>
+    <a:lvl9pPr marL="3657600" algn="l" defTabSz="914400" rtl="0" eaLnBrk="1" latinLnBrk="0" hangingPunct="1">
+      <a:defRPr sz="1200" kern="1200">
+        <a:solidFill>
+          <a:schemeClr val="tx1"/>
+        </a:solidFill>
+        <a:latin typeface="+mn-lt"/>
+        <a:ea typeface="+mn-ea"/>
+        <a:cs typeface="+mn-cs"/>
+      </a:defRPr>
+    </a:lvl9pPr>
+  </p:notesStyle>
 </p:notesMaster>
 </file>
 
-<file path=ppt/notesSlides/notesSlide6.xml><?xml version="1.0" encoding="utf-8"?>
-<p:notes xmlns:a="http://schemas.openxmlformats.org/drawingml/2006/main" xmlns:p="http://schemas.openxmlformats.org/presentationml/2006/main" xmlns:r="http://schemas.openxmlformats.org/officeDocument/2006/relationships" xmlns:p14="http://schemas.microsoft.com/office/powerpoint/2010/main" xmlns:p15="http://schemas.microsoft.com/office/powerpoint/2012/main" xmlns:mc="http://schemas.openxmlformats.org/markup-compatibility/2006">
+<file path=ppt/notesSlides/notesSlide1.xml><?xml version="1.0" encoding="utf-8"?>
+<p:notes xmlns:a="http://schemas.openxmlformats.org/drawingml/2006/main" xmlns:r="http://schemas.openxmlformats.org/officeDocument/2006/relationships" xmlns:p="http://schemas.openxmlformats.org/presentationml/2006/main">
   <p:cSld>
     <p:spTree>
       <p:nvGrpSpPr>
@@ -451,7 +627,7 @@
         <p:nvSpPr>
           <p:cNvPr id="70" name="PlaceHolder 1"/>
           <p:cNvSpPr>
-            <a:spLocks noGrp="1"/>
+            <a:spLocks noGrp="1" noRot="1" noChangeAspect="1"/>
           </p:cNvSpPr>
           <p:nvPr>
             <p:ph type="sldImg"/>
@@ -497,6 +673,7 @@
           <a:bodyPr lIns="91440" tIns="45720" rIns="91440" bIns="45720" anchor="t">
             <a:noAutofit/>
           </a:bodyPr>
+          <a:lstStyle/>
           <a:p>
             <a:pPr marL="216000" indent="-216000" algn="l">
               <a:buNone/>
@@ -571,7 +748,7 @@
                 <a:uFillTx/>
                 <a:latin typeface="Times New Roman"/>
               </a:rPr>
-              <a:t>&lt;number&gt;</a:t>
+              <a:t>6</a:t>
             </a:fld>
             <a:endParaRPr lang="en-US" sz="1200" b="0" u="none" strike="noStrike">
               <a:solidFill>
@@ -586,17 +763,21 @@
       </p:sp>
     </p:spTree>
   </p:cSld>
+  <p:clrMapOvr>
+    <a:masterClrMapping/>
+  </p:clrMapOvr>
 </p:notes>
 </file>
 
 <file path=ppt/slideLayouts/slideLayout1.xml><?xml version="1.0" encoding="utf-8"?>
-<p:sldLayout xmlns:a="http://schemas.openxmlformats.org/drawingml/2006/main" xmlns:p="http://schemas.openxmlformats.org/presentationml/2006/main" xmlns:r="http://schemas.openxmlformats.org/officeDocument/2006/relationships" xmlns:p14="http://schemas.microsoft.com/office/powerpoint/2010/main" xmlns:p15="http://schemas.microsoft.com/office/powerpoint/2012/main" xmlns:mc="http://schemas.openxmlformats.org/markup-compatibility/2006" type="tx" preserve="1">
+<p:sldLayout xmlns:a="http://schemas.openxmlformats.org/drawingml/2006/main" xmlns:r="http://schemas.openxmlformats.org/officeDocument/2006/relationships" xmlns:p="http://schemas.openxmlformats.org/presentationml/2006/main" type="tx" preserve="1">
   <p:cSld name="Default">
     <p:bg>
       <p:bgPr>
         <a:solidFill>
           <a:srgbClr val="FFFFFF"/>
         </a:solidFill>
+        <a:effectLst/>
       </p:bgPr>
     </p:bg>
     <p:spTree>
@@ -680,14 +861,6 @@
               </a:rPr>
               <a:t>Click to edit the title text format</a:t>
             </a:r>
-            <a:endParaRPr lang="en-US" sz="4400" b="0" u="none" strike="noStrike">
-              <a:solidFill>
-                <a:srgbClr val="000000"/>
-              </a:solidFill>
-              <a:effectLst/>
-              <a:uFillTx/>
-              <a:latin typeface="Arial"/>
-            </a:endParaRPr>
           </a:p>
         </p:txBody>
       </p:sp>
@@ -900,14 +1073,6 @@
               </a:rPr>
               <a:t>Click to edit the outline text format</a:t>
             </a:r>
-            <a:endParaRPr lang="en-US" sz="3200" b="0" u="none" strike="noStrike">
-              <a:solidFill>
-                <a:srgbClr val="000000"/>
-              </a:solidFill>
-              <a:effectLst/>
-              <a:uFillTx/>
-              <a:latin typeface="Arial"/>
-            </a:endParaRPr>
           </a:p>
           <a:p>
             <a:pPr marL="457200" lvl="1" indent="-324000" algn="l" defTabSz="914400">
@@ -935,14 +1100,6 @@
               </a:rPr>
               <a:t>Second Outline Level</a:t>
             </a:r>
-            <a:endParaRPr lang="en-US" sz="3200" b="0" u="none" strike="noStrike">
-              <a:solidFill>
-                <a:srgbClr val="000000"/>
-              </a:solidFill>
-              <a:effectLst/>
-              <a:uFillTx/>
-              <a:latin typeface="Arial"/>
-            </a:endParaRPr>
           </a:p>
           <a:p>
             <a:pPr marL="914400" lvl="2" indent="-288000" algn="l" defTabSz="914400">
@@ -970,14 +1127,6 @@
               </a:rPr>
               <a:t>Third Outline Level</a:t>
             </a:r>
-            <a:endParaRPr lang="en-US" sz="3200" b="0" u="none" strike="noStrike">
-              <a:solidFill>
-                <a:srgbClr val="000000"/>
-              </a:solidFill>
-              <a:effectLst/>
-              <a:uFillTx/>
-              <a:latin typeface="Arial"/>
-            </a:endParaRPr>
           </a:p>
           <a:p>
             <a:pPr marL="1371600" lvl="3" indent="-216000" algn="l" defTabSz="914400">
@@ -1005,14 +1154,6 @@
               </a:rPr>
               <a:t>Fourth Outline Level</a:t>
             </a:r>
-            <a:endParaRPr lang="en-US" sz="3200" b="0" u="none" strike="noStrike">
-              <a:solidFill>
-                <a:srgbClr val="000000"/>
-              </a:solidFill>
-              <a:effectLst/>
-              <a:uFillTx/>
-              <a:latin typeface="Arial"/>
-            </a:endParaRPr>
           </a:p>
           <a:p>
             <a:pPr marL="1828800" lvl="4" indent="-216000" algn="l" defTabSz="914400">
@@ -1040,14 +1181,6 @@
               </a:rPr>
               <a:t>Fifth Outline Level</a:t>
             </a:r>
-            <a:endParaRPr lang="en-US" sz="3200" b="0" u="none" strike="noStrike">
-              <a:solidFill>
-                <a:srgbClr val="000000"/>
-              </a:solidFill>
-              <a:effectLst/>
-              <a:uFillTx/>
-              <a:latin typeface="Arial"/>
-            </a:endParaRPr>
           </a:p>
           <a:p>
             <a:pPr marL="2286000" lvl="5" indent="-216000" algn="l" defTabSz="914400">
@@ -1075,14 +1208,6 @@
               </a:rPr>
               <a:t>Sixth Outline Level</a:t>
             </a:r>
-            <a:endParaRPr lang="en-US" sz="3200" b="0" u="none" strike="noStrike">
-              <a:solidFill>
-                <a:srgbClr val="000000"/>
-              </a:solidFill>
-              <a:effectLst/>
-              <a:uFillTx/>
-              <a:latin typeface="Arial"/>
-            </a:endParaRPr>
           </a:p>
           <a:p>
             <a:pPr marL="2743200" lvl="6" indent="-216000" algn="l" defTabSz="914400">
@@ -1110,14 +1235,6 @@
               </a:rPr>
               <a:t>Seventh Outline Level</a:t>
             </a:r>
-            <a:endParaRPr lang="en-US" sz="3200" b="0" u="none" strike="noStrike">
-              <a:solidFill>
-                <a:srgbClr val="000000"/>
-              </a:solidFill>
-              <a:effectLst/>
-              <a:uFillTx/>
-              <a:latin typeface="Arial"/>
-            </a:endParaRPr>
           </a:p>
         </p:txBody>
       </p:sp>
@@ -1268,7 +1385,7 @@
                 <a:latin typeface="Times New Roman"/>
                 <a:ea typeface="DejaVu Sans"/>
               </a:rPr>
-              <a:t>&lt;number&gt;</a:t>
+              <a:t>‹#›</a:t>
             </a:fld>
             <a:endParaRPr lang="en-US" sz="1400" b="0" u="none" strike="noStrike">
               <a:solidFill>
@@ -1336,30 +1453,26 @@
               </a:rPr>
               <a:t>&lt;date/time&gt;</a:t>
             </a:r>
-            <a:endParaRPr lang="en-US" sz="1400" b="0" u="none" strike="noStrike">
-              <a:solidFill>
-                <a:srgbClr val="000000"/>
-              </a:solidFill>
-              <a:effectLst/>
-              <a:uFillTx/>
-              <a:latin typeface="Times New Roman"/>
-            </a:endParaRPr>
           </a:p>
         </p:txBody>
       </p:sp>
     </p:spTree>
   </p:cSld>
+  <p:clrMapOvr>
+    <a:masterClrMapping/>
+  </p:clrMapOvr>
 </p:sldLayout>
 </file>
 
 <file path=ppt/slideLayouts/slideLayout2.xml><?xml version="1.0" encoding="utf-8"?>
-<p:sldLayout xmlns:a="http://schemas.openxmlformats.org/drawingml/2006/main" xmlns:p="http://schemas.openxmlformats.org/presentationml/2006/main" xmlns:r="http://schemas.openxmlformats.org/officeDocument/2006/relationships" xmlns:p14="http://schemas.microsoft.com/office/powerpoint/2010/main" xmlns:p15="http://schemas.microsoft.com/office/powerpoint/2012/main" xmlns:mc="http://schemas.openxmlformats.org/markup-compatibility/2006" type="title" preserve="1">
+<p:sldLayout xmlns:a="http://schemas.openxmlformats.org/drawingml/2006/main" xmlns:r="http://schemas.openxmlformats.org/officeDocument/2006/relationships" xmlns:p="http://schemas.openxmlformats.org/presentationml/2006/main" type="title" preserve="1">
   <p:cSld name="Default 1">
     <p:bg>
       <p:bgPr>
         <a:solidFill>
           <a:srgbClr val="FFFFFF"/>
         </a:solidFill>
+        <a:effectLst/>
       </p:bgPr>
     </p:bg>
     <p:spTree>
@@ -1443,14 +1556,6 @@
               </a:rPr>
               <a:t>Click to edit the title text format</a:t>
             </a:r>
-            <a:endParaRPr lang="en-US" sz="4400" b="0" u="none" strike="noStrike">
-              <a:solidFill>
-                <a:srgbClr val="000000"/>
-              </a:solidFill>
-              <a:effectLst/>
-              <a:uFillTx/>
-              <a:latin typeface="Arial"/>
-            </a:endParaRPr>
           </a:p>
         </p:txBody>
       </p:sp>
@@ -1601,7 +1706,7 @@
                 <a:latin typeface="Times New Roman"/>
                 <a:ea typeface="DejaVu Sans"/>
               </a:rPr>
-              <a:t>&lt;number&gt;</a:t>
+              <a:t>‹#›</a:t>
             </a:fld>
             <a:endParaRPr lang="en-US" sz="1400" b="0" u="none" strike="noStrike">
               <a:solidFill>
@@ -1669,14 +1774,6 @@
               </a:rPr>
               <a:t>&lt;date/time&gt;</a:t>
             </a:r>
-            <a:endParaRPr lang="en-US" sz="1400" b="0" u="none" strike="noStrike">
-              <a:solidFill>
-                <a:srgbClr val="000000"/>
-              </a:solidFill>
-              <a:effectLst/>
-              <a:uFillTx/>
-              <a:latin typeface="Times New Roman"/>
-            </a:endParaRPr>
           </a:p>
         </p:txBody>
       </p:sp>
@@ -1889,14 +1986,6 @@
               </a:rPr>
               <a:t>Click to edit the outline text format</a:t>
             </a:r>
-            <a:endParaRPr lang="en-US" sz="3200" b="0" u="none" strike="noStrike">
-              <a:solidFill>
-                <a:srgbClr val="000000"/>
-              </a:solidFill>
-              <a:effectLst/>
-              <a:uFillTx/>
-              <a:latin typeface="Arial"/>
-            </a:endParaRPr>
           </a:p>
           <a:p>
             <a:pPr marL="864000" lvl="1" indent="-324000" algn="l" defTabSz="914400">
@@ -1924,14 +2013,6 @@
               </a:rPr>
               <a:t>Second Outline Level</a:t>
             </a:r>
-            <a:endParaRPr lang="en-US" sz="2800" b="0" u="none" strike="noStrike">
-              <a:solidFill>
-                <a:srgbClr val="000000"/>
-              </a:solidFill>
-              <a:effectLst/>
-              <a:uFillTx/>
-              <a:latin typeface="Arial"/>
-            </a:endParaRPr>
           </a:p>
           <a:p>
             <a:pPr marL="1296000" lvl="2" indent="-288000" algn="l" defTabSz="914400">
@@ -1959,14 +2040,6 @@
               </a:rPr>
               <a:t>Third Outline Level</a:t>
             </a:r>
-            <a:endParaRPr lang="en-US" sz="2400" b="0" u="none" strike="noStrike">
-              <a:solidFill>
-                <a:srgbClr val="000000"/>
-              </a:solidFill>
-              <a:effectLst/>
-              <a:uFillTx/>
-              <a:latin typeface="Arial"/>
-            </a:endParaRPr>
           </a:p>
           <a:p>
             <a:pPr marL="1728000" lvl="3" indent="-216000" algn="l" defTabSz="914400">
@@ -1994,14 +2067,6 @@
               </a:rPr>
               <a:t>Fourth Outline Level</a:t>
             </a:r>
-            <a:endParaRPr lang="en-US" sz="2000" b="0" u="none" strike="noStrike">
-              <a:solidFill>
-                <a:srgbClr val="000000"/>
-              </a:solidFill>
-              <a:effectLst/>
-              <a:uFillTx/>
-              <a:latin typeface="Arial"/>
-            </a:endParaRPr>
           </a:p>
           <a:p>
             <a:pPr marL="2160000" lvl="4" indent="-216000" algn="l" defTabSz="914400">
@@ -2029,14 +2094,6 @@
               </a:rPr>
               <a:t>Fifth Outline Level</a:t>
             </a:r>
-            <a:endParaRPr lang="en-US" sz="2000" b="0" u="none" strike="noStrike">
-              <a:solidFill>
-                <a:srgbClr val="000000"/>
-              </a:solidFill>
-              <a:effectLst/>
-              <a:uFillTx/>
-              <a:latin typeface="Arial"/>
-            </a:endParaRPr>
           </a:p>
           <a:p>
             <a:pPr marL="2592000" lvl="5" indent="-216000" algn="l" defTabSz="914400">
@@ -2064,14 +2121,6 @@
               </a:rPr>
               <a:t>Sixth Outline Level</a:t>
             </a:r>
-            <a:endParaRPr lang="en-US" sz="2000" b="0" u="none" strike="noStrike">
-              <a:solidFill>
-                <a:srgbClr val="000000"/>
-              </a:solidFill>
-              <a:effectLst/>
-              <a:uFillTx/>
-              <a:latin typeface="Arial"/>
-            </a:endParaRPr>
           </a:p>
           <a:p>
             <a:pPr marL="3024000" lvl="6" indent="-216000" algn="l" defTabSz="914400">
@@ -2099,30 +2148,26 @@
               </a:rPr>
               <a:t>Seventh Outline Level</a:t>
             </a:r>
-            <a:endParaRPr lang="en-US" sz="2000" b="0" u="none" strike="noStrike">
-              <a:solidFill>
-                <a:srgbClr val="000000"/>
-              </a:solidFill>
-              <a:effectLst/>
-              <a:uFillTx/>
-              <a:latin typeface="Arial"/>
-            </a:endParaRPr>
           </a:p>
         </p:txBody>
       </p:sp>
     </p:spTree>
   </p:cSld>
+  <p:clrMapOvr>
+    <a:masterClrMapping/>
+  </p:clrMapOvr>
 </p:sldLayout>
 </file>
 
 <file path=ppt/slideLayouts/slideLayout3.xml><?xml version="1.0" encoding="utf-8"?>
-<p:sldLayout xmlns:a="http://schemas.openxmlformats.org/drawingml/2006/main" xmlns:p="http://schemas.openxmlformats.org/presentationml/2006/main" xmlns:r="http://schemas.openxmlformats.org/officeDocument/2006/relationships" xmlns:p14="http://schemas.microsoft.com/office/powerpoint/2010/main" xmlns:p15="http://schemas.microsoft.com/office/powerpoint/2012/main" xmlns:mc="http://schemas.openxmlformats.org/markup-compatibility/2006" type="twoObj" preserve="1">
+<p:sldLayout xmlns:a="http://schemas.openxmlformats.org/drawingml/2006/main" xmlns:r="http://schemas.openxmlformats.org/officeDocument/2006/relationships" xmlns:p="http://schemas.openxmlformats.org/presentationml/2006/main" type="twoObj" preserve="1">
   <p:cSld name="Two Content">
     <p:bg>
       <p:bgPr>
         <a:solidFill>
           <a:srgbClr val="FFFFFF"/>
         </a:solidFill>
+        <a:effectLst/>
       </p:bgPr>
     </p:bg>
     <p:spTree>
@@ -3006,14 +3051,6 @@
               </a:rPr>
               <a:t>&lt;footer&gt;</a:t>
             </a:r>
-            <a:endParaRPr lang="en-US" sz="1400" b="0" u="none" strike="noStrike">
-              <a:solidFill>
-                <a:srgbClr val="000000"/>
-              </a:solidFill>
-              <a:effectLst/>
-              <a:uFillTx/>
-              <a:latin typeface="Times New Roman"/>
-            </a:endParaRPr>
           </a:p>
         </p:txBody>
       </p:sp>
@@ -3084,7 +3121,7 @@
                 <a:latin typeface="Times New Roman"/>
                 <a:ea typeface="DejaVu Sans"/>
               </a:rPr>
-              <a:t>&lt;number&gt;</a:t>
+              <a:t>‹#›</a:t>
             </a:fld>
             <a:endParaRPr lang="en-US" sz="1400" b="0" u="none" strike="noStrike">
               <a:solidFill>
@@ -3099,11 +3136,14 @@
       </p:sp>
     </p:spTree>
   </p:cSld>
+  <p:clrMapOvr>
+    <a:masterClrMapping/>
+  </p:clrMapOvr>
 </p:sldLayout>
 </file>
 
 <file path=ppt/slideLayouts/slideLayout4.xml><?xml version="1.0" encoding="utf-8"?>
-<p:sldLayout xmlns:a="http://schemas.openxmlformats.org/drawingml/2006/main" xmlns:p="http://schemas.openxmlformats.org/presentationml/2006/main" xmlns:r="http://schemas.openxmlformats.org/officeDocument/2006/relationships" xmlns:p14="http://schemas.microsoft.com/office/powerpoint/2010/main" xmlns:p15="http://schemas.microsoft.com/office/powerpoint/2012/main" xmlns:mc="http://schemas.openxmlformats.org/markup-compatibility/2006" type="twoObj" preserve="1">
+<p:sldLayout xmlns:a="http://schemas.openxmlformats.org/drawingml/2006/main" xmlns:r="http://schemas.openxmlformats.org/officeDocument/2006/relationships" xmlns:p="http://schemas.openxmlformats.org/presentationml/2006/main" type="twoObj" preserve="1">
   <p:cSld name="Blue_Curve">
     <p:spTree>
       <p:nvGrpSpPr>
@@ -3146,6 +3186,7 @@
           <a:bodyPr lIns="0" tIns="0" rIns="0" bIns="0" anchor="ctr">
             <a:spAutoFit/>
           </a:bodyPr>
+          <a:lstStyle/>
           <a:p>
             <a:pPr indent="0" algn="ctr">
               <a:buNone/>
@@ -3188,6 +3229,7 @@
           <a:bodyPr lIns="0" tIns="0" rIns="0" bIns="0" anchor="t">
             <a:normAutofit/>
           </a:bodyPr>
+          <a:lstStyle/>
           <a:p>
             <a:pPr indent="0" algn="l">
               <a:spcBef>
@@ -3233,6 +3275,7 @@
           <a:bodyPr lIns="0" tIns="0" rIns="0" bIns="0" anchor="t">
             <a:normAutofit/>
           </a:bodyPr>
+          <a:lstStyle/>
           <a:p>
             <a:pPr indent="0" algn="l">
               <a:spcBef>
@@ -3264,6 +3307,7 @@
         <p:spPr/>
         <p:txBody>
           <a:bodyPr/>
+          <a:lstStyle/>
           <a:p>
             <a:r>
               <a:t>Footer</a:t>
@@ -3284,10 +3328,12 @@
         <p:spPr/>
         <p:txBody>
           <a:bodyPr/>
+          <a:lstStyle/>
           <a:p>
             <a:fld id="{AA50AC9D-FF98-477D-A1AD-686CFE449508}" type="slidenum">
-              <a:t>&lt;#&gt;</a:t>
+              <a:t>‹#›</a:t>
             </a:fld>
+            <a:endParaRPr/>
           </a:p>
         </p:txBody>
       </p:sp>
@@ -3304,21 +3350,22 @@
         <p:spPr/>
         <p:txBody>
           <a:bodyPr/>
-          <a:p>
-            <a:r>
-              <a:rPr lang="en-US"/>
-              <a:t/>
-            </a:r>
+          <a:lstStyle/>
+          <a:p>
+            <a:endParaRPr/>
           </a:p>
         </p:txBody>
       </p:sp>
     </p:spTree>
   </p:cSld>
+  <p:clrMapOvr>
+    <a:masterClrMapping/>
+  </p:clrMapOvr>
 </p:sldLayout>
 </file>
 
 <file path=ppt/slideLayouts/slideLayout5.xml><?xml version="1.0" encoding="utf-8"?>
-<p:sldLayout xmlns:a="http://schemas.openxmlformats.org/drawingml/2006/main" xmlns:p="http://schemas.openxmlformats.org/presentationml/2006/main" xmlns:r="http://schemas.openxmlformats.org/officeDocument/2006/relationships" xmlns:p14="http://schemas.microsoft.com/office/powerpoint/2010/main" xmlns:p15="http://schemas.microsoft.com/office/powerpoint/2012/main" xmlns:mc="http://schemas.openxmlformats.org/markup-compatibility/2006" type="tx" preserve="1">
+<p:sldLayout xmlns:a="http://schemas.openxmlformats.org/drawingml/2006/main" xmlns:r="http://schemas.openxmlformats.org/officeDocument/2006/relationships" xmlns:p="http://schemas.openxmlformats.org/presentationml/2006/main" type="tx" preserve="1">
   <p:cSld name="Blue_Curve">
     <p:spTree>
       <p:nvGrpSpPr>
@@ -3361,6 +3408,7 @@
           <a:bodyPr lIns="0" tIns="0" rIns="0" bIns="0" anchor="ctr">
             <a:spAutoFit/>
           </a:bodyPr>
+          <a:lstStyle/>
           <a:p>
             <a:pPr indent="0" algn="ctr">
               <a:buNone/>
@@ -3403,6 +3451,7 @@
           <a:bodyPr lIns="0" tIns="0" rIns="0" bIns="0" anchor="t">
             <a:normAutofit/>
           </a:bodyPr>
+          <a:lstStyle/>
           <a:p>
             <a:pPr indent="0" algn="l">
               <a:spcBef>
@@ -3434,6 +3483,7 @@
         <p:spPr/>
         <p:txBody>
           <a:bodyPr/>
+          <a:lstStyle/>
           <a:p>
             <a:r>
               <a:t>Footer</a:t>
@@ -3454,10 +3504,12 @@
         <p:spPr/>
         <p:txBody>
           <a:bodyPr/>
+          <a:lstStyle/>
           <a:p>
             <a:fld id="{559A0749-6A9F-4D39-8498-52C3C2D83167}" type="slidenum">
-              <a:t>&lt;#&gt;</a:t>
+              <a:t>‹#›</a:t>
             </a:fld>
+            <a:endParaRPr/>
           </a:p>
         </p:txBody>
       </p:sp>
@@ -3474,21 +3526,22 @@
         <p:spPr/>
         <p:txBody>
           <a:bodyPr/>
-          <a:p>
-            <a:r>
-              <a:rPr lang="en-US"/>
-              <a:t/>
-            </a:r>
+          <a:lstStyle/>
+          <a:p>
+            <a:endParaRPr/>
           </a:p>
         </p:txBody>
       </p:sp>
     </p:spTree>
   </p:cSld>
+  <p:clrMapOvr>
+    <a:masterClrMapping/>
+  </p:clrMapOvr>
 </p:sldLayout>
 </file>
 
 <file path=ppt/slideLayouts/slideLayout6.xml><?xml version="1.0" encoding="utf-8"?>
-<p:sldLayout xmlns:a="http://schemas.openxmlformats.org/drawingml/2006/main" xmlns:p="http://schemas.openxmlformats.org/presentationml/2006/main" xmlns:r="http://schemas.openxmlformats.org/officeDocument/2006/relationships" xmlns:p14="http://schemas.microsoft.com/office/powerpoint/2010/main" xmlns:p15="http://schemas.microsoft.com/office/powerpoint/2012/main" xmlns:mc="http://schemas.openxmlformats.org/markup-compatibility/2006" type="title" preserve="1">
+<p:sldLayout xmlns:a="http://schemas.openxmlformats.org/drawingml/2006/main" xmlns:r="http://schemas.openxmlformats.org/officeDocument/2006/relationships" xmlns:p="http://schemas.openxmlformats.org/presentationml/2006/main" type="title" preserve="1">
   <p:cSld name="Blue_Curve">
     <p:spTree>
       <p:nvGrpSpPr>
@@ -3531,6 +3584,7 @@
           <a:bodyPr lIns="0" tIns="0" rIns="0" bIns="0" anchor="ctr">
             <a:spAutoFit/>
           </a:bodyPr>
+          <a:lstStyle/>
           <a:p>
             <a:pPr indent="0" algn="ctr">
               <a:buNone/>
@@ -3573,6 +3627,7 @@
           <a:bodyPr lIns="0" tIns="0" rIns="0" bIns="0" anchor="ctr">
             <a:spAutoFit/>
           </a:bodyPr>
+          <a:lstStyle/>
           <a:p>
             <a:pPr indent="0" algn="ctr">
               <a:buNone/>
@@ -3604,6 +3659,7 @@
         <p:spPr/>
         <p:txBody>
           <a:bodyPr/>
+          <a:lstStyle/>
           <a:p>
             <a:r>
               <a:t>Footer</a:t>
@@ -3624,10 +3680,12 @@
         <p:spPr/>
         <p:txBody>
           <a:bodyPr/>
+          <a:lstStyle/>
           <a:p>
             <a:fld id="{9D4AE25F-E021-4FE9-943D-96977180DAC6}" type="slidenum">
-              <a:t>&lt;#&gt;</a:t>
+              <a:t>‹#›</a:t>
             </a:fld>
+            <a:endParaRPr/>
           </a:p>
         </p:txBody>
       </p:sp>
@@ -3644,22 +3702,28 @@
         <p:spPr/>
         <p:txBody>
           <a:bodyPr/>
-          <a:p>
-            <a:r>
-              <a:rPr lang="en-US"/>
-              <a:t/>
-            </a:r>
+          <a:lstStyle/>
+          <a:p>
+            <a:endParaRPr/>
           </a:p>
         </p:txBody>
       </p:sp>
     </p:spTree>
   </p:cSld>
+  <p:clrMapOvr>
+    <a:masterClrMapping/>
+  </p:clrMapOvr>
 </p:sldLayout>
 </file>
 
 <file path=ppt/slideMasters/slideMaster1.xml><?xml version="1.0" encoding="utf-8"?>
-<p:sldMaster xmlns:a="http://schemas.openxmlformats.org/drawingml/2006/main" xmlns:p="http://schemas.openxmlformats.org/presentationml/2006/main" xmlns:r="http://schemas.openxmlformats.org/officeDocument/2006/relationships" xmlns:p14="http://schemas.microsoft.com/office/powerpoint/2010/main" xmlns:p15="http://schemas.microsoft.com/office/powerpoint/2012/main" xmlns:mc="http://schemas.openxmlformats.org/markup-compatibility/2006">
+<p:sldMaster xmlns:a="http://schemas.openxmlformats.org/drawingml/2006/main" xmlns:r="http://schemas.openxmlformats.org/officeDocument/2006/relationships" xmlns:p="http://schemas.openxmlformats.org/presentationml/2006/main">
   <p:cSld>
+    <p:bg>
+      <p:bgRef idx="1001">
+        <a:schemeClr val="bg1"/>
+      </p:bgRef>
+    </p:bg>
     <p:spTree>
       <p:nvGrpSpPr>
         <p:cNvPr id="1" name=""/>
@@ -3678,16 +3742,301 @@
   </p:cSld>
   <p:clrMap bg1="lt1" tx1="dk1" bg2="lt2" tx2="dk2" accent1="accent1" accent2="accent2" accent3="accent3" accent4="accent4" accent5="accent5" accent6="accent6" hlink="hlink" folHlink="folHlink"/>
   <p:sldLayoutIdLst>
-    <p:sldLayoutId id="2147483649" r:id="rId2"/>
-    <p:sldLayoutId id="2147483650" r:id="rId3"/>
-    <p:sldLayoutId id="2147483651" r:id="rId4"/>
+    <p:sldLayoutId id="2147483649" r:id="rId1"/>
+    <p:sldLayoutId id="2147483650" r:id="rId2"/>
+    <p:sldLayoutId id="2147483651" r:id="rId3"/>
   </p:sldLayoutIdLst>
+  <p:txStyles>
+    <p:titleStyle>
+      <a:lvl1pPr algn="l" defTabSz="914400" rtl="0" eaLnBrk="1" latinLnBrk="0" hangingPunct="1">
+        <a:lnSpc>
+          <a:spcPct val="90000"/>
+        </a:lnSpc>
+        <a:spcBef>
+          <a:spcPct val="0"/>
+        </a:spcBef>
+        <a:buNone/>
+        <a:defRPr sz="4400" kern="1200">
+          <a:solidFill>
+            <a:schemeClr val="tx1"/>
+          </a:solidFill>
+          <a:latin typeface="+mj-lt"/>
+          <a:ea typeface="+mj-ea"/>
+          <a:cs typeface="+mj-cs"/>
+        </a:defRPr>
+      </a:lvl1pPr>
+    </p:titleStyle>
+    <p:bodyStyle>
+      <a:lvl1pPr marL="228600" indent="-228600" algn="l" defTabSz="914400" rtl="0" eaLnBrk="1" latinLnBrk="0" hangingPunct="1">
+        <a:lnSpc>
+          <a:spcPct val="90000"/>
+        </a:lnSpc>
+        <a:spcBef>
+          <a:spcPts val="1000"/>
+        </a:spcBef>
+        <a:buFont typeface="Arial" panose="020B0604020202020204" pitchFamily="34" charset="0"/>
+        <a:buChar char="•"/>
+        <a:defRPr sz="2800" kern="1200">
+          <a:solidFill>
+            <a:schemeClr val="tx1"/>
+          </a:solidFill>
+          <a:latin typeface="+mn-lt"/>
+          <a:ea typeface="+mn-ea"/>
+          <a:cs typeface="+mn-cs"/>
+        </a:defRPr>
+      </a:lvl1pPr>
+      <a:lvl2pPr marL="685800" indent="-228600" algn="l" defTabSz="914400" rtl="0" eaLnBrk="1" latinLnBrk="0" hangingPunct="1">
+        <a:lnSpc>
+          <a:spcPct val="90000"/>
+        </a:lnSpc>
+        <a:spcBef>
+          <a:spcPts val="500"/>
+        </a:spcBef>
+        <a:buFont typeface="Arial" panose="020B0604020202020204" pitchFamily="34" charset="0"/>
+        <a:buChar char="•"/>
+        <a:defRPr sz="2400" kern="1200">
+          <a:solidFill>
+            <a:schemeClr val="tx1"/>
+          </a:solidFill>
+          <a:latin typeface="+mn-lt"/>
+          <a:ea typeface="+mn-ea"/>
+          <a:cs typeface="+mn-cs"/>
+        </a:defRPr>
+      </a:lvl2pPr>
+      <a:lvl3pPr marL="1143000" indent="-228600" algn="l" defTabSz="914400" rtl="0" eaLnBrk="1" latinLnBrk="0" hangingPunct="1">
+        <a:lnSpc>
+          <a:spcPct val="90000"/>
+        </a:lnSpc>
+        <a:spcBef>
+          <a:spcPts val="500"/>
+        </a:spcBef>
+        <a:buFont typeface="Arial" panose="020B0604020202020204" pitchFamily="34" charset="0"/>
+        <a:buChar char="•"/>
+        <a:defRPr sz="2000" kern="1200">
+          <a:solidFill>
+            <a:schemeClr val="tx1"/>
+          </a:solidFill>
+          <a:latin typeface="+mn-lt"/>
+          <a:ea typeface="+mn-ea"/>
+          <a:cs typeface="+mn-cs"/>
+        </a:defRPr>
+      </a:lvl3pPr>
+      <a:lvl4pPr marL="1600200" indent="-228600" algn="l" defTabSz="914400" rtl="0" eaLnBrk="1" latinLnBrk="0" hangingPunct="1">
+        <a:lnSpc>
+          <a:spcPct val="90000"/>
+        </a:lnSpc>
+        <a:spcBef>
+          <a:spcPts val="500"/>
+        </a:spcBef>
+        <a:buFont typeface="Arial" panose="020B0604020202020204" pitchFamily="34" charset="0"/>
+        <a:buChar char="•"/>
+        <a:defRPr sz="1800" kern="1200">
+          <a:solidFill>
+            <a:schemeClr val="tx1"/>
+          </a:solidFill>
+          <a:latin typeface="+mn-lt"/>
+          <a:ea typeface="+mn-ea"/>
+          <a:cs typeface="+mn-cs"/>
+        </a:defRPr>
+      </a:lvl4pPr>
+      <a:lvl5pPr marL="2057400" indent="-228600" algn="l" defTabSz="914400" rtl="0" eaLnBrk="1" latinLnBrk="0" hangingPunct="1">
+        <a:lnSpc>
+          <a:spcPct val="90000"/>
+        </a:lnSpc>
+        <a:spcBef>
+          <a:spcPts val="500"/>
+        </a:spcBef>
+        <a:buFont typeface="Arial" panose="020B0604020202020204" pitchFamily="34" charset="0"/>
+        <a:buChar char="•"/>
+        <a:defRPr sz="1800" kern="1200">
+          <a:solidFill>
+            <a:schemeClr val="tx1"/>
+          </a:solidFill>
+          <a:latin typeface="+mn-lt"/>
+          <a:ea typeface="+mn-ea"/>
+          <a:cs typeface="+mn-cs"/>
+        </a:defRPr>
+      </a:lvl5pPr>
+      <a:lvl6pPr marL="2514600" indent="-228600" algn="l" defTabSz="914400" rtl="0" eaLnBrk="1" latinLnBrk="0" hangingPunct="1">
+        <a:lnSpc>
+          <a:spcPct val="90000"/>
+        </a:lnSpc>
+        <a:spcBef>
+          <a:spcPts val="500"/>
+        </a:spcBef>
+        <a:buFont typeface="Arial" panose="020B0604020202020204" pitchFamily="34" charset="0"/>
+        <a:buChar char="•"/>
+        <a:defRPr sz="1800" kern="1200">
+          <a:solidFill>
+            <a:schemeClr val="tx1"/>
+          </a:solidFill>
+          <a:latin typeface="+mn-lt"/>
+          <a:ea typeface="+mn-ea"/>
+          <a:cs typeface="+mn-cs"/>
+        </a:defRPr>
+      </a:lvl6pPr>
+      <a:lvl7pPr marL="2971800" indent="-228600" algn="l" defTabSz="914400" rtl="0" eaLnBrk="1" latinLnBrk="0" hangingPunct="1">
+        <a:lnSpc>
+          <a:spcPct val="90000"/>
+        </a:lnSpc>
+        <a:spcBef>
+          <a:spcPts val="500"/>
+        </a:spcBef>
+        <a:buFont typeface="Arial" panose="020B0604020202020204" pitchFamily="34" charset="0"/>
+        <a:buChar char="•"/>
+        <a:defRPr sz="1800" kern="1200">
+          <a:solidFill>
+            <a:schemeClr val="tx1"/>
+          </a:solidFill>
+          <a:latin typeface="+mn-lt"/>
+          <a:ea typeface="+mn-ea"/>
+          <a:cs typeface="+mn-cs"/>
+        </a:defRPr>
+      </a:lvl7pPr>
+      <a:lvl8pPr marL="3429000" indent="-228600" algn="l" defTabSz="914400" rtl="0" eaLnBrk="1" latinLnBrk="0" hangingPunct="1">
+        <a:lnSpc>
+          <a:spcPct val="90000"/>
+        </a:lnSpc>
+        <a:spcBef>
+          <a:spcPts val="500"/>
+        </a:spcBef>
+        <a:buFont typeface="Arial" panose="020B0604020202020204" pitchFamily="34" charset="0"/>
+        <a:buChar char="•"/>
+        <a:defRPr sz="1800" kern="1200">
+          <a:solidFill>
+            <a:schemeClr val="tx1"/>
+          </a:solidFill>
+          <a:latin typeface="+mn-lt"/>
+          <a:ea typeface="+mn-ea"/>
+          <a:cs typeface="+mn-cs"/>
+        </a:defRPr>
+      </a:lvl8pPr>
+      <a:lvl9pPr marL="3886200" indent="-228600" algn="l" defTabSz="914400" rtl="0" eaLnBrk="1" latinLnBrk="0" hangingPunct="1">
+        <a:lnSpc>
+          <a:spcPct val="90000"/>
+        </a:lnSpc>
+        <a:spcBef>
+          <a:spcPts val="500"/>
+        </a:spcBef>
+        <a:buFont typeface="Arial" panose="020B0604020202020204" pitchFamily="34" charset="0"/>
+        <a:buChar char="•"/>
+        <a:defRPr sz="1800" kern="1200">
+          <a:solidFill>
+            <a:schemeClr val="tx1"/>
+          </a:solidFill>
+          <a:latin typeface="+mn-lt"/>
+          <a:ea typeface="+mn-ea"/>
+          <a:cs typeface="+mn-cs"/>
+        </a:defRPr>
+      </a:lvl9pPr>
+    </p:bodyStyle>
+    <p:otherStyle>
+      <a:defPPr>
+        <a:defRPr lang="en-US"/>
+      </a:defPPr>
+      <a:lvl1pPr marL="0" algn="l" defTabSz="914400" rtl="0" eaLnBrk="1" latinLnBrk="0" hangingPunct="1">
+        <a:defRPr sz="1800" kern="1200">
+          <a:solidFill>
+            <a:schemeClr val="tx1"/>
+          </a:solidFill>
+          <a:latin typeface="+mn-lt"/>
+          <a:ea typeface="+mn-ea"/>
+          <a:cs typeface="+mn-cs"/>
+        </a:defRPr>
+      </a:lvl1pPr>
+      <a:lvl2pPr marL="457200" algn="l" defTabSz="914400" rtl="0" eaLnBrk="1" latinLnBrk="0" hangingPunct="1">
+        <a:defRPr sz="1800" kern="1200">
+          <a:solidFill>
+            <a:schemeClr val="tx1"/>
+          </a:solidFill>
+          <a:latin typeface="+mn-lt"/>
+          <a:ea typeface="+mn-ea"/>
+          <a:cs typeface="+mn-cs"/>
+        </a:defRPr>
+      </a:lvl2pPr>
+      <a:lvl3pPr marL="914400" algn="l" defTabSz="914400" rtl="0" eaLnBrk="1" latinLnBrk="0" hangingPunct="1">
+        <a:defRPr sz="1800" kern="1200">
+          <a:solidFill>
+            <a:schemeClr val="tx1"/>
+          </a:solidFill>
+          <a:latin typeface="+mn-lt"/>
+          <a:ea typeface="+mn-ea"/>
+          <a:cs typeface="+mn-cs"/>
+        </a:defRPr>
+      </a:lvl3pPr>
+      <a:lvl4pPr marL="1371600" algn="l" defTabSz="914400" rtl="0" eaLnBrk="1" latinLnBrk="0" hangingPunct="1">
+        <a:defRPr sz="1800" kern="1200">
+          <a:solidFill>
+            <a:schemeClr val="tx1"/>
+          </a:solidFill>
+          <a:latin typeface="+mn-lt"/>
+          <a:ea typeface="+mn-ea"/>
+          <a:cs typeface="+mn-cs"/>
+        </a:defRPr>
+      </a:lvl4pPr>
+      <a:lvl5pPr marL="1828800" algn="l" defTabSz="914400" rtl="0" eaLnBrk="1" latinLnBrk="0" hangingPunct="1">
+        <a:defRPr sz="1800" kern="1200">
+          <a:solidFill>
+            <a:schemeClr val="tx1"/>
+          </a:solidFill>
+          <a:latin typeface="+mn-lt"/>
+          <a:ea typeface="+mn-ea"/>
+          <a:cs typeface="+mn-cs"/>
+        </a:defRPr>
+      </a:lvl5pPr>
+      <a:lvl6pPr marL="2286000" algn="l" defTabSz="914400" rtl="0" eaLnBrk="1" latinLnBrk="0" hangingPunct="1">
+        <a:defRPr sz="1800" kern="1200">
+          <a:solidFill>
+            <a:schemeClr val="tx1"/>
+          </a:solidFill>
+          <a:latin typeface="+mn-lt"/>
+          <a:ea typeface="+mn-ea"/>
+          <a:cs typeface="+mn-cs"/>
+        </a:defRPr>
+      </a:lvl6pPr>
+      <a:lvl7pPr marL="2743200" algn="l" defTabSz="914400" rtl="0" eaLnBrk="1" latinLnBrk="0" hangingPunct="1">
+        <a:defRPr sz="1800" kern="1200">
+          <a:solidFill>
+            <a:schemeClr val="tx1"/>
+          </a:solidFill>
+          <a:latin typeface="+mn-lt"/>
+          <a:ea typeface="+mn-ea"/>
+          <a:cs typeface="+mn-cs"/>
+        </a:defRPr>
+      </a:lvl7pPr>
+      <a:lvl8pPr marL="3200400" algn="l" defTabSz="914400" rtl="0" eaLnBrk="1" latinLnBrk="0" hangingPunct="1">
+        <a:defRPr sz="1800" kern="1200">
+          <a:solidFill>
+            <a:schemeClr val="tx1"/>
+          </a:solidFill>
+          <a:latin typeface="+mn-lt"/>
+          <a:ea typeface="+mn-ea"/>
+          <a:cs typeface="+mn-cs"/>
+        </a:defRPr>
+      </a:lvl8pPr>
+      <a:lvl9pPr marL="3657600" algn="l" defTabSz="914400" rtl="0" eaLnBrk="1" latinLnBrk="0" hangingPunct="1">
+        <a:defRPr sz="1800" kern="1200">
+          <a:solidFill>
+            <a:schemeClr val="tx1"/>
+          </a:solidFill>
+          <a:latin typeface="+mn-lt"/>
+          <a:ea typeface="+mn-ea"/>
+          <a:cs typeface="+mn-cs"/>
+        </a:defRPr>
+      </a:lvl9pPr>
+    </p:otherStyle>
+  </p:txStyles>
 </p:sldMaster>
 </file>
 
-<file path=ppt/slideMasters/slideMaster4.xml><?xml version="1.0" encoding="utf-8"?>
-<p:sldMaster xmlns:a="http://schemas.openxmlformats.org/drawingml/2006/main" xmlns:p="http://schemas.openxmlformats.org/presentationml/2006/main" xmlns:r="http://schemas.openxmlformats.org/officeDocument/2006/relationships" xmlns:p14="http://schemas.microsoft.com/office/powerpoint/2010/main" xmlns:p15="http://schemas.microsoft.com/office/powerpoint/2012/main" xmlns:mc="http://schemas.openxmlformats.org/markup-compatibility/2006">
+<file path=ppt/slideMasters/slideMaster2.xml><?xml version="1.0" encoding="utf-8"?>
+<p:sldMaster xmlns:a="http://schemas.openxmlformats.org/drawingml/2006/main" xmlns:r="http://schemas.openxmlformats.org/officeDocument/2006/relationships" xmlns:p="http://schemas.openxmlformats.org/presentationml/2006/main">
   <p:cSld>
+    <p:bg>
+      <p:bgRef idx="1001">
+        <a:schemeClr val="bg1"/>
+      </p:bgRef>
+    </p:bg>
     <p:spTree>
       <p:nvGrpSpPr>
         <p:cNvPr id="1" name=""/>
@@ -3704,7 +4053,7 @@
       </p:grpSpPr>
       <p:sp>
         <p:nvSpPr>
-          <p:cNvPr id="18" name=""/>
+          <p:cNvPr id="18" name="Flowchart: Document 17"/>
           <p:cNvSpPr/>
           <p:nvPr/>
         </p:nvSpPr>
@@ -4115,15 +4464,22 @@
           </a:effectLst>
         </p:spPr>
         <p:style>
-          <a:lnRef idx="0"/>
-          <a:fillRef idx="0"/>
-          <a:effectRef idx="0"/>
+          <a:lnRef idx="0">
+            <a:scrgbClr r="0" g="0" b="0"/>
+          </a:lnRef>
+          <a:fillRef idx="0">
+            <a:scrgbClr r="0" g="0" b="0"/>
+          </a:fillRef>
+          <a:effectRef idx="0">
+            <a:scrgbClr r="0" g="0" b="0"/>
+          </a:effectRef>
           <a:fontRef idx="minor"/>
         </p:style>
         <p:txBody>
           <a:bodyPr lIns="90000" tIns="45000" rIns="90000" bIns="45000" anchor="ctr">
             <a:spAutoFit/>
           </a:bodyPr>
+          <a:lstStyle/>
           <a:p>
             <a:endParaRPr lang="en-US" sz="1800" b="0" u="none" strike="noStrike">
               <a:solidFill>
@@ -4191,14 +4547,6 @@
               </a:rPr>
               <a:t>Click to edit the title text format</a:t>
             </a:r>
-            <a:endParaRPr lang="en-US" sz="3100" b="0" u="none" strike="noStrike">
-              <a:solidFill>
-                <a:srgbClr val="DD4100"/>
-              </a:solidFill>
-              <a:effectLst/>
-              <a:uFillTx/>
-              <a:latin typeface="Times New Roman"/>
-            </a:endParaRPr>
           </a:p>
         </p:txBody>
       </p:sp>
@@ -4391,14 +4739,6 @@
               </a:rPr>
               <a:t>Click to edit the outline text format</a:t>
             </a:r>
-            <a:endParaRPr lang="en-US" sz="2400" b="0" u="none" strike="noStrike">
-              <a:solidFill>
-                <a:srgbClr val="009BDD"/>
-              </a:solidFill>
-              <a:effectLst/>
-              <a:uFillTx/>
-              <a:latin typeface="Times New Roman"/>
-            </a:endParaRPr>
           </a:p>
           <a:p>
             <a:pPr marL="864000" lvl="1" indent="-324000" algn="l">
@@ -4423,14 +4763,6 @@
               </a:rPr>
               <a:t>Second Outline Level</a:t>
             </a:r>
-            <a:endParaRPr lang="en-US" sz="2100" b="0" u="none" strike="noStrike">
-              <a:solidFill>
-                <a:srgbClr val="009BDD"/>
-              </a:solidFill>
-              <a:effectLst/>
-              <a:uFillTx/>
-              <a:latin typeface="Times New Roman"/>
-            </a:endParaRPr>
           </a:p>
           <a:p>
             <a:pPr marL="1296000" lvl="2" indent="-288000" algn="l">
@@ -4455,14 +4787,6 @@
               </a:rPr>
               <a:t>Third Outline Level</a:t>
             </a:r>
-            <a:endParaRPr lang="en-US" sz="1800" b="0" u="none" strike="noStrike">
-              <a:solidFill>
-                <a:srgbClr val="009BDD"/>
-              </a:solidFill>
-              <a:effectLst/>
-              <a:uFillTx/>
-              <a:latin typeface="Times New Roman"/>
-            </a:endParaRPr>
           </a:p>
           <a:p>
             <a:pPr marL="1728000" lvl="3" indent="-216000" algn="l">
@@ -4487,14 +4811,6 @@
               </a:rPr>
               <a:t>Fourth Outline Level</a:t>
             </a:r>
-            <a:endParaRPr lang="en-US" sz="1500" b="0" u="none" strike="noStrike">
-              <a:solidFill>
-                <a:srgbClr val="009BDD"/>
-              </a:solidFill>
-              <a:effectLst/>
-              <a:uFillTx/>
-              <a:latin typeface="Times New Roman"/>
-            </a:endParaRPr>
           </a:p>
           <a:p>
             <a:pPr marL="2160000" lvl="4" indent="-216000" algn="l">
@@ -4519,14 +4835,6 @@
               </a:rPr>
               <a:t>Fifth Outline Level</a:t>
             </a:r>
-            <a:endParaRPr lang="en-US" sz="1500" b="0" u="none" strike="noStrike">
-              <a:solidFill>
-                <a:srgbClr val="009BDD"/>
-              </a:solidFill>
-              <a:effectLst/>
-              <a:uFillTx/>
-              <a:latin typeface="Times New Roman"/>
-            </a:endParaRPr>
           </a:p>
           <a:p>
             <a:pPr marL="2592000" lvl="5" indent="-216000" algn="l">
@@ -4551,14 +4859,6 @@
               </a:rPr>
               <a:t>Sixth Outline Level</a:t>
             </a:r>
-            <a:endParaRPr lang="en-US" sz="1500" b="0" u="none" strike="noStrike">
-              <a:solidFill>
-                <a:srgbClr val="009BDD"/>
-              </a:solidFill>
-              <a:effectLst/>
-              <a:uFillTx/>
-              <a:latin typeface="Times New Roman"/>
-            </a:endParaRPr>
           </a:p>
           <a:p>
             <a:pPr marL="3024000" lvl="6" indent="-216000" algn="l">
@@ -4583,14 +4883,6 @@
               </a:rPr>
               <a:t>Seventh Outline Level</a:t>
             </a:r>
-            <a:endParaRPr lang="en-US" sz="1500" b="0" u="none" strike="noStrike">
-              <a:solidFill>
-                <a:srgbClr val="009BDD"/>
-              </a:solidFill>
-              <a:effectLst/>
-              <a:uFillTx/>
-              <a:latin typeface="Times New Roman"/>
-            </a:endParaRPr>
           </a:p>
         </p:txBody>
       </p:sp>
@@ -4649,14 +4941,6 @@
               </a:rPr>
               <a:t>&lt;date/time&gt;</a:t>
             </a:r>
-            <a:endParaRPr lang="en-US" sz="1400" b="0" u="none" strike="noStrike">
-              <a:solidFill>
-                <a:srgbClr val="FFFFFF"/>
-              </a:solidFill>
-              <a:effectLst/>
-              <a:uFillTx/>
-              <a:latin typeface="Times New Roman"/>
-            </a:endParaRPr>
           </a:p>
         </p:txBody>
       </p:sp>
@@ -4715,14 +4999,6 @@
               </a:rPr>
               <a:t>&lt;footer&gt;</a:t>
             </a:r>
-            <a:endParaRPr lang="en-US" sz="1400" b="0" u="none" strike="noStrike">
-              <a:solidFill>
-                <a:srgbClr val="FFFFFF"/>
-              </a:solidFill>
-              <a:effectLst/>
-              <a:uFillTx/>
-              <a:latin typeface="Times New Roman"/>
-            </a:endParaRPr>
           </a:p>
         </p:txBody>
       </p:sp>
@@ -4779,7 +5055,7 @@
                 <a:uFillTx/>
                 <a:latin typeface="Times New Roman"/>
               </a:rPr>
-              <a:t>&lt;number&gt;</a:t>
+              <a:t>‹#›</a:t>
             </a:fld>
             <a:endParaRPr lang="en-US" sz="1400" b="0" u="none" strike="noStrike">
               <a:solidFill>
@@ -4796,15 +5072,295 @@
   </p:cSld>
   <p:clrMap bg1="lt1" tx1="dk1" bg2="lt2" tx2="dk2" accent1="accent1" accent2="accent2" accent3="accent3" accent4="accent4" accent5="accent5" accent6="accent6" hlink="hlink" folHlink="folHlink"/>
   <p:sldLayoutIdLst>
-    <p:sldLayoutId id="2147483653" r:id="rId2"/>
-    <p:sldLayoutId id="2147483654" r:id="rId3"/>
-    <p:sldLayoutId id="2147483655" r:id="rId4"/>
+    <p:sldLayoutId id="2147483653" r:id="rId1"/>
+    <p:sldLayoutId id="2147483654" r:id="rId2"/>
+    <p:sldLayoutId id="2147483655" r:id="rId3"/>
   </p:sldLayoutIdLst>
+  <p:txStyles>
+    <p:titleStyle>
+      <a:lvl1pPr algn="l" defTabSz="914400" rtl="0" eaLnBrk="1" latinLnBrk="0" hangingPunct="1">
+        <a:lnSpc>
+          <a:spcPct val="90000"/>
+        </a:lnSpc>
+        <a:spcBef>
+          <a:spcPct val="0"/>
+        </a:spcBef>
+        <a:buNone/>
+        <a:defRPr sz="4400" kern="1200">
+          <a:solidFill>
+            <a:schemeClr val="tx1"/>
+          </a:solidFill>
+          <a:latin typeface="+mj-lt"/>
+          <a:ea typeface="+mj-ea"/>
+          <a:cs typeface="+mj-cs"/>
+        </a:defRPr>
+      </a:lvl1pPr>
+    </p:titleStyle>
+    <p:bodyStyle>
+      <a:lvl1pPr marL="228600" indent="-228600" algn="l" defTabSz="914400" rtl="0" eaLnBrk="1" latinLnBrk="0" hangingPunct="1">
+        <a:lnSpc>
+          <a:spcPct val="90000"/>
+        </a:lnSpc>
+        <a:spcBef>
+          <a:spcPts val="1000"/>
+        </a:spcBef>
+        <a:buFont typeface="Arial" panose="020B0604020202020204" pitchFamily="34" charset="0"/>
+        <a:buChar char="•"/>
+        <a:defRPr sz="2800" kern="1200">
+          <a:solidFill>
+            <a:schemeClr val="tx1"/>
+          </a:solidFill>
+          <a:latin typeface="+mn-lt"/>
+          <a:ea typeface="+mn-ea"/>
+          <a:cs typeface="+mn-cs"/>
+        </a:defRPr>
+      </a:lvl1pPr>
+      <a:lvl2pPr marL="685800" indent="-228600" algn="l" defTabSz="914400" rtl="0" eaLnBrk="1" latinLnBrk="0" hangingPunct="1">
+        <a:lnSpc>
+          <a:spcPct val="90000"/>
+        </a:lnSpc>
+        <a:spcBef>
+          <a:spcPts val="500"/>
+        </a:spcBef>
+        <a:buFont typeface="Arial" panose="020B0604020202020204" pitchFamily="34" charset="0"/>
+        <a:buChar char="•"/>
+        <a:defRPr sz="2400" kern="1200">
+          <a:solidFill>
+            <a:schemeClr val="tx1"/>
+          </a:solidFill>
+          <a:latin typeface="+mn-lt"/>
+          <a:ea typeface="+mn-ea"/>
+          <a:cs typeface="+mn-cs"/>
+        </a:defRPr>
+      </a:lvl2pPr>
+      <a:lvl3pPr marL="1143000" indent="-228600" algn="l" defTabSz="914400" rtl="0" eaLnBrk="1" latinLnBrk="0" hangingPunct="1">
+        <a:lnSpc>
+          <a:spcPct val="90000"/>
+        </a:lnSpc>
+        <a:spcBef>
+          <a:spcPts val="500"/>
+        </a:spcBef>
+        <a:buFont typeface="Arial" panose="020B0604020202020204" pitchFamily="34" charset="0"/>
+        <a:buChar char="•"/>
+        <a:defRPr sz="2000" kern="1200">
+          <a:solidFill>
+            <a:schemeClr val="tx1"/>
+          </a:solidFill>
+          <a:latin typeface="+mn-lt"/>
+          <a:ea typeface="+mn-ea"/>
+          <a:cs typeface="+mn-cs"/>
+        </a:defRPr>
+      </a:lvl3pPr>
+      <a:lvl4pPr marL="1600200" indent="-228600" algn="l" defTabSz="914400" rtl="0" eaLnBrk="1" latinLnBrk="0" hangingPunct="1">
+        <a:lnSpc>
+          <a:spcPct val="90000"/>
+        </a:lnSpc>
+        <a:spcBef>
+          <a:spcPts val="500"/>
+        </a:spcBef>
+        <a:buFont typeface="Arial" panose="020B0604020202020204" pitchFamily="34" charset="0"/>
+        <a:buChar char="•"/>
+        <a:defRPr sz="1800" kern="1200">
+          <a:solidFill>
+            <a:schemeClr val="tx1"/>
+          </a:solidFill>
+          <a:latin typeface="+mn-lt"/>
+          <a:ea typeface="+mn-ea"/>
+          <a:cs typeface="+mn-cs"/>
+        </a:defRPr>
+      </a:lvl4pPr>
+      <a:lvl5pPr marL="2057400" indent="-228600" algn="l" defTabSz="914400" rtl="0" eaLnBrk="1" latinLnBrk="0" hangingPunct="1">
+        <a:lnSpc>
+          <a:spcPct val="90000"/>
+        </a:lnSpc>
+        <a:spcBef>
+          <a:spcPts val="500"/>
+        </a:spcBef>
+        <a:buFont typeface="Arial" panose="020B0604020202020204" pitchFamily="34" charset="0"/>
+        <a:buChar char="•"/>
+        <a:defRPr sz="1800" kern="1200">
+          <a:solidFill>
+            <a:schemeClr val="tx1"/>
+          </a:solidFill>
+          <a:latin typeface="+mn-lt"/>
+          <a:ea typeface="+mn-ea"/>
+          <a:cs typeface="+mn-cs"/>
+        </a:defRPr>
+      </a:lvl5pPr>
+      <a:lvl6pPr marL="2514600" indent="-228600" algn="l" defTabSz="914400" rtl="0" eaLnBrk="1" latinLnBrk="0" hangingPunct="1">
+        <a:lnSpc>
+          <a:spcPct val="90000"/>
+        </a:lnSpc>
+        <a:spcBef>
+          <a:spcPts val="500"/>
+        </a:spcBef>
+        <a:buFont typeface="Arial" panose="020B0604020202020204" pitchFamily="34" charset="0"/>
+        <a:buChar char="•"/>
+        <a:defRPr sz="1800" kern="1200">
+          <a:solidFill>
+            <a:schemeClr val="tx1"/>
+          </a:solidFill>
+          <a:latin typeface="+mn-lt"/>
+          <a:ea typeface="+mn-ea"/>
+          <a:cs typeface="+mn-cs"/>
+        </a:defRPr>
+      </a:lvl6pPr>
+      <a:lvl7pPr marL="2971800" indent="-228600" algn="l" defTabSz="914400" rtl="0" eaLnBrk="1" latinLnBrk="0" hangingPunct="1">
+        <a:lnSpc>
+          <a:spcPct val="90000"/>
+        </a:lnSpc>
+        <a:spcBef>
+          <a:spcPts val="500"/>
+        </a:spcBef>
+        <a:buFont typeface="Arial" panose="020B0604020202020204" pitchFamily="34" charset="0"/>
+        <a:buChar char="•"/>
+        <a:defRPr sz="1800" kern="1200">
+          <a:solidFill>
+            <a:schemeClr val="tx1"/>
+          </a:solidFill>
+          <a:latin typeface="+mn-lt"/>
+          <a:ea typeface="+mn-ea"/>
+          <a:cs typeface="+mn-cs"/>
+        </a:defRPr>
+      </a:lvl7pPr>
+      <a:lvl8pPr marL="3429000" indent="-228600" algn="l" defTabSz="914400" rtl="0" eaLnBrk="1" latinLnBrk="0" hangingPunct="1">
+        <a:lnSpc>
+          <a:spcPct val="90000"/>
+        </a:lnSpc>
+        <a:spcBef>
+          <a:spcPts val="500"/>
+        </a:spcBef>
+        <a:buFont typeface="Arial" panose="020B0604020202020204" pitchFamily="34" charset="0"/>
+        <a:buChar char="•"/>
+        <a:defRPr sz="1800" kern="1200">
+          <a:solidFill>
+            <a:schemeClr val="tx1"/>
+          </a:solidFill>
+          <a:latin typeface="+mn-lt"/>
+          <a:ea typeface="+mn-ea"/>
+          <a:cs typeface="+mn-cs"/>
+        </a:defRPr>
+      </a:lvl8pPr>
+      <a:lvl9pPr marL="3886200" indent="-228600" algn="l" defTabSz="914400" rtl="0" eaLnBrk="1" latinLnBrk="0" hangingPunct="1">
+        <a:lnSpc>
+          <a:spcPct val="90000"/>
+        </a:lnSpc>
+        <a:spcBef>
+          <a:spcPts val="500"/>
+        </a:spcBef>
+        <a:buFont typeface="Arial" panose="020B0604020202020204" pitchFamily="34" charset="0"/>
+        <a:buChar char="•"/>
+        <a:defRPr sz="1800" kern="1200">
+          <a:solidFill>
+            <a:schemeClr val="tx1"/>
+          </a:solidFill>
+          <a:latin typeface="+mn-lt"/>
+          <a:ea typeface="+mn-ea"/>
+          <a:cs typeface="+mn-cs"/>
+        </a:defRPr>
+      </a:lvl9pPr>
+    </p:bodyStyle>
+    <p:otherStyle>
+      <a:defPPr>
+        <a:defRPr lang="en-US"/>
+      </a:defPPr>
+      <a:lvl1pPr marL="0" algn="l" defTabSz="914400" rtl="0" eaLnBrk="1" latinLnBrk="0" hangingPunct="1">
+        <a:defRPr sz="1800" kern="1200">
+          <a:solidFill>
+            <a:schemeClr val="tx1"/>
+          </a:solidFill>
+          <a:latin typeface="+mn-lt"/>
+          <a:ea typeface="+mn-ea"/>
+          <a:cs typeface="+mn-cs"/>
+        </a:defRPr>
+      </a:lvl1pPr>
+      <a:lvl2pPr marL="457200" algn="l" defTabSz="914400" rtl="0" eaLnBrk="1" latinLnBrk="0" hangingPunct="1">
+        <a:defRPr sz="1800" kern="1200">
+          <a:solidFill>
+            <a:schemeClr val="tx1"/>
+          </a:solidFill>
+          <a:latin typeface="+mn-lt"/>
+          <a:ea typeface="+mn-ea"/>
+          <a:cs typeface="+mn-cs"/>
+        </a:defRPr>
+      </a:lvl2pPr>
+      <a:lvl3pPr marL="914400" algn="l" defTabSz="914400" rtl="0" eaLnBrk="1" latinLnBrk="0" hangingPunct="1">
+        <a:defRPr sz="1800" kern="1200">
+          <a:solidFill>
+            <a:schemeClr val="tx1"/>
+          </a:solidFill>
+          <a:latin typeface="+mn-lt"/>
+          <a:ea typeface="+mn-ea"/>
+          <a:cs typeface="+mn-cs"/>
+        </a:defRPr>
+      </a:lvl3pPr>
+      <a:lvl4pPr marL="1371600" algn="l" defTabSz="914400" rtl="0" eaLnBrk="1" latinLnBrk="0" hangingPunct="1">
+        <a:defRPr sz="1800" kern="1200">
+          <a:solidFill>
+            <a:schemeClr val="tx1"/>
+          </a:solidFill>
+          <a:latin typeface="+mn-lt"/>
+          <a:ea typeface="+mn-ea"/>
+          <a:cs typeface="+mn-cs"/>
+        </a:defRPr>
+      </a:lvl4pPr>
+      <a:lvl5pPr marL="1828800" algn="l" defTabSz="914400" rtl="0" eaLnBrk="1" latinLnBrk="0" hangingPunct="1">
+        <a:defRPr sz="1800" kern="1200">
+          <a:solidFill>
+            <a:schemeClr val="tx1"/>
+          </a:solidFill>
+          <a:latin typeface="+mn-lt"/>
+          <a:ea typeface="+mn-ea"/>
+          <a:cs typeface="+mn-cs"/>
+        </a:defRPr>
+      </a:lvl5pPr>
+      <a:lvl6pPr marL="2286000" algn="l" defTabSz="914400" rtl="0" eaLnBrk="1" latinLnBrk="0" hangingPunct="1">
+        <a:defRPr sz="1800" kern="1200">
+          <a:solidFill>
+            <a:schemeClr val="tx1"/>
+          </a:solidFill>
+          <a:latin typeface="+mn-lt"/>
+          <a:ea typeface="+mn-ea"/>
+          <a:cs typeface="+mn-cs"/>
+        </a:defRPr>
+      </a:lvl6pPr>
+      <a:lvl7pPr marL="2743200" algn="l" defTabSz="914400" rtl="0" eaLnBrk="1" latinLnBrk="0" hangingPunct="1">
+        <a:defRPr sz="1800" kern="1200">
+          <a:solidFill>
+            <a:schemeClr val="tx1"/>
+          </a:solidFill>
+          <a:latin typeface="+mn-lt"/>
+          <a:ea typeface="+mn-ea"/>
+          <a:cs typeface="+mn-cs"/>
+        </a:defRPr>
+      </a:lvl7pPr>
+      <a:lvl8pPr marL="3200400" algn="l" defTabSz="914400" rtl="0" eaLnBrk="1" latinLnBrk="0" hangingPunct="1">
+        <a:defRPr sz="1800" kern="1200">
+          <a:solidFill>
+            <a:schemeClr val="tx1"/>
+          </a:solidFill>
+          <a:latin typeface="+mn-lt"/>
+          <a:ea typeface="+mn-ea"/>
+          <a:cs typeface="+mn-cs"/>
+        </a:defRPr>
+      </a:lvl8pPr>
+      <a:lvl9pPr marL="3657600" algn="l" defTabSz="914400" rtl="0" eaLnBrk="1" latinLnBrk="0" hangingPunct="1">
+        <a:defRPr sz="1800" kern="1200">
+          <a:solidFill>
+            <a:schemeClr val="tx1"/>
+          </a:solidFill>
+          <a:latin typeface="+mn-lt"/>
+          <a:ea typeface="+mn-ea"/>
+          <a:cs typeface="+mn-cs"/>
+        </a:defRPr>
+      </a:lvl9pPr>
+    </p:otherStyle>
+  </p:txStyles>
 </p:sldMaster>
 </file>
 
 <file path=ppt/slides/slide1.xml><?xml version="1.0" encoding="utf-8"?>
-<p:sld xmlns:a="http://schemas.openxmlformats.org/drawingml/2006/main" xmlns:p="http://schemas.openxmlformats.org/presentationml/2006/main" xmlns:r="http://schemas.openxmlformats.org/officeDocument/2006/relationships" xmlns:p14="http://schemas.microsoft.com/office/powerpoint/2010/main" xmlns:p15="http://schemas.microsoft.com/office/powerpoint/2012/main" xmlns:mc="http://schemas.openxmlformats.org/markup-compatibility/2006">
+<p:sld xmlns:a="http://schemas.openxmlformats.org/drawingml/2006/main" xmlns:r="http://schemas.openxmlformats.org/officeDocument/2006/relationships" xmlns:p="http://schemas.openxmlformats.org/presentationml/2006/main">
   <p:cSld>
     <p:spTree>
       <p:nvGrpSpPr>
@@ -4847,6 +5403,7 @@
           <a:bodyPr lIns="0" tIns="0" rIns="0" bIns="0" anchor="ctr">
             <a:spAutoFit/>
           </a:bodyPr>
+          <a:lstStyle/>
           <a:p>
             <a:pPr indent="0" algn="ctr" defTabSz="914400">
               <a:lnSpc>
@@ -4907,6 +5464,7 @@
           <a:bodyPr lIns="0" tIns="0" rIns="0" bIns="0" anchor="ctr">
             <a:spAutoFit/>
           </a:bodyPr>
+          <a:lstStyle/>
           <a:p>
             <a:pPr marL="228600" indent="0" algn="ctr" defTabSz="914400">
               <a:lnSpc>
@@ -4985,19 +5543,14 @@
       </p:sp>
     </p:spTree>
   </p:cSld>
-  <mc:AlternateContent>
-    <mc:Choice Requires="p14">
-      <p:transition spd="slow" p14:dur="2000"/>
-    </mc:Choice>
-    <mc:Fallback>
-      <p:transition spd="slow"/>
-    </mc:Fallback>
-  </mc:AlternateContent>
+  <p:clrMapOvr>
+    <a:masterClrMapping/>
+  </p:clrMapOvr>
 </p:sld>
 </file>
 
 <file path=ppt/slides/slide10.xml><?xml version="1.0" encoding="utf-8"?>
-<p:sld xmlns:a="http://schemas.openxmlformats.org/drawingml/2006/main" xmlns:p="http://schemas.openxmlformats.org/presentationml/2006/main" xmlns:r="http://schemas.openxmlformats.org/officeDocument/2006/relationships" xmlns:p14="http://schemas.microsoft.com/office/powerpoint/2010/main" xmlns:p15="http://schemas.microsoft.com/office/powerpoint/2012/main" xmlns:mc="http://schemas.openxmlformats.org/markup-compatibility/2006">
+<p:sld xmlns:a="http://schemas.openxmlformats.org/drawingml/2006/main" xmlns:r="http://schemas.openxmlformats.org/officeDocument/2006/relationships" xmlns:p="http://schemas.openxmlformats.org/presentationml/2006/main">
   <p:cSld>
     <p:spTree>
       <p:nvGrpSpPr>
@@ -5040,6 +5593,7 @@
           <a:bodyPr lIns="0" tIns="0" rIns="0" bIns="0" anchor="ctr">
             <a:noAutofit/>
           </a:bodyPr>
+          <a:lstStyle/>
           <a:p>
             <a:pPr indent="0" algn="ctr" defTabSz="914400">
               <a:lnSpc>
@@ -5080,7 +5634,7 @@
           <p:nvPr/>
         </p:nvPicPr>
         <p:blipFill>
-          <a:blip r:embed="rId1"/>
+          <a:blip r:embed="rId2"/>
           <a:stretch/>
         </p:blipFill>
         <p:spPr>
@@ -5099,19 +5653,14 @@
       </p:pic>
     </p:spTree>
   </p:cSld>
-  <mc:AlternateContent>
-    <mc:Choice Requires="p14">
-      <p:transition spd="slow" p14:dur="2000"/>
-    </mc:Choice>
-    <mc:Fallback>
-      <p:transition spd="slow"/>
-    </mc:Fallback>
-  </mc:AlternateContent>
+  <p:clrMapOvr>
+    <a:masterClrMapping/>
+  </p:clrMapOvr>
 </p:sld>
 </file>
 
 <file path=ppt/slides/slide11.xml><?xml version="1.0" encoding="utf-8"?>
-<p:sld xmlns:a="http://schemas.openxmlformats.org/drawingml/2006/main" xmlns:p="http://schemas.openxmlformats.org/presentationml/2006/main" xmlns:r="http://schemas.openxmlformats.org/officeDocument/2006/relationships" xmlns:p14="http://schemas.microsoft.com/office/powerpoint/2010/main" xmlns:p15="http://schemas.microsoft.com/office/powerpoint/2012/main" xmlns:mc="http://schemas.openxmlformats.org/markup-compatibility/2006" show="0">
+<p:sld xmlns:a="http://schemas.openxmlformats.org/drawingml/2006/main" xmlns:r="http://schemas.openxmlformats.org/officeDocument/2006/relationships" xmlns:p="http://schemas.openxmlformats.org/presentationml/2006/main" show="0">
   <p:cSld>
     <p:spTree>
       <p:nvGrpSpPr>
@@ -5154,6 +5703,7 @@
           <a:bodyPr lIns="0" tIns="0" rIns="0" bIns="0" anchor="ctr">
             <a:noAutofit/>
           </a:bodyPr>
+          <a:lstStyle/>
           <a:p>
             <a:pPr indent="0" algn="ctr" defTabSz="914400">
               <a:lnSpc>
@@ -5214,6 +5764,7 @@
           <a:bodyPr lIns="0" tIns="0" rIns="0" bIns="0" anchor="ctr">
             <a:noAutofit/>
           </a:bodyPr>
+          <a:lstStyle/>
           <a:p>
             <a:pPr marL="228600" indent="-228600" algn="l" defTabSz="914400">
               <a:lnSpc>
@@ -5452,19 +6003,14 @@
       </p:sp>
     </p:spTree>
   </p:cSld>
-  <mc:AlternateContent>
-    <mc:Choice Requires="p14">
-      <p:transition spd="slow" p14:dur="2000"/>
-    </mc:Choice>
-    <mc:Fallback>
-      <p:transition spd="slow"/>
-    </mc:Fallback>
-  </mc:AlternateContent>
+  <p:clrMapOvr>
+    <a:masterClrMapping/>
+  </p:clrMapOvr>
 </p:sld>
 </file>
 
 <file path=ppt/slides/slide12.xml><?xml version="1.0" encoding="utf-8"?>
-<p:sld xmlns:a="http://schemas.openxmlformats.org/drawingml/2006/main" xmlns:p="http://schemas.openxmlformats.org/presentationml/2006/main" xmlns:r="http://schemas.openxmlformats.org/officeDocument/2006/relationships" xmlns:p14="http://schemas.microsoft.com/office/powerpoint/2010/main" xmlns:p15="http://schemas.microsoft.com/office/powerpoint/2012/main" xmlns:mc="http://schemas.openxmlformats.org/markup-compatibility/2006">
+<p:sld xmlns:a="http://schemas.openxmlformats.org/drawingml/2006/main" xmlns:r="http://schemas.openxmlformats.org/officeDocument/2006/relationships" xmlns:p="http://schemas.openxmlformats.org/presentationml/2006/main">
   <p:cSld>
     <p:spTree>
       <p:nvGrpSpPr>
@@ -5507,6 +6053,7 @@
           <a:bodyPr lIns="0" tIns="0" rIns="0" bIns="0" anchor="ctr">
             <a:spAutoFit/>
           </a:bodyPr>
+          <a:lstStyle/>
           <a:p>
             <a:pPr indent="0" algn="ctr" defTabSz="914400">
               <a:lnSpc>
@@ -5567,6 +6114,7 @@
           <a:bodyPr lIns="0" tIns="0" rIns="0" bIns="0" anchor="t">
             <a:normAutofit/>
           </a:bodyPr>
+          <a:lstStyle/>
           <a:p>
             <a:pPr marL="228600" indent="0" algn="l" defTabSz="914400">
               <a:lnSpc>
@@ -5746,19 +6294,14 @@
       </p:sp>
     </p:spTree>
   </p:cSld>
-  <mc:AlternateContent>
-    <mc:Choice Requires="p14">
-      <p:transition spd="slow" p14:dur="2000"/>
-    </mc:Choice>
-    <mc:Fallback>
-      <p:transition spd="slow"/>
-    </mc:Fallback>
-  </mc:AlternateContent>
+  <p:clrMapOvr>
+    <a:masterClrMapping/>
+  </p:clrMapOvr>
 </p:sld>
 </file>
 
 <file path=ppt/slides/slide13.xml><?xml version="1.0" encoding="utf-8"?>
-<p:sld xmlns:a="http://schemas.openxmlformats.org/drawingml/2006/main" xmlns:p="http://schemas.openxmlformats.org/presentationml/2006/main" xmlns:r="http://schemas.openxmlformats.org/officeDocument/2006/relationships" xmlns:p14="http://schemas.microsoft.com/office/powerpoint/2010/main" xmlns:p15="http://schemas.microsoft.com/office/powerpoint/2012/main" xmlns:mc="http://schemas.openxmlformats.org/markup-compatibility/2006">
+<p:sld xmlns:a="http://schemas.openxmlformats.org/drawingml/2006/main" xmlns:r="http://schemas.openxmlformats.org/officeDocument/2006/relationships" xmlns:p="http://schemas.openxmlformats.org/presentationml/2006/main">
   <p:cSld>
     <p:spTree>
       <p:nvGrpSpPr>
@@ -5801,6 +6344,7 @@
           <a:bodyPr lIns="0" tIns="0" rIns="0" bIns="0" anchor="ctr">
             <a:noAutofit/>
           </a:bodyPr>
+          <a:lstStyle/>
           <a:p>
             <a:pPr indent="0" algn="ctr" defTabSz="914400">
               <a:lnSpc>
@@ -5821,19 +6365,7 @@
                 <a:latin typeface="Arial"/>
                 <a:ea typeface="DejaVu Sans"/>
               </a:rPr>
-              <a:t>Next Steps</a:t>
-            </a:r>
-            <a:r>
-              <a:rPr lang="en-US" sz="4400" b="0" u="none" strike="noStrike">
-                <a:solidFill>
-                  <a:srgbClr val="000000"/>
-                </a:solidFill>
-                <a:effectLst/>
-                <a:uFillTx/>
-                <a:latin typeface="Arial"/>
-                <a:ea typeface="DejaVu Sans"/>
-              </a:rPr>
-              <a:t>	</a:t>
+              <a:t>Next Steps	</a:t>
             </a:r>
             <a:endParaRPr lang="en-US" sz="4400" b="0" u="none" strike="noStrike">
               <a:solidFill>
@@ -5873,6 +6405,7 @@
           <a:bodyPr lIns="0" tIns="0" rIns="0" bIns="0" anchor="ctr">
             <a:noAutofit/>
           </a:bodyPr>
+          <a:lstStyle/>
           <a:p>
             <a:pPr marL="228600" indent="-228600" algn="l" defTabSz="914400">
               <a:lnSpc>
@@ -5938,19 +6471,14 @@
       </p:sp>
     </p:spTree>
   </p:cSld>
-  <mc:AlternateContent>
-    <mc:Choice Requires="p14">
-      <p:transition spd="slow" p14:dur="2000"/>
-    </mc:Choice>
-    <mc:Fallback>
-      <p:transition spd="slow"/>
-    </mc:Fallback>
-  </mc:AlternateContent>
+  <p:clrMapOvr>
+    <a:masterClrMapping/>
+  </p:clrMapOvr>
 </p:sld>
 </file>
 
 <file path=ppt/slides/slide14.xml><?xml version="1.0" encoding="utf-8"?>
-<p:sld xmlns:a="http://schemas.openxmlformats.org/drawingml/2006/main" xmlns:p="http://schemas.openxmlformats.org/presentationml/2006/main" xmlns:r="http://schemas.openxmlformats.org/officeDocument/2006/relationships" xmlns:p14="http://schemas.microsoft.com/office/powerpoint/2010/main" xmlns:p15="http://schemas.microsoft.com/office/powerpoint/2012/main" xmlns:mc="http://schemas.openxmlformats.org/markup-compatibility/2006">
+<p:sld xmlns:a="http://schemas.openxmlformats.org/drawingml/2006/main" xmlns:r="http://schemas.openxmlformats.org/officeDocument/2006/relationships" xmlns:p="http://schemas.openxmlformats.org/presentationml/2006/main">
   <p:cSld>
     <p:spTree>
       <p:nvGrpSpPr>
@@ -5993,6 +6521,7 @@
           <a:bodyPr lIns="0" tIns="0" rIns="0" bIns="0" anchor="ctr">
             <a:spAutoFit/>
           </a:bodyPr>
+          <a:lstStyle/>
           <a:p>
             <a:pPr indent="0" algn="ctr" defTabSz="914400">
               <a:lnSpc>
@@ -6028,19 +6557,14 @@
       </p:sp>
     </p:spTree>
   </p:cSld>
-  <mc:AlternateContent>
-    <mc:Choice Requires="p14">
-      <p:transition spd="slow" p14:dur="2000"/>
-    </mc:Choice>
-    <mc:Fallback>
-      <p:transition spd="slow"/>
-    </mc:Fallback>
-  </mc:AlternateContent>
+  <p:clrMapOvr>
+    <a:masterClrMapping/>
+  </p:clrMapOvr>
 </p:sld>
 </file>
 
 <file path=ppt/slides/slide15.xml><?xml version="1.0" encoding="utf-8"?>
-<p:sld xmlns:a="http://schemas.openxmlformats.org/drawingml/2006/main" xmlns:p="http://schemas.openxmlformats.org/presentationml/2006/main" xmlns:r="http://schemas.openxmlformats.org/officeDocument/2006/relationships" xmlns:p14="http://schemas.microsoft.com/office/powerpoint/2010/main" xmlns:p15="http://schemas.microsoft.com/office/powerpoint/2012/main" xmlns:mc="http://schemas.openxmlformats.org/markup-compatibility/2006">
+<p:sld xmlns:a="http://schemas.openxmlformats.org/drawingml/2006/main" xmlns:r="http://schemas.openxmlformats.org/officeDocument/2006/relationships" xmlns:p="http://schemas.openxmlformats.org/presentationml/2006/main">
   <p:cSld>
     <p:spTree>
       <p:nvGrpSpPr>
@@ -6083,6 +6607,7 @@
           <a:bodyPr lIns="0" tIns="0" rIns="0" bIns="0" anchor="ctr">
             <a:noAutofit/>
           </a:bodyPr>
+          <a:lstStyle/>
           <a:p>
             <a:pPr indent="0" algn="ctr" defTabSz="914400">
               <a:lnSpc>
@@ -6118,19 +6643,14 @@
       </p:sp>
     </p:spTree>
   </p:cSld>
-  <mc:AlternateContent>
-    <mc:Choice Requires="p14">
-      <p:transition spd="slow" p14:dur="2000"/>
-    </mc:Choice>
-    <mc:Fallback>
-      <p:transition spd="slow"/>
-    </mc:Fallback>
-  </mc:AlternateContent>
+  <p:clrMapOvr>
+    <a:masterClrMapping/>
+  </p:clrMapOvr>
 </p:sld>
 </file>
 
 <file path=ppt/slides/slide16.xml><?xml version="1.0" encoding="utf-8"?>
-<p:sld xmlns:a="http://schemas.openxmlformats.org/drawingml/2006/main" xmlns:p="http://schemas.openxmlformats.org/presentationml/2006/main" xmlns:r="http://schemas.openxmlformats.org/officeDocument/2006/relationships" xmlns:p14="http://schemas.microsoft.com/office/powerpoint/2010/main" xmlns:p15="http://schemas.microsoft.com/office/powerpoint/2012/main" xmlns:mc="http://schemas.openxmlformats.org/markup-compatibility/2006">
+<p:sld xmlns:a="http://schemas.openxmlformats.org/drawingml/2006/main" xmlns:r="http://schemas.openxmlformats.org/officeDocument/2006/relationships" xmlns:p="http://schemas.openxmlformats.org/presentationml/2006/main">
   <p:cSld>
     <p:spTree>
       <p:nvGrpSpPr>
@@ -6173,6 +6693,7 @@
           <a:bodyPr lIns="0" tIns="0" rIns="0" bIns="0" anchor="ctr">
             <a:noAutofit/>
           </a:bodyPr>
+          <a:lstStyle/>
           <a:p>
             <a:pPr indent="0" algn="ctr" defTabSz="914400">
               <a:lnSpc>
@@ -6233,6 +6754,7 @@
           <a:bodyPr lIns="0" tIns="0" rIns="0" bIns="0" anchor="t">
             <a:normAutofit fontScale="85000" lnSpcReduction="9999"/>
           </a:bodyPr>
+          <a:lstStyle/>
           <a:p>
             <a:pPr marL="432000" indent="-324000" algn="l" defTabSz="914400">
               <a:lnSpc>
@@ -6574,6 +7096,7 @@
           <a:bodyPr lIns="0" tIns="0" rIns="0" bIns="0" anchor="t">
             <a:normAutofit fontScale="85000" lnSpcReduction="9999"/>
           </a:bodyPr>
+          <a:lstStyle/>
           <a:p>
             <a:pPr marL="432000" indent="-324000" algn="l" defTabSz="914400">
               <a:lnSpc>
@@ -6870,19 +7393,14 @@
       </p:sp>
     </p:spTree>
   </p:cSld>
-  <mc:AlternateContent>
-    <mc:Choice Requires="p14">
-      <p:transition spd="slow" p14:dur="2000"/>
-    </mc:Choice>
-    <mc:Fallback>
-      <p:transition spd="slow"/>
-    </mc:Fallback>
-  </mc:AlternateContent>
+  <p:clrMapOvr>
+    <a:masterClrMapping/>
+  </p:clrMapOvr>
 </p:sld>
 </file>
 
 <file path=ppt/slides/slide2.xml><?xml version="1.0" encoding="utf-8"?>
-<p:sld xmlns:a="http://schemas.openxmlformats.org/drawingml/2006/main" xmlns:p="http://schemas.openxmlformats.org/presentationml/2006/main" xmlns:r="http://schemas.openxmlformats.org/officeDocument/2006/relationships" xmlns:p14="http://schemas.microsoft.com/office/powerpoint/2010/main" xmlns:p15="http://schemas.microsoft.com/office/powerpoint/2012/main" xmlns:mc="http://schemas.openxmlformats.org/markup-compatibility/2006">
+<p:sld xmlns:a="http://schemas.openxmlformats.org/drawingml/2006/main" xmlns:r="http://schemas.openxmlformats.org/officeDocument/2006/relationships" xmlns:p="http://schemas.openxmlformats.org/presentationml/2006/main">
   <p:cSld>
     <p:spTree>
       <p:nvGrpSpPr>
@@ -6925,6 +7443,7 @@
           <a:bodyPr lIns="0" tIns="0" rIns="0" bIns="0" anchor="ctr">
             <a:spAutoFit/>
           </a:bodyPr>
+          <a:lstStyle/>
           <a:p>
             <a:pPr indent="0" algn="ctr" defTabSz="914400">
               <a:lnSpc>
@@ -6985,6 +7504,7 @@
           <a:bodyPr lIns="0" tIns="0" rIns="0" bIns="0" anchor="t">
             <a:normAutofit/>
           </a:bodyPr>
+          <a:lstStyle/>
           <a:p>
             <a:pPr marL="432000" indent="-324000" algn="l" defTabSz="914400">
               <a:lnSpc>
@@ -7028,19 +7548,14 @@
       </p:sp>
     </p:spTree>
   </p:cSld>
-  <mc:AlternateContent>
-    <mc:Choice Requires="p14">
-      <p:transition spd="slow" p14:dur="2000"/>
-    </mc:Choice>
-    <mc:Fallback>
-      <p:transition spd="slow"/>
-    </mc:Fallback>
-  </mc:AlternateContent>
+  <p:clrMapOvr>
+    <a:masterClrMapping/>
+  </p:clrMapOvr>
 </p:sld>
 </file>
 
 <file path=ppt/slides/slide3.xml><?xml version="1.0" encoding="utf-8"?>
-<p:sld xmlns:a="http://schemas.openxmlformats.org/drawingml/2006/main" xmlns:p="http://schemas.openxmlformats.org/presentationml/2006/main" xmlns:r="http://schemas.openxmlformats.org/officeDocument/2006/relationships" xmlns:p14="http://schemas.microsoft.com/office/powerpoint/2010/main" xmlns:p15="http://schemas.microsoft.com/office/powerpoint/2012/main" xmlns:mc="http://schemas.openxmlformats.org/markup-compatibility/2006">
+<p:sld xmlns:a="http://schemas.openxmlformats.org/drawingml/2006/main" xmlns:r="http://schemas.openxmlformats.org/officeDocument/2006/relationships" xmlns:p="http://schemas.openxmlformats.org/presentationml/2006/main">
   <p:cSld>
     <p:spTree>
       <p:nvGrpSpPr>
@@ -7083,6 +7598,7 @@
           <a:bodyPr lIns="0" tIns="0" rIns="0" bIns="0" anchor="ctr">
             <a:spAutoFit/>
           </a:bodyPr>
+          <a:lstStyle/>
           <a:p>
             <a:pPr indent="0" algn="ctr" defTabSz="914400">
               <a:lnSpc>
@@ -7143,6 +7659,7 @@
           <a:bodyPr lIns="0" tIns="0" rIns="0" bIns="0" anchor="t">
             <a:normAutofit fontScale="55000" lnSpcReduction="19999"/>
           </a:bodyPr>
+          <a:lstStyle/>
           <a:p>
             <a:pPr marL="108000" indent="-228600" algn="l" defTabSz="914400">
               <a:lnSpc>
@@ -7363,19 +7880,14 @@
       </p:sp>
     </p:spTree>
   </p:cSld>
-  <mc:AlternateContent>
-    <mc:Choice Requires="p14">
-      <p:transition spd="slow" p14:dur="2000"/>
-    </mc:Choice>
-    <mc:Fallback>
-      <p:transition spd="slow"/>
-    </mc:Fallback>
-  </mc:AlternateContent>
+  <p:clrMapOvr>
+    <a:masterClrMapping/>
+  </p:clrMapOvr>
 </p:sld>
 </file>
 
 <file path=ppt/slides/slide4.xml><?xml version="1.0" encoding="utf-8"?>
-<p:sld xmlns:a="http://schemas.openxmlformats.org/drawingml/2006/main" xmlns:p="http://schemas.openxmlformats.org/presentationml/2006/main" xmlns:r="http://schemas.openxmlformats.org/officeDocument/2006/relationships" xmlns:p14="http://schemas.microsoft.com/office/powerpoint/2010/main" xmlns:p15="http://schemas.microsoft.com/office/powerpoint/2012/main" xmlns:mc="http://schemas.openxmlformats.org/markup-compatibility/2006">
+<p:sld xmlns:a="http://schemas.openxmlformats.org/drawingml/2006/main" xmlns:r="http://schemas.openxmlformats.org/officeDocument/2006/relationships" xmlns:p="http://schemas.openxmlformats.org/presentationml/2006/main">
   <p:cSld>
     <p:spTree>
       <p:nvGrpSpPr>
@@ -7418,6 +7930,7 @@
           <a:bodyPr lIns="0" tIns="0" rIns="0" bIns="0" anchor="ctr">
             <a:noAutofit/>
           </a:bodyPr>
+          <a:lstStyle/>
           <a:p>
             <a:pPr indent="0" algn="ctr" defTabSz="914400">
               <a:lnSpc>
@@ -7478,6 +7991,7 @@
           <a:bodyPr lIns="0" tIns="0" rIns="0" bIns="0" anchor="t">
             <a:normAutofit/>
           </a:bodyPr>
+          <a:lstStyle/>
           <a:p>
             <a:pPr marL="432000" indent="0" algn="l">
               <a:spcBef>
@@ -7485,7 +7999,7 @@
               </a:spcBef>
               <a:buNone/>
             </a:pPr>
-            <a:endParaRPr lang="en-US" sz="1400" b="0" u="none" strike="noStrike">
+            <a:endParaRPr lang="en-US" sz="1400" b="0" u="none" strike="noStrike" dirty="0">
               <a:solidFill>
                 <a:srgbClr val="009BDD"/>
               </a:solidFill>
@@ -7500,14 +8014,14 @@
                 <a:spcPts val="1060"/>
               </a:spcBef>
               <a:buClr>
-                <a:srgbClr val="77CAEE"/>
+                <a:schemeClr val="tx1"/>
               </a:buClr>
               <a:buSzPct val="45000"/>
               <a:buFont typeface="Wingdings" charset="2"/>
               <a:buChar char=""/>
             </a:pPr>
             <a:r>
-              <a:rPr lang="en-US" sz="1400" b="0" u="none" strike="noStrike">
+              <a:rPr lang="en-US" sz="1400" b="0" u="none" strike="noStrike" dirty="0">
                 <a:solidFill>
                   <a:srgbClr val="000000"/>
                 </a:solidFill>
@@ -7518,7 +8032,7 @@
               </a:rPr>
               <a:t>Data used was from the website Kaggle.com.</a:t>
             </a:r>
-            <a:endParaRPr lang="en-US" sz="1400" b="0" u="none" strike="noStrike">
+            <a:endParaRPr lang="en-US" sz="1400" b="0" u="none" strike="noStrike" dirty="0">
               <a:solidFill>
                 <a:srgbClr val="009BDD"/>
               </a:solidFill>
@@ -7533,14 +8047,14 @@
                 <a:spcPts val="850"/>
               </a:spcBef>
               <a:buClr>
-                <a:srgbClr val="77CAEE"/>
+                <a:schemeClr val="tx1"/>
               </a:buClr>
               <a:buSzPct val="45000"/>
               <a:buFont typeface="Wingdings" charset="2"/>
               <a:buChar char=""/>
             </a:pPr>
             <a:r>
-              <a:rPr lang="en-US" sz="1400" b="0" u="none" strike="noStrike">
+              <a:rPr lang="en-US" sz="1400" b="0" u="none" strike="noStrike" dirty="0">
                 <a:solidFill>
                   <a:srgbClr val="000000"/>
                 </a:solidFill>
@@ -7551,7 +8065,7 @@
               </a:rPr>
               <a:t>The data was compiled from multiple dealerships. </a:t>
             </a:r>
-            <a:endParaRPr lang="en-US" sz="1400" b="0" u="none" strike="noStrike">
+            <a:endParaRPr lang="en-US" sz="1400" b="0" u="none" strike="noStrike" dirty="0">
               <a:solidFill>
                 <a:srgbClr val="009BDD"/>
               </a:solidFill>
@@ -7572,14 +8086,14 @@
                 <a:spcPts val="992"/>
               </a:spcAft>
               <a:buClr>
-                <a:srgbClr val="77CAEE"/>
+                <a:schemeClr val="tx1"/>
               </a:buClr>
               <a:buSzPct val="45000"/>
               <a:buFont typeface="Wingdings" charset="2"/>
               <a:buChar char=""/>
             </a:pPr>
             <a:r>
-              <a:rPr lang="en-US" sz="1400" b="0" u="none" strike="noStrike">
+              <a:rPr lang="en-US" sz="1400" b="0" u="none" strike="noStrike" dirty="0">
                 <a:solidFill>
                   <a:srgbClr val="000000"/>
                 </a:solidFill>
@@ -7590,7 +8104,7 @@
               </a:rPr>
               <a:t>Nearly all used car sales data from 2015</a:t>
             </a:r>
-            <a:endParaRPr lang="en-US" sz="1400" b="0" u="none" strike="noStrike">
+            <a:endParaRPr lang="en-US" sz="1400" b="0" u="none" strike="noStrike" dirty="0">
               <a:solidFill>
                 <a:srgbClr val="009BDD"/>
               </a:solidFill>
@@ -7611,14 +8125,14 @@
                 <a:spcPts val="992"/>
               </a:spcAft>
               <a:buClr>
-                <a:srgbClr val="77CAEE"/>
+                <a:schemeClr val="tx1"/>
               </a:buClr>
               <a:buSzPct val="45000"/>
               <a:buFont typeface="Wingdings" charset="2"/>
               <a:buChar char=""/>
             </a:pPr>
             <a:r>
-              <a:rPr lang="en-US" sz="1400" b="0" u="none" strike="noStrike">
+              <a:rPr lang="en-US" sz="1400" b="0" u="none" strike="noStrike" dirty="0">
                 <a:solidFill>
                   <a:srgbClr val="000000"/>
                 </a:solidFill>
@@ -7629,7 +8143,7 @@
               </a:rPr>
               <a:t>Vehicle years range from 1996 to 2015</a:t>
             </a:r>
-            <a:endParaRPr lang="en-US" sz="1400" b="0" u="none" strike="noStrike">
+            <a:endParaRPr lang="en-US" sz="1400" b="0" u="none" strike="noStrike" dirty="0">
               <a:solidFill>
                 <a:srgbClr val="009BDD"/>
               </a:solidFill>
@@ -7650,14 +8164,14 @@
                 <a:spcPts val="992"/>
               </a:spcAft>
               <a:buClr>
-                <a:srgbClr val="77CAEE"/>
+                <a:schemeClr val="tx1"/>
               </a:buClr>
               <a:buSzPct val="45000"/>
               <a:buFont typeface="Wingdings" charset="2"/>
               <a:buChar char=""/>
             </a:pPr>
             <a:r>
-              <a:rPr lang="en-US" sz="1400" b="0" u="none" strike="noStrike">
+              <a:rPr lang="en-US" sz="1400" b="0" u="none" strike="noStrike" dirty="0">
                 <a:solidFill>
                   <a:srgbClr val="000000"/>
                 </a:solidFill>
@@ -7668,7 +8182,7 @@
               </a:rPr>
               <a:t>Contains sales data from 34 different states in the US</a:t>
             </a:r>
-            <a:endParaRPr lang="en-US" sz="1400" b="0" u="none" strike="noStrike">
+            <a:endParaRPr lang="en-US" sz="1400" b="0" u="none" strike="noStrike" dirty="0">
               <a:solidFill>
                 <a:srgbClr val="009BDD"/>
               </a:solidFill>
@@ -7689,14 +8203,14 @@
                 <a:spcPts val="992"/>
               </a:spcAft>
               <a:buClr>
-                <a:srgbClr val="77CAEE"/>
+                <a:schemeClr val="tx1"/>
               </a:buClr>
               <a:buSzPct val="45000"/>
               <a:buFont typeface="Wingdings" charset="2"/>
               <a:buChar char=""/>
             </a:pPr>
             <a:r>
-              <a:rPr lang="en-US" sz="1400" b="0" u="none" strike="noStrike">
+              <a:rPr lang="en-US" sz="1400" b="0" u="none" strike="noStrike" dirty="0">
                 <a:solidFill>
                   <a:srgbClr val="000000"/>
                 </a:solidFill>
@@ -7707,7 +8221,7 @@
               </a:rPr>
               <a:t>Main data points were vehicle age, odometer, condition, model</a:t>
             </a:r>
-            <a:endParaRPr lang="en-US" sz="1400" b="0" u="none" strike="noStrike">
+            <a:endParaRPr lang="en-US" sz="1400" b="0" u="none" strike="noStrike" dirty="0">
               <a:solidFill>
                 <a:srgbClr val="009BDD"/>
               </a:solidFill>
@@ -7728,14 +8242,14 @@
                 <a:spcPts val="992"/>
               </a:spcAft>
               <a:buClr>
-                <a:srgbClr val="77CAEE"/>
+                <a:schemeClr val="tx1"/>
               </a:buClr>
               <a:buSzPct val="45000"/>
               <a:buFont typeface="Wingdings" charset="2"/>
               <a:buChar char=""/>
             </a:pPr>
             <a:r>
-              <a:rPr lang="en-US" sz="1400" b="0" u="none" strike="noStrike">
+              <a:rPr lang="en-US" sz="1400" b="0" u="none" strike="noStrike" dirty="0">
                 <a:solidFill>
                   <a:srgbClr val="000000"/>
                 </a:solidFill>
@@ -7746,7 +8260,7 @@
               </a:rPr>
               <a:t>Cleaned data contained over 470,000 transactions</a:t>
             </a:r>
-            <a:endParaRPr lang="en-US" sz="1400" b="0" u="none" strike="noStrike">
+            <a:endParaRPr lang="en-US" sz="1400" b="0" u="none" strike="noStrike" dirty="0">
               <a:solidFill>
                 <a:srgbClr val="009BDD"/>
               </a:solidFill>
@@ -7768,7 +8282,7 @@
               </a:spcAft>
               <a:buNone/>
             </a:pPr>
-            <a:endParaRPr lang="en-US" sz="1400" b="0" u="none" strike="noStrike">
+            <a:endParaRPr lang="en-US" sz="1400" b="0" u="none" strike="noStrike" dirty="0">
               <a:solidFill>
                 <a:srgbClr val="009BDD"/>
               </a:solidFill>
@@ -7786,7 +8300,7 @@
           <p:nvPr/>
         </p:nvPicPr>
         <p:blipFill>
-          <a:blip r:embed="rId1"/>
+          <a:blip r:embed="rId2"/>
           <a:stretch/>
         </p:blipFill>
         <p:spPr>
@@ -7805,19 +8319,14 @@
       </p:pic>
     </p:spTree>
   </p:cSld>
-  <mc:AlternateContent>
-    <mc:Choice Requires="p14">
-      <p:transition spd="slow" p14:dur="2000"/>
-    </mc:Choice>
-    <mc:Fallback>
-      <p:transition spd="slow"/>
-    </mc:Fallback>
-  </mc:AlternateContent>
+  <p:clrMapOvr>
+    <a:masterClrMapping/>
+  </p:clrMapOvr>
 </p:sld>
 </file>
 
 <file path=ppt/slides/slide5.xml><?xml version="1.0" encoding="utf-8"?>
-<p:sld xmlns:a="http://schemas.openxmlformats.org/drawingml/2006/main" xmlns:p="http://schemas.openxmlformats.org/presentationml/2006/main" xmlns:r="http://schemas.openxmlformats.org/officeDocument/2006/relationships" xmlns:p14="http://schemas.microsoft.com/office/powerpoint/2010/main" xmlns:p15="http://schemas.microsoft.com/office/powerpoint/2012/main" xmlns:mc="http://schemas.openxmlformats.org/markup-compatibility/2006">
+<p:sld xmlns:a="http://schemas.openxmlformats.org/drawingml/2006/main" xmlns:r="http://schemas.openxmlformats.org/officeDocument/2006/relationships" xmlns:p="http://schemas.openxmlformats.org/presentationml/2006/main">
   <p:cSld>
     <p:spTree>
       <p:nvGrpSpPr>
@@ -7860,6 +8369,7 @@
           <a:bodyPr lIns="0" tIns="0" rIns="0" bIns="0" anchor="ctr">
             <a:spAutoFit/>
           </a:bodyPr>
+          <a:lstStyle/>
           <a:p>
             <a:pPr indent="0" algn="ctr" defTabSz="914400">
               <a:lnSpc>
@@ -7920,6 +8430,7 @@
           <a:bodyPr lIns="0" tIns="0" rIns="0" bIns="0" anchor="t">
             <a:noAutofit/>
           </a:bodyPr>
+          <a:lstStyle/>
           <a:p>
             <a:pPr marL="432000" indent="-324000" algn="l" defTabSz="914400">
               <a:lnSpc>
@@ -7939,18 +8450,42 @@
               <a:buChar char=""/>
             </a:pPr>
             <a:r>
-              <a:rPr lang="en-US" sz="1200" b="0" u="none" strike="noStrike">
-                <a:solidFill>
-                  <a:srgbClr val="000000"/>
-                </a:solidFill>
-                <a:effectLst/>
-                <a:uFillTx/>
-                <a:latin typeface="Arial"/>
-                <a:ea typeface="DejaVu Sans"/>
-              </a:rPr>
-              <a:t>Normalized make: ‘ford truck’, ‘ford tk’ changed to ‘ford’</a:t>
-            </a:r>
-            <a:endParaRPr lang="en-US" sz="1200" b="0" u="none" strike="noStrike">
+              <a:rPr lang="en-US" sz="1200" b="0" u="none" strike="noStrike" dirty="0">
+                <a:solidFill>
+                  <a:srgbClr val="000000"/>
+                </a:solidFill>
+                <a:effectLst/>
+                <a:uFillTx/>
+                <a:latin typeface="Arial"/>
+                <a:ea typeface="DejaVu Sans"/>
+              </a:rPr>
+              <a:t>Normalized make: ‘ford truck’, ‘ford </a:t>
+            </a:r>
+            <a:r>
+              <a:rPr lang="en-US" sz="1200" b="0" u="none" strike="noStrike" dirty="0" err="1">
+                <a:solidFill>
+                  <a:srgbClr val="000000"/>
+                </a:solidFill>
+                <a:effectLst/>
+                <a:uFillTx/>
+                <a:latin typeface="Arial"/>
+                <a:ea typeface="DejaVu Sans"/>
+              </a:rPr>
+              <a:t>tk</a:t>
+            </a:r>
+            <a:r>
+              <a:rPr lang="en-US" sz="1200" b="0" u="none" strike="noStrike" dirty="0">
+                <a:solidFill>
+                  <a:srgbClr val="000000"/>
+                </a:solidFill>
+                <a:effectLst/>
+                <a:uFillTx/>
+                <a:latin typeface="Arial"/>
+                <a:ea typeface="DejaVu Sans"/>
+              </a:rPr>
+              <a:t>’ changed to ‘ford’</a:t>
+            </a:r>
+            <a:endParaRPr lang="en-US" sz="1200" b="0" u="none" strike="noStrike" dirty="0">
               <a:solidFill>
                 <a:srgbClr val="009BDD"/>
               </a:solidFill>
@@ -7978,18 +8513,42 @@
               <a:buChar char=""/>
             </a:pPr>
             <a:r>
-              <a:rPr lang="en-US" sz="1200" b="0" u="none" strike="noStrike">
-                <a:solidFill>
-                  <a:srgbClr val="000000"/>
-                </a:solidFill>
-                <a:effectLst/>
-                <a:uFillTx/>
-                <a:latin typeface="Arial"/>
-                <a:ea typeface="DejaVu Sans"/>
-              </a:rPr>
-              <a:t>Normalized body: model specifies bodies such as ‘cts coupe’ and ‘g37 convertible’ changed to ‘coupe’ and ‘convertible’</a:t>
-            </a:r>
-            <a:endParaRPr lang="en-US" sz="1200" b="0" u="none" strike="noStrike">
+              <a:rPr lang="en-US" sz="1200" b="0" u="none" strike="noStrike" dirty="0">
+                <a:solidFill>
+                  <a:srgbClr val="000000"/>
+                </a:solidFill>
+                <a:effectLst/>
+                <a:uFillTx/>
+                <a:latin typeface="Arial"/>
+                <a:ea typeface="DejaVu Sans"/>
+              </a:rPr>
+              <a:t>Normalized body: model specifies bodies such as ‘</a:t>
+            </a:r>
+            <a:r>
+              <a:rPr lang="en-US" sz="1200" b="0" u="none" strike="noStrike" dirty="0" err="1">
+                <a:solidFill>
+                  <a:srgbClr val="000000"/>
+                </a:solidFill>
+                <a:effectLst/>
+                <a:uFillTx/>
+                <a:latin typeface="Arial"/>
+                <a:ea typeface="DejaVu Sans"/>
+              </a:rPr>
+              <a:t>cts</a:t>
+            </a:r>
+            <a:r>
+              <a:rPr lang="en-US" sz="1200" b="0" u="none" strike="noStrike" dirty="0">
+                <a:solidFill>
+                  <a:srgbClr val="000000"/>
+                </a:solidFill>
+                <a:effectLst/>
+                <a:uFillTx/>
+                <a:latin typeface="Arial"/>
+                <a:ea typeface="DejaVu Sans"/>
+              </a:rPr>
+              <a:t> coupe’ and ‘g37 convertible’ changed to ‘coupe’ and ‘convertible’</a:t>
+            </a:r>
+            <a:endParaRPr lang="en-US" sz="1200" b="0" u="none" strike="noStrike" dirty="0">
               <a:solidFill>
                 <a:srgbClr val="009BDD"/>
               </a:solidFill>
@@ -8017,7 +8576,7 @@
               <a:buChar char=""/>
             </a:pPr>
             <a:r>
-              <a:rPr lang="en-US" sz="1200" b="0" u="none" strike="noStrike">
+              <a:rPr lang="en-US" sz="1200" b="0" u="none" strike="noStrike" dirty="0">
                 <a:solidFill>
                   <a:srgbClr val="000000"/>
                 </a:solidFill>
@@ -8028,7 +8587,7 @@
               </a:rPr>
               <a:t>Dropped nulls, removed extra spacing/characters, and lowercased various columns for consistency</a:t>
             </a:r>
-            <a:endParaRPr lang="en-US" sz="1200" b="0" u="none" strike="noStrike">
+            <a:endParaRPr lang="en-US" sz="1200" b="0" u="none" strike="noStrike" dirty="0">
               <a:solidFill>
                 <a:srgbClr val="009BDD"/>
               </a:solidFill>
@@ -8056,7 +8615,7 @@
               <a:buChar char=""/>
             </a:pPr>
             <a:r>
-              <a:rPr lang="en-US" sz="1200" b="0" u="none" strike="noStrike">
+              <a:rPr lang="en-US" sz="1200" b="0" u="none" strike="noStrike" dirty="0">
                 <a:solidFill>
                   <a:srgbClr val="000000"/>
                 </a:solidFill>
@@ -8067,7 +8626,7 @@
               </a:rPr>
               <a:t>Normalized colors to consistent values and converted any values like ‘-’ to ‘unknown’</a:t>
             </a:r>
-            <a:endParaRPr lang="en-US" sz="1200" b="0" u="none" strike="noStrike">
+            <a:endParaRPr lang="en-US" sz="1200" b="0" u="none" strike="noStrike" dirty="0">
               <a:solidFill>
                 <a:srgbClr val="009BDD"/>
               </a:solidFill>
@@ -8095,7 +8654,7 @@
               <a:buChar char=""/>
             </a:pPr>
             <a:r>
-              <a:rPr lang="en-US" sz="1200" b="0" u="none" strike="noStrike">
+              <a:rPr lang="en-US" sz="1200" b="0" u="none" strike="noStrike" dirty="0">
                 <a:solidFill>
                   <a:srgbClr val="000000"/>
                 </a:solidFill>
@@ -8106,7 +8665,7 @@
               </a:rPr>
               <a:t>Calculated age of vehicle at time of sale by pulling the sale year out of the sell date and manufacture year of vehicle</a:t>
             </a:r>
-            <a:endParaRPr lang="en-US" sz="1200" b="0" u="none" strike="noStrike">
+            <a:endParaRPr lang="en-US" sz="1200" b="0" u="none" strike="noStrike" dirty="0">
               <a:solidFill>
                 <a:srgbClr val="009BDD"/>
               </a:solidFill>
@@ -8134,7 +8693,7 @@
               <a:buChar char=""/>
             </a:pPr>
             <a:r>
-              <a:rPr lang="en-US" sz="1200" b="0" u="none" strike="noStrike">
+              <a:rPr lang="en-US" sz="1200" b="0" u="none" strike="noStrike" dirty="0">
                 <a:solidFill>
                   <a:srgbClr val="000000"/>
                 </a:solidFill>
@@ -8145,7 +8704,7 @@
               </a:rPr>
               <a:t>Dropped redundant features for multicollinearity – make, body</a:t>
             </a:r>
-            <a:endParaRPr lang="en-US" sz="1200" b="0" u="none" strike="noStrike">
+            <a:endParaRPr lang="en-US" sz="1200" b="0" u="none" strike="noStrike" dirty="0">
               <a:solidFill>
                 <a:srgbClr val="009BDD"/>
               </a:solidFill>
@@ -8173,7 +8732,7 @@
               <a:buChar char=""/>
             </a:pPr>
             <a:r>
-              <a:rPr lang="en-US" sz="1200" b="0" u="none" strike="noStrike">
+              <a:rPr lang="en-US" sz="1200" b="0" u="none" strike="noStrike" dirty="0">
                 <a:solidFill>
                   <a:srgbClr val="000000"/>
                 </a:solidFill>
@@ -8184,7 +8743,7 @@
               </a:rPr>
               <a:t>Transmission and color were ignored due to insignificance</a:t>
             </a:r>
-            <a:endParaRPr lang="en-US" sz="1200" b="0" u="none" strike="noStrike">
+            <a:endParaRPr lang="en-US" sz="1200" b="0" u="none" strike="noStrike" dirty="0">
               <a:solidFill>
                 <a:srgbClr val="009BDD"/>
               </a:solidFill>
@@ -8212,7 +8771,7 @@
               <a:buChar char=""/>
             </a:pPr>
             <a:r>
-              <a:rPr lang="en-US" sz="1200" b="0" u="none" strike="noStrike">
+              <a:rPr lang="en-US" sz="1200" b="0" u="none" strike="noStrike" dirty="0">
                 <a:solidFill>
                   <a:srgbClr val="000000"/>
                 </a:solidFill>
@@ -8223,17 +8782,16 @@
               </a:rPr>
               <a:t>MMR (Manheim Market Report) was dropped as it was essentially an estimate of the value that we are modeling</a:t>
             </a:r>
-            <a:endParaRPr lang="en-US" sz="1200" b="0" u="none" strike="noStrike">
-              <a:solidFill>
-                <a:srgbClr val="009BDD"/>
-              </a:solidFill>
-              <a:effectLst/>
-              <a:uFillTx/>
-              <a:latin typeface="Times New Roman"/>
-            </a:endParaRPr>
-          </a:p>
-          <a:p>
-            <a:pPr marL="108000" indent="-324000" algn="l" defTabSz="914400">
+            <a:endParaRPr lang="en-US" sz="1200" dirty="0">
+              <a:solidFill>
+                <a:srgbClr val="000000"/>
+              </a:solidFill>
+              <a:latin typeface="Arial"/>
+              <a:ea typeface="DejaVu Sans"/>
+            </a:endParaRPr>
+          </a:p>
+          <a:p>
+            <a:pPr marL="432000" indent="-324000" algn="l" defTabSz="914400">
               <a:lnSpc>
                 <a:spcPct val="40000"/>
               </a:lnSpc>
@@ -8251,7 +8809,7 @@
               <a:buChar char=""/>
             </a:pPr>
             <a:r>
-              <a:rPr lang="en-US" sz="1200" b="0" u="none" strike="noStrike">
+              <a:rPr lang="en-US" sz="1200" b="0" u="none" strike="noStrike" dirty="0">
                 <a:solidFill>
                   <a:srgbClr val="000000"/>
                 </a:solidFill>
@@ -8263,7 +8821,7 @@
               <a:t>After cleaning the data, our analysis and conclusions were based on </a:t>
             </a:r>
             <a:r>
-              <a:rPr lang="en-US" sz="1200" b="1" u="none" strike="noStrike">
+              <a:rPr lang="en-US" sz="1200" b="1" u="none" strike="noStrike" dirty="0">
                 <a:solidFill>
                   <a:srgbClr val="000000"/>
                 </a:solidFill>
@@ -8275,7 +8833,7 @@
               <a:t>1700</a:t>
             </a:r>
             <a:r>
-              <a:rPr lang="en-US" sz="1200" b="0" u="none" strike="noStrike">
+              <a:rPr lang="en-US" sz="1200" b="0" u="none" strike="noStrike" dirty="0">
                 <a:solidFill>
                   <a:srgbClr val="000000"/>
                 </a:solidFill>
@@ -8286,7 +8844,7 @@
               </a:rPr>
               <a:t> observations from the state of Utah.</a:t>
             </a:r>
-            <a:endParaRPr lang="en-US" sz="1200" b="0" u="none" strike="noStrike">
+            <a:endParaRPr lang="en-US" sz="1200" b="0" u="none" strike="noStrike" dirty="0">
               <a:solidFill>
                 <a:srgbClr val="009BDD"/>
               </a:solidFill>
@@ -8308,7 +8866,7 @@
               </a:spcAft>
               <a:buNone/>
             </a:pPr>
-            <a:endParaRPr lang="en-US" sz="1200" b="0" u="none" strike="noStrike">
+            <a:endParaRPr lang="en-US" sz="1200" b="0" u="none" strike="noStrike" dirty="0">
               <a:solidFill>
                 <a:srgbClr val="009BDD"/>
               </a:solidFill>
@@ -8321,19 +8879,14 @@
       </p:sp>
     </p:spTree>
   </p:cSld>
-  <mc:AlternateContent>
-    <mc:Choice Requires="p14">
-      <p:transition spd="slow" p14:dur="2000"/>
-    </mc:Choice>
-    <mc:Fallback>
-      <p:transition spd="slow"/>
-    </mc:Fallback>
-  </mc:AlternateContent>
+  <p:clrMapOvr>
+    <a:masterClrMapping/>
+  </p:clrMapOvr>
 </p:sld>
 </file>
 
 <file path=ppt/slides/slide6.xml><?xml version="1.0" encoding="utf-8"?>
-<p:sld xmlns:a="http://schemas.openxmlformats.org/drawingml/2006/main" xmlns:p="http://schemas.openxmlformats.org/presentationml/2006/main" xmlns:r="http://schemas.openxmlformats.org/officeDocument/2006/relationships" xmlns:p14="http://schemas.microsoft.com/office/powerpoint/2010/main" xmlns:p15="http://schemas.microsoft.com/office/powerpoint/2012/main" xmlns:mc="http://schemas.openxmlformats.org/markup-compatibility/2006">
+<p:sld xmlns:a="http://schemas.openxmlformats.org/drawingml/2006/main" xmlns:r="http://schemas.openxmlformats.org/officeDocument/2006/relationships" xmlns:p="http://schemas.openxmlformats.org/presentationml/2006/main">
   <p:cSld>
     <p:spTree>
       <p:nvGrpSpPr>
@@ -8376,6 +8929,7 @@
           <a:bodyPr lIns="0" tIns="0" rIns="0" bIns="0" anchor="ctr">
             <a:noAutofit/>
           </a:bodyPr>
+          <a:lstStyle/>
           <a:p>
             <a:pPr indent="0" algn="ctr" defTabSz="914400">
               <a:lnSpc>
@@ -8416,7 +8970,7 @@
           <p:nvPr/>
         </p:nvPicPr>
         <p:blipFill>
-          <a:blip r:embed="rId1"/>
+          <a:blip r:embed="rId3"/>
           <a:stretch/>
         </p:blipFill>
         <p:spPr>
@@ -8440,7 +8994,7 @@
           <p:nvPr/>
         </p:nvPicPr>
         <p:blipFill>
-          <a:blip r:embed="rId2"/>
+          <a:blip r:embed="rId4"/>
           <a:stretch/>
         </p:blipFill>
         <p:spPr>
@@ -8459,19 +9013,14 @@
       </p:pic>
     </p:spTree>
   </p:cSld>
-  <mc:AlternateContent>
-    <mc:Choice Requires="p14">
-      <p:transition spd="slow" p14:dur="2000"/>
-    </mc:Choice>
-    <mc:Fallback>
-      <p:transition spd="slow"/>
-    </mc:Fallback>
-  </mc:AlternateContent>
+  <p:clrMapOvr>
+    <a:masterClrMapping/>
+  </p:clrMapOvr>
 </p:sld>
 </file>
 
 <file path=ppt/slides/slide7.xml><?xml version="1.0" encoding="utf-8"?>
-<p:sld xmlns:a="http://schemas.openxmlformats.org/drawingml/2006/main" xmlns:p="http://schemas.openxmlformats.org/presentationml/2006/main" xmlns:r="http://schemas.openxmlformats.org/officeDocument/2006/relationships" xmlns:p14="http://schemas.microsoft.com/office/powerpoint/2010/main" xmlns:p15="http://schemas.microsoft.com/office/powerpoint/2012/main" xmlns:mc="http://schemas.openxmlformats.org/markup-compatibility/2006">
+<p:sld xmlns:a="http://schemas.openxmlformats.org/drawingml/2006/main" xmlns:r="http://schemas.openxmlformats.org/officeDocument/2006/relationships" xmlns:p="http://schemas.openxmlformats.org/presentationml/2006/main">
   <p:cSld>
     <p:spTree>
       <p:nvGrpSpPr>
@@ -8514,6 +9063,7 @@
           <a:bodyPr lIns="0" tIns="0" rIns="0" bIns="0" anchor="ctr">
             <a:noAutofit/>
           </a:bodyPr>
+          <a:lstStyle/>
           <a:p>
             <a:pPr indent="0" algn="ctr" defTabSz="914400">
               <a:lnSpc>
@@ -8554,7 +9104,7 @@
           <p:nvPr/>
         </p:nvPicPr>
         <p:blipFill>
-          <a:blip r:embed="rId1"/>
+          <a:blip r:embed="rId2"/>
           <a:stretch/>
         </p:blipFill>
         <p:spPr>
@@ -8573,19 +9123,14 @@
       </p:pic>
     </p:spTree>
   </p:cSld>
-  <mc:AlternateContent>
-    <mc:Choice Requires="p14">
-      <p:transition spd="slow" p14:dur="2000"/>
-    </mc:Choice>
-    <mc:Fallback>
-      <p:transition spd="slow"/>
-    </mc:Fallback>
-  </mc:AlternateContent>
+  <p:clrMapOvr>
+    <a:masterClrMapping/>
+  </p:clrMapOvr>
 </p:sld>
 </file>
 
 <file path=ppt/slides/slide8.xml><?xml version="1.0" encoding="utf-8"?>
-<p:sld xmlns:a="http://schemas.openxmlformats.org/drawingml/2006/main" xmlns:p="http://schemas.openxmlformats.org/presentationml/2006/main" xmlns:r="http://schemas.openxmlformats.org/officeDocument/2006/relationships" xmlns:p14="http://schemas.microsoft.com/office/powerpoint/2010/main" xmlns:p15="http://schemas.microsoft.com/office/powerpoint/2012/main" xmlns:mc="http://schemas.openxmlformats.org/markup-compatibility/2006">
+<p:sld xmlns:a="http://schemas.openxmlformats.org/drawingml/2006/main" xmlns:r="http://schemas.openxmlformats.org/officeDocument/2006/relationships" xmlns:p="http://schemas.openxmlformats.org/presentationml/2006/main">
   <p:cSld>
     <p:spTree>
       <p:nvGrpSpPr>
@@ -8628,6 +9173,7 @@
           <a:bodyPr lIns="0" tIns="0" rIns="0" bIns="0" anchor="ctr">
             <a:noAutofit/>
           </a:bodyPr>
+          <a:lstStyle/>
           <a:p>
             <a:pPr indent="0" algn="ctr" defTabSz="914400">
               <a:lnSpc>
@@ -8668,7 +9214,7 @@
           <p:nvPr/>
         </p:nvPicPr>
         <p:blipFill>
-          <a:blip r:embed="rId1"/>
+          <a:blip r:embed="rId2"/>
           <a:stretch/>
         </p:blipFill>
         <p:spPr>
@@ -8687,19 +9233,14 @@
       </p:pic>
     </p:spTree>
   </p:cSld>
-  <mc:AlternateContent>
-    <mc:Choice Requires="p14">
-      <p:transition spd="slow" p14:dur="2000"/>
-    </mc:Choice>
-    <mc:Fallback>
-      <p:transition spd="slow"/>
-    </mc:Fallback>
-  </mc:AlternateContent>
+  <p:clrMapOvr>
+    <a:masterClrMapping/>
+  </p:clrMapOvr>
 </p:sld>
 </file>
 
 <file path=ppt/slides/slide9.xml><?xml version="1.0" encoding="utf-8"?>
-<p:sld xmlns:a="http://schemas.openxmlformats.org/drawingml/2006/main" xmlns:p="http://schemas.openxmlformats.org/presentationml/2006/main" xmlns:r="http://schemas.openxmlformats.org/officeDocument/2006/relationships" xmlns:p14="http://schemas.microsoft.com/office/powerpoint/2010/main" xmlns:p15="http://schemas.microsoft.com/office/powerpoint/2012/main" xmlns:mc="http://schemas.openxmlformats.org/markup-compatibility/2006">
+<p:sld xmlns:a="http://schemas.openxmlformats.org/drawingml/2006/main" xmlns:r="http://schemas.openxmlformats.org/officeDocument/2006/relationships" xmlns:p="http://schemas.openxmlformats.org/presentationml/2006/main">
   <p:cSld>
     <p:spTree>
       <p:nvGrpSpPr>
@@ -8742,6 +9283,7 @@
           <a:bodyPr lIns="0" tIns="0" rIns="0" bIns="0" anchor="ctr">
             <a:noAutofit/>
           </a:bodyPr>
+          <a:lstStyle/>
           <a:p>
             <a:pPr indent="0" algn="ctr" defTabSz="914400">
               <a:lnSpc>
@@ -8782,7 +9324,7 @@
           <p:nvPr/>
         </p:nvPicPr>
         <p:blipFill>
-          <a:blip r:embed="rId1"/>
+          <a:blip r:embed="rId2"/>
           <a:stretch/>
         </p:blipFill>
         <p:spPr>
@@ -8801,19 +9343,14 @@
       </p:pic>
     </p:spTree>
   </p:cSld>
-  <mc:AlternateContent>
-    <mc:Choice Requires="p14">
-      <p:transition spd="slow" p14:dur="2000"/>
-    </mc:Choice>
-    <mc:Fallback>
-      <p:transition spd="slow"/>
-    </mc:Fallback>
-  </mc:AlternateContent>
+  <p:clrMapOvr>
+    <a:masterClrMapping/>
+  </p:clrMapOvr>
 </p:sld>
 </file>
 
 <file path=ppt/theme/theme1.xml><?xml version="1.0" encoding="utf-8"?>
-<a:theme xmlns:a="http://schemas.openxmlformats.org/drawingml/2006/main" xmlns:r="http://schemas.openxmlformats.org/officeDocument/2006/relationships" name="Office">
+<a:theme xmlns:a="http://schemas.openxmlformats.org/drawingml/2006/main" name="Office">
   <a:themeElements>
     <a:clrScheme name="LibreOffice">
       <a:dk1>
@@ -8855,14 +9392,14 @@
     </a:clrScheme>
     <a:fontScheme name="Office">
       <a:majorFont>
-        <a:latin typeface="Arial" pitchFamily="0" charset="1"/>
-        <a:ea typeface="DejaVu Sans" pitchFamily="0" charset="1"/>
-        <a:cs typeface="DejaVu Sans" pitchFamily="0" charset="1"/>
+        <a:latin typeface="Arial"/>
+        <a:ea typeface="DejaVu Sans"/>
+        <a:cs typeface="DejaVu Sans"/>
       </a:majorFont>
       <a:minorFont>
-        <a:latin typeface="Arial" pitchFamily="0" charset="1"/>
-        <a:ea typeface="DejaVu Sans" pitchFamily="0" charset="1"/>
-        <a:cs typeface="DejaVu Sans" pitchFamily="0" charset="1"/>
+        <a:latin typeface="Arial"/>
+        <a:ea typeface="DejaVu Sans"/>
+        <a:cs typeface="DejaVu Sans"/>
       </a:minorFont>
     </a:fontScheme>
     <a:fmtScheme>
@@ -8915,11 +9452,13 @@
       </a:bgFillStyleLst>
     </a:fmtScheme>
   </a:themeElements>
+  <a:objectDefaults/>
+  <a:extraClrSchemeLst/>
 </a:theme>
 </file>
 
 <file path=ppt/theme/theme2.xml><?xml version="1.0" encoding="utf-8"?>
-<a:theme xmlns:a="http://schemas.openxmlformats.org/drawingml/2006/main" xmlns:r="http://schemas.openxmlformats.org/officeDocument/2006/relationships" name="Office">
+<a:theme xmlns:a="http://schemas.openxmlformats.org/drawingml/2006/main" name="Office">
   <a:themeElements>
     <a:clrScheme name="LibreOffice">
       <a:dk1>
@@ -8961,14 +9500,14 @@
     </a:clrScheme>
     <a:fontScheme name="Office">
       <a:majorFont>
-        <a:latin typeface="Arial" pitchFamily="0" charset="1"/>
-        <a:ea typeface="DejaVu Sans" pitchFamily="0" charset="1"/>
-        <a:cs typeface="DejaVu Sans" pitchFamily="0" charset="1"/>
+        <a:latin typeface="Arial"/>
+        <a:ea typeface="DejaVu Sans"/>
+        <a:cs typeface="DejaVu Sans"/>
       </a:majorFont>
       <a:minorFont>
-        <a:latin typeface="Arial" pitchFamily="0" charset="1"/>
-        <a:ea typeface="DejaVu Sans" pitchFamily="0" charset="1"/>
-        <a:cs typeface="DejaVu Sans" pitchFamily="0" charset="1"/>
+        <a:latin typeface="Arial"/>
+        <a:ea typeface="DejaVu Sans"/>
+        <a:cs typeface="DejaVu Sans"/>
       </a:minorFont>
     </a:fontScheme>
     <a:fmtScheme>
@@ -9021,11 +9560,13 @@
       </a:bgFillStyleLst>
     </a:fmtScheme>
   </a:themeElements>
+  <a:objectDefaults/>
+  <a:extraClrSchemeLst/>
 </a:theme>
 </file>
 
-<file path=ppt/theme/theme5.xml><?xml version="1.0" encoding="utf-8"?>
-<a:theme xmlns:a="http://schemas.openxmlformats.org/drawingml/2006/main" xmlns:r="http://schemas.openxmlformats.org/officeDocument/2006/relationships" name="Office Theme">
+<file path=ppt/theme/theme3.xml><?xml version="1.0" encoding="utf-8"?>
+<a:theme xmlns:a="http://schemas.openxmlformats.org/drawingml/2006/main" name="Office Theme">
   <a:themeElements>
     <a:clrScheme name="LibreOffice">
       <a:dk1>
@@ -9067,14 +9608,14 @@
     </a:clrScheme>
     <a:fontScheme name="Office">
       <a:majorFont>
-        <a:latin typeface="Arial" pitchFamily="0" charset="1"/>
-        <a:ea typeface="DejaVu Sans" pitchFamily="0" charset="1"/>
-        <a:cs typeface="DejaVu Sans" pitchFamily="0" charset="1"/>
+        <a:latin typeface="Arial"/>
+        <a:ea typeface="DejaVu Sans"/>
+        <a:cs typeface="DejaVu Sans"/>
       </a:majorFont>
       <a:minorFont>
-        <a:latin typeface="Arial" pitchFamily="0" charset="1"/>
-        <a:ea typeface="DejaVu Sans" pitchFamily="0" charset="1"/>
-        <a:cs typeface="DejaVu Sans" pitchFamily="0" charset="1"/>
+        <a:latin typeface="Arial"/>
+        <a:ea typeface="DejaVu Sans"/>
+        <a:cs typeface="DejaVu Sans"/>
       </a:minorFont>
     </a:fontScheme>
     <a:fmtScheme>
@@ -9127,5 +9668,7 @@
       </a:bgFillStyleLst>
     </a:fmtScheme>
   </a:themeElements>
+  <a:objectDefaults/>
+  <a:extraClrSchemeLst/>
 </a:theme>
 </file>
--- a/presentations/project1_presentation.pptx
+++ b/presentations/project1_presentation.pptx
@@ -6,7 +6,7 @@
     <p:sldMasterId id="2147483652" r:id="rId2"/>
   </p:sldMasterIdLst>
   <p:notesMasterIdLst>
-    <p:notesMasterId r:id="rId19"/>
+    <p:notesMasterId r:id="rId21"/>
   </p:notesMasterIdLst>
   <p:sldIdLst>
     <p:sldId id="256" r:id="rId3"/>
@@ -19,12 +19,14 @@
     <p:sldId id="263" r:id="rId10"/>
     <p:sldId id="264" r:id="rId11"/>
     <p:sldId id="265" r:id="rId12"/>
-    <p:sldId id="266" r:id="rId13"/>
-    <p:sldId id="267" r:id="rId14"/>
-    <p:sldId id="268" r:id="rId15"/>
-    <p:sldId id="269" r:id="rId16"/>
-    <p:sldId id="270" r:id="rId17"/>
-    <p:sldId id="271" r:id="rId18"/>
+    <p:sldId id="272" r:id="rId13"/>
+    <p:sldId id="273" r:id="rId14"/>
+    <p:sldId id="274" r:id="rId15"/>
+    <p:sldId id="267" r:id="rId16"/>
+    <p:sldId id="268" r:id="rId17"/>
+    <p:sldId id="269" r:id="rId18"/>
+    <p:sldId id="270" r:id="rId19"/>
+    <p:sldId id="271" r:id="rId20"/>
   </p:sldIdLst>
   <p:sldSz cx="10080625" cy="5670550"/>
   <p:notesSz cx="7772400" cy="10058400"/>
@@ -123,6 +125,11 @@
       </a:defRPr>
     </a:lvl9pPr>
   </p:defaultTextStyle>
+  <p:extLst>
+    <p:ext uri="{EFAFB233-063F-42B5-8137-9DF3F51BA10A}">
+      <p15:sldGuideLst xmlns:p15="http://schemas.microsoft.com/office/powerpoint/2012/main"/>
+    </p:ext>
+  </p:extLst>
 </p:presentation>
 </file>
 
@@ -5660,7 +5667,7 @@
 </file>
 
 <file path=ppt/slides/slide11.xml><?xml version="1.0" encoding="utf-8"?>
-<p:sld xmlns:a="http://schemas.openxmlformats.org/drawingml/2006/main" xmlns:r="http://schemas.openxmlformats.org/officeDocument/2006/relationships" xmlns:p="http://schemas.openxmlformats.org/presentationml/2006/main" show="0">
+<p:sld xmlns:a="http://schemas.openxmlformats.org/drawingml/2006/main" xmlns:r="http://schemas.openxmlformats.org/officeDocument/2006/relationships" xmlns:p="http://schemas.openxmlformats.org/presentationml/2006/main">
   <p:cSld>
     <p:spTree>
       <p:nvGrpSpPr>
@@ -5678,7 +5685,13 @@
       </p:grpSpPr>
       <p:sp>
         <p:nvSpPr>
-          <p:cNvPr id="59" name="PlaceHolder 1"/>
+          <p:cNvPr id="2" name="Title 1">
+            <a:extLst>
+              <a:ext uri="{FF2B5EF4-FFF2-40B4-BE49-F238E27FC236}">
+                <a16:creationId xmlns:a16="http://schemas.microsoft.com/office/drawing/2014/main" id="{59EA342C-93DB-9052-E162-1773898CB748}"/>
+              </a:ext>
+            </a:extLst>
+          </p:cNvPr>
           <p:cNvSpPr>
             <a:spLocks noGrp="1"/>
           </p:cNvSpPr>
@@ -5688,58 +5701,34 @@
         </p:nvSpPr>
         <p:spPr>
           <a:xfrm>
-            <a:off x="504000" y="394560"/>
-            <a:ext cx="9071280" cy="609120"/>
+            <a:off x="539952" y="526396"/>
+            <a:ext cx="9000720" cy="429348"/>
           </a:xfrm>
-          <a:prstGeom prst="rect">
-            <a:avLst/>
-          </a:prstGeom>
-          <a:noFill/>
-          <a:ln w="0">
-            <a:noFill/>
-          </a:ln>
         </p:spPr>
         <p:txBody>
-          <a:bodyPr lIns="0" tIns="0" rIns="0" bIns="0" anchor="ctr">
-            <a:noAutofit/>
-          </a:bodyPr>
+          <a:bodyPr/>
           <a:lstStyle/>
           <a:p>
-            <a:pPr indent="0" algn="ctr" defTabSz="914400">
-              <a:lnSpc>
-                <a:spcPct val="90000"/>
-              </a:lnSpc>
-              <a:buNone/>
-              <a:tabLst>
-                <a:tab pos="0" algn="l"/>
-              </a:tabLst>
-            </a:pPr>
-            <a:r>
-              <a:rPr lang="en-US" sz="4400" b="0" u="none" strike="noStrike">
-                <a:solidFill>
-                  <a:srgbClr val="000000"/>
-                </a:solidFill>
-                <a:effectLst/>
-                <a:uFillTx/>
-                <a:latin typeface="Arial"/>
-                <a:ea typeface="DejaVu Sans"/>
-              </a:rPr>
-              <a:t>Conclusion</a:t>
-            </a:r>
-            <a:endParaRPr lang="en-US" sz="4400" b="0" u="none" strike="noStrike">
-              <a:solidFill>
-                <a:srgbClr val="DD4100"/>
-              </a:solidFill>
-              <a:effectLst/>
-              <a:uFillTx/>
-              <a:latin typeface="Times New Roman"/>
-            </a:endParaRPr>
+            <a:r>
+              <a:rPr lang="en-US" dirty="0">
+                <a:solidFill>
+                  <a:schemeClr val="tx1"/>
+                </a:solidFill>
+              </a:rPr>
+              <a:t>Example model output</a:t>
+            </a:r>
           </a:p>
         </p:txBody>
       </p:sp>
       <p:sp>
         <p:nvSpPr>
-          <p:cNvPr id="60" name="PlaceHolder 2"/>
+          <p:cNvPr id="3" name="Subtitle 2">
+            <a:extLst>
+              <a:ext uri="{FF2B5EF4-FFF2-40B4-BE49-F238E27FC236}">
+                <a16:creationId xmlns:a16="http://schemas.microsoft.com/office/drawing/2014/main" id="{E62BD978-E37A-FAC0-3288-B9B90DD8090C}"/>
+              </a:ext>
+            </a:extLst>
+          </p:cNvPr>
           <p:cNvSpPr>
             <a:spLocks noGrp="1"/>
           </p:cNvSpPr>
@@ -5749,259 +5738,131 @@
         </p:nvSpPr>
         <p:spPr>
           <a:xfrm>
-            <a:off x="504000" y="1066680"/>
-            <a:ext cx="9071280" cy="4138200"/>
+            <a:off x="360000" y="955744"/>
+            <a:ext cx="9360720" cy="4879339"/>
           </a:xfrm>
-          <a:prstGeom prst="rect">
-            <a:avLst/>
-          </a:prstGeom>
-          <a:noFill/>
-          <a:ln w="0">
-            <a:noFill/>
-          </a:ln>
         </p:spPr>
         <p:txBody>
-          <a:bodyPr lIns="0" tIns="0" rIns="0" bIns="0" anchor="ctr">
-            <a:noAutofit/>
-          </a:bodyPr>
+          <a:bodyPr/>
           <a:lstStyle/>
           <a:p>
-            <a:pPr marL="228600" indent="-228600" algn="l" defTabSz="914400">
-              <a:lnSpc>
-                <a:spcPct val="90000"/>
-              </a:lnSpc>
-              <a:spcBef>
-                <a:spcPts val="1417"/>
-              </a:spcBef>
-              <a:buClr>
-                <a:srgbClr val="000000"/>
-              </a:buClr>
-              <a:buSzPct val="45000"/>
-              <a:buFont typeface="Wingdings" charset="2"/>
-              <a:buChar char=""/>
-            </a:pPr>
-            <a:r>
-              <a:rPr lang="en-US" sz="1800" b="0" u="none" strike="noStrike">
-                <a:solidFill>
-                  <a:srgbClr val="000000"/>
-                </a:solidFill>
-                <a:effectLst/>
-                <a:uFillTx/>
-                <a:latin typeface="Arial"/>
-                <a:ea typeface="DejaVu Sans"/>
-              </a:rPr>
-              <a:t>Each additional 10,000 miles is associated with an average 2.2% decrease in selling price, holding all other variables constant.</a:t>
-            </a:r>
-            <a:endParaRPr lang="en-US" sz="1800" b="0" u="none" strike="noStrike">
-              <a:solidFill>
-                <a:srgbClr val="000000"/>
-              </a:solidFill>
-              <a:effectLst/>
-              <a:highlight>
-                <a:srgbClr val="FFFFFF"/>
-              </a:highlight>
-              <a:uFillTx/>
-              <a:latin typeface="Times New Roman"/>
-            </a:endParaRPr>
-          </a:p>
-          <a:p>
-            <a:pPr marL="228600" indent="-228600" algn="l" defTabSz="914400">
-              <a:lnSpc>
-                <a:spcPct val="90000"/>
-              </a:lnSpc>
-              <a:spcBef>
-                <a:spcPts val="1417"/>
-              </a:spcBef>
-              <a:buClr>
-                <a:srgbClr val="000000"/>
-              </a:buClr>
-              <a:buSzPct val="45000"/>
-              <a:buFont typeface="Wingdings" charset="2"/>
-              <a:buChar char=""/>
-            </a:pPr>
-            <a:r>
-              <a:rPr lang="en-US" sz="1800" b="0" u="none" strike="noStrike">
-                <a:solidFill>
-                  <a:srgbClr val="000000"/>
-                </a:solidFill>
-                <a:effectLst/>
-                <a:uFillTx/>
-                <a:latin typeface="Arial"/>
-                <a:ea typeface="DejaVu Sans"/>
-              </a:rPr>
-              <a:t>Each additional year of vehicle age is associated with an average 13.8% decrease in selling price, holding all other variables constant.</a:t>
-            </a:r>
-            <a:endParaRPr lang="en-US" sz="1800" b="0" u="none" strike="noStrike">
-              <a:solidFill>
-                <a:srgbClr val="000000"/>
-              </a:solidFill>
-              <a:effectLst/>
-              <a:highlight>
-                <a:srgbClr val="FFFFFF"/>
-              </a:highlight>
-              <a:uFillTx/>
-              <a:latin typeface="Times New Roman"/>
-            </a:endParaRPr>
-          </a:p>
-          <a:p>
-            <a:pPr marL="228600" indent="-228600" algn="l" defTabSz="914400">
-              <a:lnSpc>
-                <a:spcPct val="90000"/>
-              </a:lnSpc>
-              <a:spcBef>
-                <a:spcPts val="1417"/>
-              </a:spcBef>
-              <a:buClr>
-                <a:srgbClr val="000000"/>
-              </a:buClr>
-              <a:buSzPct val="45000"/>
-              <a:buFont typeface="Wingdings" charset="2"/>
-              <a:buChar char=""/>
-            </a:pPr>
-            <a:r>
-              <a:rPr lang="en-US" sz="1800" b="0" u="none" strike="noStrike">
-                <a:solidFill>
-                  <a:srgbClr val="000000"/>
-                </a:solidFill>
-                <a:effectLst/>
-                <a:uFillTx/>
-                <a:latin typeface="Arial"/>
-                <a:ea typeface="DejaVu Sans"/>
-              </a:rPr>
-              <a:t>A one-point increase in vehicle condition is associated with approximately a 2.0% increase in selling price, holding all other variables constant.</a:t>
-            </a:r>
-            <a:endParaRPr lang="en-US" sz="1800" b="0" u="none" strike="noStrike">
-              <a:solidFill>
-                <a:srgbClr val="000000"/>
-              </a:solidFill>
-              <a:effectLst/>
-              <a:highlight>
-                <a:srgbClr val="FFFFFF"/>
-              </a:highlight>
-              <a:uFillTx/>
-              <a:latin typeface="Times New Roman"/>
-            </a:endParaRPr>
-          </a:p>
-          <a:p>
-            <a:pPr marL="228600" indent="-228600" algn="l" defTabSz="914400">
-              <a:lnSpc>
-                <a:spcPct val="90000"/>
-              </a:lnSpc>
-              <a:spcBef>
-                <a:spcPts val="1417"/>
-              </a:spcBef>
-              <a:buClr>
-                <a:srgbClr val="000000"/>
-              </a:buClr>
-              <a:buSzPct val="45000"/>
-              <a:buFont typeface="Wingdings" charset="2"/>
-              <a:buChar char=""/>
-            </a:pPr>
-            <a:r>
-              <a:rPr lang="en-US" sz="1800" b="0" u="none" strike="noStrike">
-                <a:solidFill>
-                  <a:srgbClr val="000000"/>
-                </a:solidFill>
-                <a:effectLst/>
-                <a:uFillTx/>
-                <a:latin typeface="Arial"/>
-                <a:ea typeface="DejaVu Sans"/>
-              </a:rPr>
-              <a:t>Among the continuous vehicle characteristics (odometer, condition) analyzed, vehicle age has the strongest relationship with selling price</a:t>
-            </a:r>
-            <a:endParaRPr lang="en-US" sz="1800" b="0" u="none" strike="noStrike">
-              <a:solidFill>
-                <a:srgbClr val="000000"/>
-              </a:solidFill>
-              <a:effectLst/>
-              <a:highlight>
-                <a:srgbClr val="FFFFFF"/>
-              </a:highlight>
-              <a:uFillTx/>
-              <a:latin typeface="Times New Roman"/>
-            </a:endParaRPr>
-          </a:p>
-          <a:p>
-            <a:pPr marL="228600" indent="-228600" algn="l" defTabSz="914400">
-              <a:lnSpc>
-                <a:spcPct val="90000"/>
-              </a:lnSpc>
-              <a:spcBef>
-                <a:spcPts val="1417"/>
-              </a:spcBef>
-              <a:buClr>
-                <a:srgbClr val="000000"/>
-              </a:buClr>
-              <a:buSzPct val="45000"/>
-              <a:buFont typeface="Wingdings" charset="2"/>
-              <a:buChar char=""/>
-            </a:pPr>
-            <a:r>
-              <a:rPr lang="en-US" sz="1800" b="0" u="none" strike="noStrike">
-                <a:solidFill>
-                  <a:srgbClr val="000000"/>
-                </a:solidFill>
-                <a:effectLst/>
-                <a:uFillTx/>
-                <a:latin typeface="Arial"/>
-                <a:ea typeface="DejaVu Sans"/>
-              </a:rPr>
-              <a:t>Vehicle model captures differences in vehicle type, original MSRP, market demand, towing capability, luxury features, and brand perception that are not explained by age, mileage, or condition alone.</a:t>
-            </a:r>
-            <a:endParaRPr lang="en-US" sz="1800" b="0" u="none" strike="noStrike">
-              <a:solidFill>
-                <a:srgbClr val="000000"/>
-              </a:solidFill>
-              <a:effectLst/>
-              <a:highlight>
-                <a:srgbClr val="FFFFFF"/>
-              </a:highlight>
-              <a:uFillTx/>
-              <a:latin typeface="Times New Roman"/>
-            </a:endParaRPr>
-          </a:p>
-          <a:p>
-            <a:pPr marL="228600" indent="-228600" algn="l" defTabSz="914400">
-              <a:lnSpc>
-                <a:spcPct val="90000"/>
-              </a:lnSpc>
-              <a:spcBef>
-                <a:spcPts val="1417"/>
-              </a:spcBef>
-              <a:buClr>
-                <a:srgbClr val="000000"/>
-              </a:buClr>
-              <a:buSzPct val="45000"/>
-              <a:buFont typeface="Wingdings" charset="2"/>
-              <a:buChar char=""/>
-            </a:pPr>
-            <a:r>
-              <a:rPr lang="en-US" sz="1800" b="0" u="none" strike="noStrike">
-                <a:solidFill>
-                  <a:srgbClr val="000000"/>
-                </a:solidFill>
-                <a:effectLst/>
-                <a:uFillTx/>
-                <a:latin typeface="Arial"/>
-                <a:ea typeface="DejaVu Sans"/>
-              </a:rPr>
-              <a:t>Heavy-duty pickup trucks consistently exhibited the highest estimated market values after controlling for age, mileage, condition, and transmission type.</a:t>
-            </a:r>
-            <a:endParaRPr lang="en-US" sz="1800" b="0" u="none" strike="noStrike">
-              <a:solidFill>
-                <a:srgbClr val="000000"/>
-              </a:solidFill>
-              <a:effectLst/>
-              <a:highlight>
-                <a:srgbClr val="FFFFFF"/>
-              </a:highlight>
-              <a:uFillTx/>
-              <a:latin typeface="Times New Roman"/>
-            </a:endParaRPr>
+            <a:r>
+              <a:rPr lang="en-US" sz="2000" dirty="0">
+                <a:solidFill>
+                  <a:schemeClr val="tx1"/>
+                </a:solidFill>
+              </a:rPr>
+              <a:t>=== Vehicle Valuation Prediction ===</a:t>
+            </a:r>
+          </a:p>
+          <a:p>
+            <a:r>
+              <a:rPr lang="en-US" sz="2000" dirty="0">
+                <a:solidFill>
+                  <a:schemeClr val="tx1"/>
+                </a:solidFill>
+              </a:rPr>
+              <a:t>Input Vehicle: Ram 1500</a:t>
+            </a:r>
+          </a:p>
+          <a:p>
+            <a:r>
+              <a:rPr lang="en-US" sz="2000" dirty="0">
+                <a:solidFill>
+                  <a:schemeClr val="tx1"/>
+                </a:solidFill>
+              </a:rPr>
+              <a:t>State: UT | Age: 7.0 years | Odometer: 115,000.0 miles | Condition: 30.0</a:t>
+            </a:r>
+          </a:p>
+          <a:p>
+            <a:r>
+              <a:rPr lang="en-US" sz="2000" dirty="0">
+                <a:solidFill>
+                  <a:schemeClr val="tx1"/>
+                </a:solidFill>
+              </a:rPr>
+              <a:t>Canonical Model Representation: 1500</a:t>
+            </a:r>
+          </a:p>
+          <a:p>
+            <a:r>
+              <a:rPr lang="en-US" sz="2000" dirty="0">
+                <a:solidFill>
+                  <a:schemeClr val="tx1"/>
+                </a:solidFill>
+              </a:rPr>
+              <a:t>------------------------------------</a:t>
+            </a:r>
+          </a:p>
+          <a:p>
+            <a:r>
+              <a:rPr lang="en-US" sz="2000" dirty="0">
+                <a:solidFill>
+                  <a:schemeClr val="tx1"/>
+                </a:solidFill>
+              </a:rPr>
+              <a:t>Predicted Log Selling Price:     9.1918</a:t>
+            </a:r>
+          </a:p>
+          <a:p>
+            <a:r>
+              <a:rPr lang="en-US" sz="2000" dirty="0">
+                <a:solidFill>
+                  <a:schemeClr val="tx1"/>
+                </a:solidFill>
+              </a:rPr>
+              <a:t>Predicted Median Value (naive):  $9,815.95</a:t>
+            </a:r>
+          </a:p>
+          <a:p>
+            <a:r>
+              <a:rPr lang="en-US" sz="2000" dirty="0">
+                <a:solidFill>
+                  <a:schemeClr val="tx1"/>
+                </a:solidFill>
+              </a:rPr>
+              <a:t>Predicted Expected Value (mean): $11,028.72</a:t>
+            </a:r>
+          </a:p>
+          <a:p>
+            <a:r>
+              <a:rPr lang="en-US" sz="2000" dirty="0">
+                <a:solidFill>
+                  <a:schemeClr val="tx1"/>
+                </a:solidFill>
+              </a:rPr>
+              <a:t>Predicted for sale in: UT</a:t>
+            </a:r>
+          </a:p>
+          <a:p>
+            <a:r>
+              <a:rPr lang="en-US" sz="2000" dirty="0">
+                <a:solidFill>
+                  <a:schemeClr val="tx1"/>
+                </a:solidFill>
+              </a:rPr>
+              <a:t>Trade-in offer for 10-15% profit: $9,374.41 to $9,925.85</a:t>
+            </a:r>
+          </a:p>
+          <a:p>
+            <a:r>
+              <a:rPr lang="en-US" sz="2000" dirty="0">
+                <a:solidFill>
+                  <a:schemeClr val="tx1"/>
+                </a:solidFill>
+              </a:rPr>
+              <a:t>====================================</a:t>
+            </a:r>
           </a:p>
         </p:txBody>
       </p:sp>
     </p:spTree>
+    <p:extLst>
+      <p:ext uri="{BB962C8B-B14F-4D97-AF65-F5344CB8AC3E}">
+        <p14:creationId xmlns:p14="http://schemas.microsoft.com/office/powerpoint/2010/main" val="2444242102"/>
+      </p:ext>
+    </p:extLst>
   </p:cSld>
   <p:clrMapOvr>
     <a:masterClrMapping/>
@@ -6010,6 +5871,427 @@
 </file>
 
 <file path=ppt/slides/slide12.xml><?xml version="1.0" encoding="utf-8"?>
+<p:sld xmlns:a="http://schemas.openxmlformats.org/drawingml/2006/main" xmlns:r="http://schemas.openxmlformats.org/officeDocument/2006/relationships" xmlns:p="http://schemas.openxmlformats.org/presentationml/2006/main">
+  <p:cSld>
+    <p:spTree>
+      <p:nvGrpSpPr>
+        <p:cNvPr id="1" name=""/>
+        <p:cNvGrpSpPr/>
+        <p:nvPr/>
+      </p:nvGrpSpPr>
+      <p:grpSpPr>
+        <a:xfrm>
+          <a:off x="0" y="0"/>
+          <a:ext cx="0" cy="0"/>
+          <a:chOff x="0" y="0"/>
+          <a:chExt cx="0" cy="0"/>
+        </a:xfrm>
+      </p:grpSpPr>
+      <p:sp>
+        <p:nvSpPr>
+          <p:cNvPr id="2" name="Title 1">
+            <a:extLst>
+              <a:ext uri="{FF2B5EF4-FFF2-40B4-BE49-F238E27FC236}">
+                <a16:creationId xmlns:a16="http://schemas.microsoft.com/office/drawing/2014/main" id="{4579430D-9979-6648-13F6-6C0E1E592274}"/>
+              </a:ext>
+            </a:extLst>
+          </p:cNvPr>
+          <p:cNvSpPr>
+            <a:spLocks noGrp="1"/>
+          </p:cNvSpPr>
+          <p:nvPr>
+            <p:ph type="title"/>
+          </p:nvPr>
+        </p:nvSpPr>
+        <p:spPr>
+          <a:xfrm>
+            <a:off x="539952" y="526396"/>
+            <a:ext cx="9000720" cy="429348"/>
+          </a:xfrm>
+        </p:spPr>
+        <p:txBody>
+          <a:bodyPr/>
+          <a:lstStyle/>
+          <a:p>
+            <a:r>
+              <a:rPr lang="en-US" dirty="0">
+                <a:solidFill>
+                  <a:schemeClr val="tx1"/>
+                </a:solidFill>
+              </a:rPr>
+              <a:t>Another model example</a:t>
+            </a:r>
+          </a:p>
+        </p:txBody>
+      </p:sp>
+      <p:sp>
+        <p:nvSpPr>
+          <p:cNvPr id="3" name="Subtitle 2">
+            <a:extLst>
+              <a:ext uri="{FF2B5EF4-FFF2-40B4-BE49-F238E27FC236}">
+                <a16:creationId xmlns:a16="http://schemas.microsoft.com/office/drawing/2014/main" id="{90148188-2394-30E5-B76C-E76821736CCD}"/>
+              </a:ext>
+            </a:extLst>
+          </p:cNvPr>
+          <p:cNvSpPr>
+            <a:spLocks noGrp="1"/>
+          </p:cNvSpPr>
+          <p:nvPr>
+            <p:ph type="subTitle"/>
+          </p:nvPr>
+        </p:nvSpPr>
+        <p:spPr>
+          <a:xfrm>
+            <a:off x="359952" y="1083644"/>
+            <a:ext cx="8568895" cy="4457631"/>
+          </a:xfrm>
+        </p:spPr>
+        <p:txBody>
+          <a:bodyPr/>
+          <a:lstStyle/>
+          <a:p>
+            <a:r>
+              <a:rPr lang="en-US" sz="2000" dirty="0">
+                <a:solidFill>
+                  <a:schemeClr val="tx1"/>
+                </a:solidFill>
+              </a:rPr>
+              <a:t>=== Vehicle Valuation Prediction ===</a:t>
+            </a:r>
+          </a:p>
+          <a:p>
+            <a:r>
+              <a:rPr lang="en-US" sz="2000" dirty="0">
+                <a:solidFill>
+                  <a:schemeClr val="tx1"/>
+                </a:solidFill>
+              </a:rPr>
+              <a:t>Input Vehicle: Honda Accord</a:t>
+            </a:r>
+          </a:p>
+          <a:p>
+            <a:r>
+              <a:rPr lang="en-US" sz="2000" dirty="0">
+                <a:solidFill>
+                  <a:schemeClr val="tx1"/>
+                </a:solidFill>
+              </a:rPr>
+              <a:t>State: UT | Age: 3.0 years | Odometer: 65,000.0 miles | Condition: 40.0</a:t>
+            </a:r>
+          </a:p>
+          <a:p>
+            <a:r>
+              <a:rPr lang="en-US" sz="2000" dirty="0">
+                <a:solidFill>
+                  <a:schemeClr val="tx1"/>
+                </a:solidFill>
+              </a:rPr>
+              <a:t>Canonical Model Representation: Accord</a:t>
+            </a:r>
+          </a:p>
+          <a:p>
+            <a:r>
+              <a:rPr lang="en-US" sz="2000" dirty="0">
+                <a:solidFill>
+                  <a:schemeClr val="tx1"/>
+                </a:solidFill>
+              </a:rPr>
+              <a:t>------------------------------------</a:t>
+            </a:r>
+          </a:p>
+          <a:p>
+            <a:r>
+              <a:rPr lang="en-US" sz="2000" dirty="0">
+                <a:solidFill>
+                  <a:schemeClr val="tx1"/>
+                </a:solidFill>
+              </a:rPr>
+              <a:t>Predicted Log Selling Price:     9.5440</a:t>
+            </a:r>
+          </a:p>
+          <a:p>
+            <a:r>
+              <a:rPr lang="en-US" sz="2000" dirty="0">
+                <a:solidFill>
+                  <a:schemeClr val="tx1"/>
+                </a:solidFill>
+              </a:rPr>
+              <a:t>Predicted Median Value (naive):  $13,961.09</a:t>
+            </a:r>
+          </a:p>
+          <a:p>
+            <a:r>
+              <a:rPr lang="en-US" sz="2000" dirty="0">
+                <a:solidFill>
+                  <a:schemeClr val="tx1"/>
+                </a:solidFill>
+              </a:rPr>
+              <a:t>Predicted Expected Value (mean): $15,685.99</a:t>
+            </a:r>
+          </a:p>
+          <a:p>
+            <a:r>
+              <a:rPr lang="en-US" sz="2000" dirty="0">
+                <a:solidFill>
+                  <a:schemeClr val="tx1"/>
+                </a:solidFill>
+              </a:rPr>
+              <a:t>Predicted for sale in: UT</a:t>
+            </a:r>
+          </a:p>
+          <a:p>
+            <a:r>
+              <a:rPr lang="en-US" sz="2000" dirty="0">
+                <a:solidFill>
+                  <a:schemeClr val="tx1"/>
+                </a:solidFill>
+              </a:rPr>
+              <a:t>Trade-in offer for 10-15% profit: $13,333.09 to $14,117.39</a:t>
+            </a:r>
+          </a:p>
+          <a:p>
+            <a:r>
+              <a:rPr lang="en-US" sz="2000" dirty="0">
+                <a:solidFill>
+                  <a:schemeClr val="tx1"/>
+                </a:solidFill>
+              </a:rPr>
+              <a:t>====================================</a:t>
+            </a:r>
+          </a:p>
+        </p:txBody>
+      </p:sp>
+    </p:spTree>
+    <p:extLst>
+      <p:ext uri="{BB962C8B-B14F-4D97-AF65-F5344CB8AC3E}">
+        <p14:creationId xmlns:p14="http://schemas.microsoft.com/office/powerpoint/2010/main" val="3157672830"/>
+      </p:ext>
+    </p:extLst>
+  </p:cSld>
+  <p:clrMapOvr>
+    <a:masterClrMapping/>
+  </p:clrMapOvr>
+</p:sld>
+</file>
+
+<file path=ppt/slides/slide13.xml><?xml version="1.0" encoding="utf-8"?>
+<p:sld xmlns:a="http://schemas.openxmlformats.org/drawingml/2006/main" xmlns:r="http://schemas.openxmlformats.org/officeDocument/2006/relationships" xmlns:p="http://schemas.openxmlformats.org/presentationml/2006/main">
+  <p:cSld>
+    <p:spTree>
+      <p:nvGrpSpPr>
+        <p:cNvPr id="1" name=""/>
+        <p:cNvGrpSpPr/>
+        <p:nvPr/>
+      </p:nvGrpSpPr>
+      <p:grpSpPr>
+        <a:xfrm>
+          <a:off x="0" y="0"/>
+          <a:ext cx="0" cy="0"/>
+          <a:chOff x="0" y="0"/>
+          <a:chExt cx="0" cy="0"/>
+        </a:xfrm>
+      </p:grpSpPr>
+      <p:sp>
+        <p:nvSpPr>
+          <p:cNvPr id="2" name="Title 1">
+            <a:extLst>
+              <a:ext uri="{FF2B5EF4-FFF2-40B4-BE49-F238E27FC236}">
+                <a16:creationId xmlns:a16="http://schemas.microsoft.com/office/drawing/2014/main" id="{AF208AD5-45B2-8CEC-3E8B-D3D9FC9187B2}"/>
+              </a:ext>
+            </a:extLst>
+          </p:cNvPr>
+          <p:cNvSpPr>
+            <a:spLocks noGrp="1"/>
+          </p:cNvSpPr>
+          <p:nvPr>
+            <p:ph type="title"/>
+          </p:nvPr>
+        </p:nvSpPr>
+        <p:spPr>
+          <a:xfrm>
+            <a:off x="539952" y="526396"/>
+            <a:ext cx="9000720" cy="429348"/>
+          </a:xfrm>
+        </p:spPr>
+        <p:txBody>
+          <a:bodyPr/>
+          <a:lstStyle/>
+          <a:p>
+            <a:r>
+              <a:rPr lang="en-US" dirty="0">
+                <a:solidFill>
+                  <a:schemeClr val="tx1"/>
+                </a:solidFill>
+              </a:rPr>
+              <a:t>Another Example Model </a:t>
+            </a:r>
+          </a:p>
+        </p:txBody>
+      </p:sp>
+      <p:sp>
+        <p:nvSpPr>
+          <p:cNvPr id="3" name="Subtitle 2">
+            <a:extLst>
+              <a:ext uri="{FF2B5EF4-FFF2-40B4-BE49-F238E27FC236}">
+                <a16:creationId xmlns:a16="http://schemas.microsoft.com/office/drawing/2014/main" id="{99655AE4-AB4D-3A24-04BD-84A12AFAC48A}"/>
+              </a:ext>
+            </a:extLst>
+          </p:cNvPr>
+          <p:cNvSpPr>
+            <a:spLocks noGrp="1"/>
+          </p:cNvSpPr>
+          <p:nvPr>
+            <p:ph type="subTitle"/>
+          </p:nvPr>
+        </p:nvSpPr>
+        <p:spPr>
+          <a:xfrm>
+            <a:off x="359952" y="1212919"/>
+            <a:ext cx="9360720" cy="4457631"/>
+          </a:xfrm>
+        </p:spPr>
+        <p:txBody>
+          <a:bodyPr/>
+          <a:lstStyle/>
+          <a:p>
+            <a:r>
+              <a:rPr lang="en-US" sz="2000" dirty="0">
+                <a:solidFill>
+                  <a:schemeClr val="tx1"/>
+                </a:solidFill>
+              </a:rPr>
+              <a:t>=== Vehicle Valuation Prediction ===</a:t>
+            </a:r>
+          </a:p>
+          <a:p>
+            <a:r>
+              <a:rPr lang="en-US" sz="2000" dirty="0">
+                <a:solidFill>
+                  <a:schemeClr val="tx1"/>
+                </a:solidFill>
+              </a:rPr>
+              <a:t>Input Vehicle: Toyota  Tacoma</a:t>
+            </a:r>
+          </a:p>
+          <a:p>
+            <a:r>
+              <a:rPr lang="en-US" sz="2000" dirty="0">
+                <a:solidFill>
+                  <a:schemeClr val="tx1"/>
+                </a:solidFill>
+              </a:rPr>
+              <a:t>State: UT | Age: 13.0 years | Odometer: 200,000.0 miles | Condition: 15.0</a:t>
+            </a:r>
+          </a:p>
+          <a:p>
+            <a:r>
+              <a:rPr lang="en-US" sz="2000" dirty="0">
+                <a:solidFill>
+                  <a:schemeClr val="tx1"/>
+                </a:solidFill>
+              </a:rPr>
+              <a:t>Canonical Model Representation: </a:t>
+            </a:r>
+            <a:r>
+              <a:rPr lang="en-US" sz="2000" dirty="0" err="1">
+                <a:solidFill>
+                  <a:schemeClr val="tx1"/>
+                </a:solidFill>
+              </a:rPr>
+              <a:t>toyota_Other</a:t>
+            </a:r>
+            <a:endParaRPr lang="en-US" sz="2000" dirty="0">
+              <a:solidFill>
+                <a:schemeClr val="tx1"/>
+              </a:solidFill>
+            </a:endParaRPr>
+          </a:p>
+          <a:p>
+            <a:r>
+              <a:rPr lang="en-US" sz="2000" dirty="0">
+                <a:solidFill>
+                  <a:schemeClr val="tx1"/>
+                </a:solidFill>
+              </a:rPr>
+              <a:t>------------------------------------</a:t>
+            </a:r>
+          </a:p>
+          <a:p>
+            <a:r>
+              <a:rPr lang="en-US" sz="2000" dirty="0">
+                <a:solidFill>
+                  <a:schemeClr val="tx1"/>
+                </a:solidFill>
+              </a:rPr>
+              <a:t>Predicted Log Selling Price:     7.8247</a:t>
+            </a:r>
+          </a:p>
+          <a:p>
+            <a:r>
+              <a:rPr lang="en-US" sz="2000" dirty="0">
+                <a:solidFill>
+                  <a:schemeClr val="tx1"/>
+                </a:solidFill>
+              </a:rPr>
+              <a:t>Predicted Median Value (naive):  $2,501.65</a:t>
+            </a:r>
+          </a:p>
+          <a:p>
+            <a:r>
+              <a:rPr lang="en-US" sz="2000" dirty="0">
+                <a:solidFill>
+                  <a:schemeClr val="tx1"/>
+                </a:solidFill>
+              </a:rPr>
+              <a:t>Predicted Expected Value (mean): $2,810.73</a:t>
+            </a:r>
+          </a:p>
+          <a:p>
+            <a:r>
+              <a:rPr lang="en-US" sz="2000" dirty="0">
+                <a:solidFill>
+                  <a:schemeClr val="tx1"/>
+                </a:solidFill>
+              </a:rPr>
+              <a:t>Predicted for sale in: UT</a:t>
+            </a:r>
+          </a:p>
+          <a:p>
+            <a:r>
+              <a:rPr lang="en-US" sz="2000" dirty="0">
+                <a:solidFill>
+                  <a:schemeClr val="tx1"/>
+                </a:solidFill>
+              </a:rPr>
+              <a:t>Trade-in offer for 10-15% profit: $2,389.12 to $2,529.66</a:t>
+            </a:r>
+          </a:p>
+          <a:p>
+            <a:r>
+              <a:rPr lang="en-US" sz="2000" dirty="0">
+                <a:solidFill>
+                  <a:schemeClr val="tx1"/>
+                </a:solidFill>
+              </a:rPr>
+              <a:t>====================================</a:t>
+            </a:r>
+          </a:p>
+        </p:txBody>
+      </p:sp>
+    </p:spTree>
+    <p:extLst>
+      <p:ext uri="{BB962C8B-B14F-4D97-AF65-F5344CB8AC3E}">
+        <p14:creationId xmlns:p14="http://schemas.microsoft.com/office/powerpoint/2010/main" val="1830482335"/>
+      </p:ext>
+    </p:extLst>
+  </p:cSld>
+  <p:clrMapOvr>
+    <a:masterClrMapping/>
+  </p:clrMapOvr>
+</p:sld>
+</file>
+
+<file path=ppt/slides/slide14.xml><?xml version="1.0" encoding="utf-8"?>
 <p:sld xmlns:a="http://schemas.openxmlformats.org/drawingml/2006/main" xmlns:r="http://schemas.openxmlformats.org/officeDocument/2006/relationships" xmlns:p="http://schemas.openxmlformats.org/presentationml/2006/main">
   <p:cSld>
     <p:spTree>
@@ -6300,7 +6582,7 @@
 </p:sld>
 </file>
 
-<file path=ppt/slides/slide13.xml><?xml version="1.0" encoding="utf-8"?>
+<file path=ppt/slides/slide15.xml><?xml version="1.0" encoding="utf-8"?>
 <p:sld xmlns:a="http://schemas.openxmlformats.org/drawingml/2006/main" xmlns:r="http://schemas.openxmlformats.org/officeDocument/2006/relationships" xmlns:p="http://schemas.openxmlformats.org/presentationml/2006/main">
   <p:cSld>
     <p:spTree>
@@ -6477,7 +6759,7 @@
 </p:sld>
 </file>
 
-<file path=ppt/slides/slide14.xml><?xml version="1.0" encoding="utf-8"?>
+<file path=ppt/slides/slide16.xml><?xml version="1.0" encoding="utf-8"?>
 <p:sld xmlns:a="http://schemas.openxmlformats.org/drawingml/2006/main" xmlns:r="http://schemas.openxmlformats.org/officeDocument/2006/relationships" xmlns:p="http://schemas.openxmlformats.org/presentationml/2006/main">
   <p:cSld>
     <p:spTree>
@@ -6563,7 +6845,7 @@
 </p:sld>
 </file>
 
-<file path=ppt/slides/slide15.xml><?xml version="1.0" encoding="utf-8"?>
+<file path=ppt/slides/slide17.xml><?xml version="1.0" encoding="utf-8"?>
 <p:sld xmlns:a="http://schemas.openxmlformats.org/drawingml/2006/main" xmlns:r="http://schemas.openxmlformats.org/officeDocument/2006/relationships" xmlns:p="http://schemas.openxmlformats.org/presentationml/2006/main">
   <p:cSld>
     <p:spTree>
@@ -6649,7 +6931,7 @@
 </p:sld>
 </file>
 
-<file path=ppt/slides/slide16.xml><?xml version="1.0" encoding="utf-8"?>
+<file path=ppt/slides/slide18.xml><?xml version="1.0" encoding="utf-8"?>
 <p:sld xmlns:a="http://schemas.openxmlformats.org/drawingml/2006/main" xmlns:r="http://schemas.openxmlformats.org/officeDocument/2006/relationships" xmlns:p="http://schemas.openxmlformats.org/presentationml/2006/main">
   <p:cSld>
     <p:spTree>
@@ -6752,7 +7034,7 @@
         </p:spPr>
         <p:txBody>
           <a:bodyPr lIns="0" tIns="0" rIns="0" bIns="0" anchor="t">
-            <a:normAutofit fontScale="85000" lnSpcReduction="9999"/>
+            <a:normAutofit fontScale="85000" lnSpcReduction="19999"/>
           </a:bodyPr>
           <a:lstStyle/>
           <a:p>
@@ -7094,7 +7376,7 @@
         </p:spPr>
         <p:txBody>
           <a:bodyPr lIns="0" tIns="0" rIns="0" bIns="0" anchor="t">
-            <a:normAutofit fontScale="85000" lnSpcReduction="9999"/>
+            <a:normAutofit fontScale="77500" lnSpcReduction="20000"/>
           </a:bodyPr>
           <a:lstStyle/>
           <a:p>
@@ -7657,7 +7939,7 @@
         </p:spPr>
         <p:txBody>
           <a:bodyPr lIns="0" tIns="0" rIns="0" bIns="0" anchor="t">
-            <a:normAutofit fontScale="55000" lnSpcReduction="19999"/>
+            <a:normAutofit fontScale="47500" lnSpcReduction="20000"/>
           </a:bodyPr>
           <a:lstStyle/>
           <a:p>

--- a/presentations/project1_presentation.pptx
+++ b/presentations/project1_presentation.pptx
@@ -642,8 +642,8 @@
         </p:nvSpPr>
         <p:spPr>
           <a:xfrm>
-            <a:off x="870120" y="1257480"/>
-            <a:ext cx="6032160" cy="3393720"/>
+            <a:off x="869950" y="1257300"/>
+            <a:ext cx="6032500" cy="3394075"/>
           </a:xfrm>
           <a:prstGeom prst="rect">
             <a:avLst/>
@@ -5586,7 +5586,7 @@
         <p:spPr>
           <a:xfrm>
             <a:off x="504000" y="394560"/>
-            <a:ext cx="9071280" cy="609120"/>
+            <a:ext cx="4453011" cy="609120"/>
           </a:xfrm>
           <a:prstGeom prst="rect">
             <a:avLst/>
@@ -5612,7 +5612,7 @@
               </a:tabLst>
             </a:pPr>
             <a:r>
-              <a:rPr lang="en-US" sz="4400" b="0" u="none" strike="noStrike">
+              <a:rPr lang="en-US" sz="4400" b="0" u="none" strike="noStrike" dirty="0">
                 <a:solidFill>
                   <a:srgbClr val="000000"/>
                 </a:solidFill>
@@ -5623,7 +5623,7 @@
               </a:rPr>
               <a:t>Model Predictors</a:t>
             </a:r>
-            <a:endParaRPr lang="en-US" sz="4400" b="0" u="none" strike="noStrike">
+            <a:endParaRPr lang="en-US" sz="4400" b="0" u="none" strike="noStrike" dirty="0">
               <a:solidFill>
                 <a:srgbClr val="DD4100"/>
               </a:solidFill>
@@ -5636,26 +5636,38 @@
       </p:sp>
       <p:pic>
         <p:nvPicPr>
-          <p:cNvPr id="58" name="Picture 4"/>
-          <p:cNvPicPr/>
+          <p:cNvPr id="3" name="Picture 2">
+            <a:extLst>
+              <a:ext uri="{FF2B5EF4-FFF2-40B4-BE49-F238E27FC236}">
+                <a16:creationId xmlns:a16="http://schemas.microsoft.com/office/drawing/2014/main" id="{C1170AFF-8640-7F04-236E-6E071DD811B9}"/>
+              </a:ext>
+            </a:extLst>
+          </p:cNvPr>
+          <p:cNvPicPr>
+            <a:picLocks noChangeAspect="1"/>
+          </p:cNvPicPr>
           <p:nvPr/>
         </p:nvPicPr>
         <p:blipFill>
-          <a:blip r:embed="rId2"/>
-          <a:stretch/>
+          <a:blip r:embed="rId2" cstate="print">
+            <a:extLst>
+              <a:ext uri="{28A0092B-C50C-407E-A947-70E740481C1C}">
+                <a14:useLocalDpi xmlns:a14="http://schemas.microsoft.com/office/drawing/2010/main" val="0"/>
+              </a:ext>
+            </a:extLst>
+          </a:blip>
+          <a:stretch>
+            <a:fillRect/>
+          </a:stretch>
         </p:blipFill>
         <p:spPr>
           <a:xfrm>
-            <a:off x="771840" y="930600"/>
-            <a:ext cx="8903160" cy="4963320"/>
+            <a:off x="5040312" y="0"/>
+            <a:ext cx="5040313" cy="5670550"/>
           </a:xfrm>
           <a:prstGeom prst="rect">
             <a:avLst/>
           </a:prstGeom>
-          <a:noFill/>
-          <a:ln w="0">
-            <a:noFill/>
-          </a:ln>
         </p:spPr>
       </p:pic>
     </p:spTree>
@@ -5715,7 +5727,7 @@
                   <a:schemeClr val="tx1"/>
                 </a:solidFill>
               </a:rPr>
-              <a:t>Example model output</a:t>
+              <a:t>Example model output (Derrik’s truck)</a:t>
             </a:r>
           </a:p>
         </p:txBody>
@@ -5738,16 +5750,20 @@
         </p:nvSpPr>
         <p:spPr>
           <a:xfrm>
-            <a:off x="360000" y="955744"/>
-            <a:ext cx="9360720" cy="4879339"/>
+            <a:off x="360000" y="1600806"/>
+            <a:ext cx="9360720" cy="3656386"/>
           </a:xfrm>
         </p:spPr>
         <p:txBody>
           <a:bodyPr/>
           <a:lstStyle/>
           <a:p>
-            <a:r>
-              <a:rPr lang="en-US" sz="2000" dirty="0">
+            <a:pPr marL="342900" indent="-342900" algn="l">
+              <a:buFont typeface="Arial" panose="020B0604020202020204" pitchFamily="34" charset="0"/>
+              <a:buChar char="•"/>
+            </a:pPr>
+            <a:r>
+              <a:rPr lang="en-US" sz="2400" dirty="0">
                 <a:solidFill>
                   <a:schemeClr val="tx1"/>
                 </a:solidFill>
@@ -5756,8 +5772,12 @@
             </a:r>
           </a:p>
           <a:p>
-            <a:r>
-              <a:rPr lang="en-US" sz="2000" dirty="0">
+            <a:pPr marL="342900" indent="-342900" algn="l">
+              <a:buFont typeface="Arial" panose="020B0604020202020204" pitchFamily="34" charset="0"/>
+              <a:buChar char="•"/>
+            </a:pPr>
+            <a:r>
+              <a:rPr lang="en-US" sz="2400" dirty="0">
                 <a:solidFill>
                   <a:schemeClr val="tx1"/>
                 </a:solidFill>
@@ -5766,8 +5786,12 @@
             </a:r>
           </a:p>
           <a:p>
-            <a:r>
-              <a:rPr lang="en-US" sz="2000" dirty="0">
+            <a:pPr marL="342900" indent="-342900" algn="l">
+              <a:buFont typeface="Arial" panose="020B0604020202020204" pitchFamily="34" charset="0"/>
+              <a:buChar char="•"/>
+            </a:pPr>
+            <a:r>
+              <a:rPr lang="en-US" sz="2400" dirty="0">
                 <a:solidFill>
                   <a:schemeClr val="tx1"/>
                 </a:solidFill>
@@ -5776,8 +5800,12 @@
             </a:r>
           </a:p>
           <a:p>
-            <a:r>
-              <a:rPr lang="en-US" sz="2000" dirty="0">
+            <a:pPr marL="342900" indent="-342900" algn="l">
+              <a:buFont typeface="Arial" panose="020B0604020202020204" pitchFamily="34" charset="0"/>
+              <a:buChar char="•"/>
+            </a:pPr>
+            <a:r>
+              <a:rPr lang="en-US" sz="2400" dirty="0">
                 <a:solidFill>
                   <a:schemeClr val="tx1"/>
                 </a:solidFill>
@@ -5786,8 +5814,12 @@
             </a:r>
           </a:p>
           <a:p>
-            <a:r>
-              <a:rPr lang="en-US" sz="2000" dirty="0">
+            <a:pPr marL="342900" indent="-342900" algn="l">
+              <a:buFont typeface="Arial" panose="020B0604020202020204" pitchFamily="34" charset="0"/>
+              <a:buChar char="•"/>
+            </a:pPr>
+            <a:r>
+              <a:rPr lang="en-US" sz="2400" dirty="0">
                 <a:solidFill>
                   <a:schemeClr val="tx1"/>
                 </a:solidFill>
@@ -5796,8 +5828,12 @@
             </a:r>
           </a:p>
           <a:p>
-            <a:r>
-              <a:rPr lang="en-US" sz="2000" dirty="0">
+            <a:pPr marL="342900" indent="-342900" algn="l">
+              <a:buFont typeface="Arial" panose="020B0604020202020204" pitchFamily="34" charset="0"/>
+              <a:buChar char="•"/>
+            </a:pPr>
+            <a:r>
+              <a:rPr lang="en-US" sz="2400" dirty="0">
                 <a:solidFill>
                   <a:schemeClr val="tx1"/>
                 </a:solidFill>
@@ -5806,8 +5842,12 @@
             </a:r>
           </a:p>
           <a:p>
-            <a:r>
-              <a:rPr lang="en-US" sz="2000" dirty="0">
+            <a:pPr marL="342900" indent="-342900" algn="l">
+              <a:buFont typeface="Arial" panose="020B0604020202020204" pitchFamily="34" charset="0"/>
+              <a:buChar char="•"/>
+            </a:pPr>
+            <a:r>
+              <a:rPr lang="en-US" sz="2400" dirty="0">
                 <a:solidFill>
                   <a:schemeClr val="tx1"/>
                 </a:solidFill>
@@ -5816,8 +5856,12 @@
             </a:r>
           </a:p>
           <a:p>
-            <a:r>
-              <a:rPr lang="en-US" sz="2000" dirty="0">
+            <a:pPr marL="342900" indent="-342900" algn="l">
+              <a:buFont typeface="Arial" panose="020B0604020202020204" pitchFamily="34" charset="0"/>
+              <a:buChar char="•"/>
+            </a:pPr>
+            <a:r>
+              <a:rPr lang="en-US" sz="2400" dirty="0">
                 <a:solidFill>
                   <a:schemeClr val="tx1"/>
                 </a:solidFill>
@@ -5826,8 +5870,12 @@
             </a:r>
           </a:p>
           <a:p>
-            <a:r>
-              <a:rPr lang="en-US" sz="2000" dirty="0">
+            <a:pPr marL="342900" indent="-342900" algn="l">
+              <a:buFont typeface="Arial" panose="020B0604020202020204" pitchFamily="34" charset="0"/>
+              <a:buChar char="•"/>
+            </a:pPr>
+            <a:r>
+              <a:rPr lang="en-US" sz="2400" dirty="0">
                 <a:solidFill>
                   <a:schemeClr val="tx1"/>
                 </a:solidFill>
@@ -5836,8 +5884,12 @@
             </a:r>
           </a:p>
           <a:p>
-            <a:r>
-              <a:rPr lang="en-US" sz="2000" dirty="0">
+            <a:pPr marL="342900" indent="-342900" algn="l">
+              <a:buFont typeface="Arial" panose="020B0604020202020204" pitchFamily="34" charset="0"/>
+              <a:buChar char="•"/>
+            </a:pPr>
+            <a:r>
+              <a:rPr lang="en-US" sz="2400" dirty="0">
                 <a:solidFill>
                   <a:schemeClr val="tx1"/>
                 </a:solidFill>
@@ -5846,8 +5898,12 @@
             </a:r>
           </a:p>
           <a:p>
-            <a:r>
-              <a:rPr lang="en-US" sz="2000" dirty="0">
+            <a:pPr marL="342900" indent="-342900" algn="l">
+              <a:buFont typeface="Arial" panose="020B0604020202020204" pitchFamily="34" charset="0"/>
+              <a:buChar char="•"/>
+            </a:pPr>
+            <a:r>
+              <a:rPr lang="en-US" sz="2400" dirty="0">
                 <a:solidFill>
                   <a:schemeClr val="tx1"/>
                 </a:solidFill>
@@ -5942,16 +5998,20 @@
         </p:nvSpPr>
         <p:spPr>
           <a:xfrm>
-            <a:off x="359952" y="1083644"/>
-            <a:ext cx="8568895" cy="4457631"/>
+            <a:off x="359952" y="1317812"/>
+            <a:ext cx="8568895" cy="4132729"/>
           </a:xfrm>
         </p:spPr>
         <p:txBody>
           <a:bodyPr/>
           <a:lstStyle/>
           <a:p>
-            <a:r>
-              <a:rPr lang="en-US" sz="2000" dirty="0">
+            <a:pPr marL="342900" indent="-342900" algn="l">
+              <a:buFont typeface="Arial" panose="020B0604020202020204" pitchFamily="34" charset="0"/>
+              <a:buChar char="•"/>
+            </a:pPr>
+            <a:r>
+              <a:rPr lang="en-US" sz="2400" dirty="0">
                 <a:solidFill>
                   <a:schemeClr val="tx1"/>
                 </a:solidFill>
@@ -5960,8 +6020,12 @@
             </a:r>
           </a:p>
           <a:p>
-            <a:r>
-              <a:rPr lang="en-US" sz="2000" dirty="0">
+            <a:pPr marL="342900" indent="-342900" algn="l">
+              <a:buFont typeface="Arial" panose="020B0604020202020204" pitchFamily="34" charset="0"/>
+              <a:buChar char="•"/>
+            </a:pPr>
+            <a:r>
+              <a:rPr lang="en-US" sz="2400" dirty="0">
                 <a:solidFill>
                   <a:schemeClr val="tx1"/>
                 </a:solidFill>
@@ -5970,8 +6034,12 @@
             </a:r>
           </a:p>
           <a:p>
-            <a:r>
-              <a:rPr lang="en-US" sz="2000" dirty="0">
+            <a:pPr marL="342900" indent="-342900" algn="l">
+              <a:buFont typeface="Arial" panose="020B0604020202020204" pitchFamily="34" charset="0"/>
+              <a:buChar char="•"/>
+            </a:pPr>
+            <a:r>
+              <a:rPr lang="en-US" sz="2400" dirty="0">
                 <a:solidFill>
                   <a:schemeClr val="tx1"/>
                 </a:solidFill>
@@ -5980,8 +6048,12 @@
             </a:r>
           </a:p>
           <a:p>
-            <a:r>
-              <a:rPr lang="en-US" sz="2000" dirty="0">
+            <a:pPr marL="342900" indent="-342900" algn="l">
+              <a:buFont typeface="Arial" panose="020B0604020202020204" pitchFamily="34" charset="0"/>
+              <a:buChar char="•"/>
+            </a:pPr>
+            <a:r>
+              <a:rPr lang="en-US" sz="2400" dirty="0">
                 <a:solidFill>
                   <a:schemeClr val="tx1"/>
                 </a:solidFill>
@@ -5990,8 +6062,12 @@
             </a:r>
           </a:p>
           <a:p>
-            <a:r>
-              <a:rPr lang="en-US" sz="2000" dirty="0">
+            <a:pPr marL="342900" indent="-342900" algn="l">
+              <a:buFont typeface="Arial" panose="020B0604020202020204" pitchFamily="34" charset="0"/>
+              <a:buChar char="•"/>
+            </a:pPr>
+            <a:r>
+              <a:rPr lang="en-US" sz="2400" dirty="0">
                 <a:solidFill>
                   <a:schemeClr val="tx1"/>
                 </a:solidFill>
@@ -6000,8 +6076,12 @@
             </a:r>
           </a:p>
           <a:p>
-            <a:r>
-              <a:rPr lang="en-US" sz="2000" dirty="0">
+            <a:pPr marL="342900" indent="-342900" algn="l">
+              <a:buFont typeface="Arial" panose="020B0604020202020204" pitchFamily="34" charset="0"/>
+              <a:buChar char="•"/>
+            </a:pPr>
+            <a:r>
+              <a:rPr lang="en-US" sz="2400" dirty="0">
                 <a:solidFill>
                   <a:schemeClr val="tx1"/>
                 </a:solidFill>
@@ -6010,8 +6090,12 @@
             </a:r>
           </a:p>
           <a:p>
-            <a:r>
-              <a:rPr lang="en-US" sz="2000" dirty="0">
+            <a:pPr marL="342900" indent="-342900" algn="l">
+              <a:buFont typeface="Arial" panose="020B0604020202020204" pitchFamily="34" charset="0"/>
+              <a:buChar char="•"/>
+            </a:pPr>
+            <a:r>
+              <a:rPr lang="en-US" sz="2400" dirty="0">
                 <a:solidFill>
                   <a:schemeClr val="tx1"/>
                 </a:solidFill>
@@ -6020,8 +6104,12 @@
             </a:r>
           </a:p>
           <a:p>
-            <a:r>
-              <a:rPr lang="en-US" sz="2000" dirty="0">
+            <a:pPr marL="342900" indent="-342900" algn="l">
+              <a:buFont typeface="Arial" panose="020B0604020202020204" pitchFamily="34" charset="0"/>
+              <a:buChar char="•"/>
+            </a:pPr>
+            <a:r>
+              <a:rPr lang="en-US" sz="2400" dirty="0">
                 <a:solidFill>
                   <a:schemeClr val="tx1"/>
                 </a:solidFill>
@@ -6030,8 +6118,12 @@
             </a:r>
           </a:p>
           <a:p>
-            <a:r>
-              <a:rPr lang="en-US" sz="2000" dirty="0">
+            <a:pPr marL="342900" indent="-342900" algn="l">
+              <a:buFont typeface="Arial" panose="020B0604020202020204" pitchFamily="34" charset="0"/>
+              <a:buChar char="•"/>
+            </a:pPr>
+            <a:r>
+              <a:rPr lang="en-US" sz="2400" dirty="0">
                 <a:solidFill>
                   <a:schemeClr val="tx1"/>
                 </a:solidFill>
@@ -6040,8 +6132,12 @@
             </a:r>
           </a:p>
           <a:p>
-            <a:r>
-              <a:rPr lang="en-US" sz="2000" dirty="0">
+            <a:pPr marL="342900" indent="-342900" algn="l">
+              <a:buFont typeface="Arial" panose="020B0604020202020204" pitchFamily="34" charset="0"/>
+              <a:buChar char="•"/>
+            </a:pPr>
+            <a:r>
+              <a:rPr lang="en-US" sz="2400" dirty="0">
                 <a:solidFill>
                   <a:schemeClr val="tx1"/>
                 </a:solidFill>
@@ -6050,8 +6146,12 @@
             </a:r>
           </a:p>
           <a:p>
-            <a:r>
-              <a:rPr lang="en-US" sz="2000" dirty="0">
+            <a:pPr marL="342900" indent="-342900" algn="l">
+              <a:buFont typeface="Arial" panose="020B0604020202020204" pitchFamily="34" charset="0"/>
+              <a:buChar char="•"/>
+            </a:pPr>
+            <a:r>
+              <a:rPr lang="en-US" sz="2400" dirty="0">
                 <a:solidFill>
                   <a:schemeClr val="tx1"/>
                 </a:solidFill>
@@ -6146,16 +6246,20 @@
         </p:nvSpPr>
         <p:spPr>
           <a:xfrm>
-            <a:off x="359952" y="1212919"/>
-            <a:ext cx="9360720" cy="4457631"/>
+            <a:off x="359952" y="1609771"/>
+            <a:ext cx="9360720" cy="3656386"/>
           </a:xfrm>
         </p:spPr>
         <p:txBody>
           <a:bodyPr/>
           <a:lstStyle/>
           <a:p>
-            <a:r>
-              <a:rPr lang="en-US" sz="2000" dirty="0">
+            <a:pPr marL="342900" indent="-342900" algn="l">
+              <a:buFont typeface="Arial" panose="020B0604020202020204" pitchFamily="34" charset="0"/>
+              <a:buChar char="•"/>
+            </a:pPr>
+            <a:r>
+              <a:rPr lang="en-US" sz="2400" dirty="0">
                 <a:solidFill>
                   <a:schemeClr val="tx1"/>
                 </a:solidFill>
@@ -6164,18 +6268,26 @@
             </a:r>
           </a:p>
           <a:p>
-            <a:r>
-              <a:rPr lang="en-US" sz="2000" dirty="0">
+            <a:pPr marL="342900" indent="-342900" algn="l">
+              <a:buFont typeface="Arial" panose="020B0604020202020204" pitchFamily="34" charset="0"/>
+              <a:buChar char="•"/>
+            </a:pPr>
+            <a:r>
+              <a:rPr lang="en-US" sz="2400" dirty="0">
                 <a:solidFill>
                   <a:schemeClr val="tx1"/>
                 </a:solidFill>
               </a:rPr>
-              <a:t>Input Vehicle: Toyota  Tacoma</a:t>
-            </a:r>
-          </a:p>
-          <a:p>
-            <a:r>
-              <a:rPr lang="en-US" sz="2000" dirty="0">
+              <a:t>Input Vehicle: Toyota Tacoma</a:t>
+            </a:r>
+          </a:p>
+          <a:p>
+            <a:pPr marL="342900" indent="-342900" algn="l">
+              <a:buFont typeface="Arial" panose="020B0604020202020204" pitchFamily="34" charset="0"/>
+              <a:buChar char="•"/>
+            </a:pPr>
+            <a:r>
+              <a:rPr lang="en-US" sz="2400" dirty="0">
                 <a:solidFill>
                   <a:schemeClr val="tx1"/>
                 </a:solidFill>
@@ -6184,8 +6296,12 @@
             </a:r>
           </a:p>
           <a:p>
-            <a:r>
-              <a:rPr lang="en-US" sz="2000" dirty="0">
+            <a:pPr marL="342900" indent="-342900" algn="l">
+              <a:buFont typeface="Arial" panose="020B0604020202020204" pitchFamily="34" charset="0"/>
+              <a:buChar char="•"/>
+            </a:pPr>
+            <a:r>
+              <a:rPr lang="en-US" sz="2400" dirty="0">
                 <a:solidFill>
                   <a:schemeClr val="tx1"/>
                 </a:solidFill>
@@ -6193,22 +6309,26 @@
               <a:t>Canonical Model Representation: </a:t>
             </a:r>
             <a:r>
-              <a:rPr lang="en-US" sz="2000" dirty="0" err="1">
+              <a:rPr lang="en-US" sz="2400" dirty="0" err="1">
                 <a:solidFill>
                   <a:schemeClr val="tx1"/>
                 </a:solidFill>
               </a:rPr>
               <a:t>toyota_Other</a:t>
             </a:r>
-            <a:endParaRPr lang="en-US" sz="2000" dirty="0">
+            <a:endParaRPr lang="en-US" sz="2400" dirty="0">
               <a:solidFill>
                 <a:schemeClr val="tx1"/>
               </a:solidFill>
             </a:endParaRPr>
           </a:p>
           <a:p>
-            <a:r>
-              <a:rPr lang="en-US" sz="2000" dirty="0">
+            <a:pPr marL="342900" indent="-342900" algn="l">
+              <a:buFont typeface="Arial" panose="020B0604020202020204" pitchFamily="34" charset="0"/>
+              <a:buChar char="•"/>
+            </a:pPr>
+            <a:r>
+              <a:rPr lang="en-US" sz="2400" dirty="0">
                 <a:solidFill>
                   <a:schemeClr val="tx1"/>
                 </a:solidFill>
@@ -6217,8 +6337,12 @@
             </a:r>
           </a:p>
           <a:p>
-            <a:r>
-              <a:rPr lang="en-US" sz="2000" dirty="0">
+            <a:pPr marL="342900" indent="-342900" algn="l">
+              <a:buFont typeface="Arial" panose="020B0604020202020204" pitchFamily="34" charset="0"/>
+              <a:buChar char="•"/>
+            </a:pPr>
+            <a:r>
+              <a:rPr lang="en-US" sz="2400" dirty="0">
                 <a:solidFill>
                   <a:schemeClr val="tx1"/>
                 </a:solidFill>
@@ -6227,8 +6351,12 @@
             </a:r>
           </a:p>
           <a:p>
-            <a:r>
-              <a:rPr lang="en-US" sz="2000" dirty="0">
+            <a:pPr marL="342900" indent="-342900" algn="l">
+              <a:buFont typeface="Arial" panose="020B0604020202020204" pitchFamily="34" charset="0"/>
+              <a:buChar char="•"/>
+            </a:pPr>
+            <a:r>
+              <a:rPr lang="en-US" sz="2400" dirty="0">
                 <a:solidFill>
                   <a:schemeClr val="tx1"/>
                 </a:solidFill>
@@ -6237,8 +6365,12 @@
             </a:r>
           </a:p>
           <a:p>
-            <a:r>
-              <a:rPr lang="en-US" sz="2000" dirty="0">
+            <a:pPr marL="342900" indent="-342900" algn="l">
+              <a:buFont typeface="Arial" panose="020B0604020202020204" pitchFamily="34" charset="0"/>
+              <a:buChar char="•"/>
+            </a:pPr>
+            <a:r>
+              <a:rPr lang="en-US" sz="2400" dirty="0">
                 <a:solidFill>
                   <a:schemeClr val="tx1"/>
                 </a:solidFill>
@@ -6247,8 +6379,12 @@
             </a:r>
           </a:p>
           <a:p>
-            <a:r>
-              <a:rPr lang="en-US" sz="2000" dirty="0">
+            <a:pPr marL="342900" indent="-342900" algn="l">
+              <a:buFont typeface="Arial" panose="020B0604020202020204" pitchFamily="34" charset="0"/>
+              <a:buChar char="•"/>
+            </a:pPr>
+            <a:r>
+              <a:rPr lang="en-US" sz="2400" dirty="0">
                 <a:solidFill>
                   <a:schemeClr val="tx1"/>
                 </a:solidFill>
@@ -6257,8 +6393,12 @@
             </a:r>
           </a:p>
           <a:p>
-            <a:r>
-              <a:rPr lang="en-US" sz="2000" dirty="0">
+            <a:pPr marL="342900" indent="-342900" algn="l">
+              <a:buFont typeface="Arial" panose="020B0604020202020204" pitchFamily="34" charset="0"/>
+              <a:buChar char="•"/>
+            </a:pPr>
+            <a:r>
+              <a:rPr lang="en-US" sz="2400" dirty="0">
                 <a:solidFill>
                   <a:schemeClr val="tx1"/>
                 </a:solidFill>
@@ -6267,8 +6407,12 @@
             </a:r>
           </a:p>
           <a:p>
-            <a:r>
-              <a:rPr lang="en-US" sz="2000" dirty="0">
+            <a:pPr marL="342900" indent="-342900" algn="l">
+              <a:buFont typeface="Arial" panose="020B0604020202020204" pitchFamily="34" charset="0"/>
+              <a:buChar char="•"/>
+            </a:pPr>
+            <a:r>
+              <a:rPr lang="en-US" sz="2400" dirty="0">
                 <a:solidFill>
                   <a:schemeClr val="tx1"/>
                 </a:solidFill>
@@ -9271,26 +9415,38 @@
       </p:pic>
       <p:pic>
         <p:nvPicPr>
-          <p:cNvPr id="50" name="Picture 8"/>
-          <p:cNvPicPr/>
+          <p:cNvPr id="3" name="Picture 2">
+            <a:extLst>
+              <a:ext uri="{FF2B5EF4-FFF2-40B4-BE49-F238E27FC236}">
+                <a16:creationId xmlns:a16="http://schemas.microsoft.com/office/drawing/2014/main" id="{43DF680F-E5F3-B34A-33AD-DCF13C97591D}"/>
+              </a:ext>
+            </a:extLst>
+          </p:cNvPr>
+          <p:cNvPicPr>
+            <a:picLocks noChangeAspect="1"/>
+          </p:cNvPicPr>
           <p:nvPr/>
         </p:nvPicPr>
         <p:blipFill>
-          <a:blip r:embed="rId4"/>
-          <a:stretch/>
+          <a:blip r:embed="rId4">
+            <a:extLst>
+              <a:ext uri="{28A0092B-C50C-407E-A947-70E740481C1C}">
+                <a14:useLocalDpi xmlns:a14="http://schemas.microsoft.com/office/drawing/2010/main" val="0"/>
+              </a:ext>
+            </a:extLst>
+          </a:blip>
+          <a:stretch>
+            <a:fillRect/>
+          </a:stretch>
         </p:blipFill>
         <p:spPr>
           <a:xfrm>
-            <a:off x="4327920" y="1467000"/>
-            <a:ext cx="5408280" cy="3244680"/>
+            <a:off x="4319101" y="1424520"/>
+            <a:ext cx="5479200" cy="3287520"/>
           </a:xfrm>
           <a:prstGeom prst="rect">
             <a:avLst/>
           </a:prstGeom>
-          <a:noFill/>
-          <a:ln w="0">
-            <a:noFill/>
-          </a:ln>
         </p:spPr>
       </p:pic>
     </p:spTree>
@@ -9381,26 +9537,38 @@
       </p:sp>
       <p:pic>
         <p:nvPicPr>
-          <p:cNvPr id="52" name="Picture 8"/>
-          <p:cNvPicPr/>
+          <p:cNvPr id="3" name="Picture 2">
+            <a:extLst>
+              <a:ext uri="{FF2B5EF4-FFF2-40B4-BE49-F238E27FC236}">
+                <a16:creationId xmlns:a16="http://schemas.microsoft.com/office/drawing/2014/main" id="{D22A61F5-6960-C4F5-5640-C4CE42340BAE}"/>
+              </a:ext>
+            </a:extLst>
+          </p:cNvPr>
+          <p:cNvPicPr>
+            <a:picLocks noChangeAspect="1"/>
+          </p:cNvPicPr>
           <p:nvPr/>
         </p:nvPicPr>
         <p:blipFill>
-          <a:blip r:embed="rId2"/>
-          <a:stretch/>
+          <a:blip r:embed="rId2">
+            <a:extLst>
+              <a:ext uri="{28A0092B-C50C-407E-A947-70E740481C1C}">
+                <a14:useLocalDpi xmlns:a14="http://schemas.microsoft.com/office/drawing/2010/main" val="0"/>
+              </a:ext>
+            </a:extLst>
+          </a:blip>
+          <a:stretch>
+            <a:fillRect/>
+          </a:stretch>
         </p:blipFill>
         <p:spPr>
           <a:xfrm>
-            <a:off x="998640" y="1059480"/>
-            <a:ext cx="7511760" cy="4506840"/>
+            <a:off x="1357778" y="1251510"/>
+            <a:ext cx="7365067" cy="4419040"/>
           </a:xfrm>
           <a:prstGeom prst="rect">
             <a:avLst/>
           </a:prstGeom>
-          <a:noFill/>
-          <a:ln w="0">
-            <a:noFill/>
-          </a:ln>
         </p:spPr>
       </p:pic>
     </p:spTree>
@@ -9601,26 +9769,38 @@
       </p:sp>
       <p:pic>
         <p:nvPicPr>
-          <p:cNvPr id="56" name="Picture 6"/>
-          <p:cNvPicPr/>
+          <p:cNvPr id="3" name="Picture 2">
+            <a:extLst>
+              <a:ext uri="{FF2B5EF4-FFF2-40B4-BE49-F238E27FC236}">
+                <a16:creationId xmlns:a16="http://schemas.microsoft.com/office/drawing/2014/main" id="{56A51E16-A419-5A0A-6CAD-3F5C069155EE}"/>
+              </a:ext>
+            </a:extLst>
+          </p:cNvPr>
+          <p:cNvPicPr>
+            <a:picLocks noChangeAspect="1"/>
+          </p:cNvPicPr>
           <p:nvPr/>
         </p:nvPicPr>
         <p:blipFill>
-          <a:blip r:embed="rId2"/>
-          <a:stretch/>
+          <a:blip r:embed="rId2">
+            <a:extLst>
+              <a:ext uri="{28A0092B-C50C-407E-A947-70E740481C1C}">
+                <a14:useLocalDpi xmlns:a14="http://schemas.microsoft.com/office/drawing/2010/main" val="0"/>
+              </a:ext>
+            </a:extLst>
+          </a:blip>
+          <a:stretch>
+            <a:fillRect/>
+          </a:stretch>
         </p:blipFill>
         <p:spPr>
           <a:xfrm>
-            <a:off x="132840" y="977760"/>
-            <a:ext cx="10080360" cy="4479840"/>
+            <a:off x="261724" y="1003680"/>
+            <a:ext cx="9555832" cy="4666870"/>
           </a:xfrm>
           <a:prstGeom prst="rect">
             <a:avLst/>
           </a:prstGeom>
-          <a:noFill/>
-          <a:ln w="0">
-            <a:noFill/>
-          </a:ln>
         </p:spPr>
       </p:pic>
     </p:spTree>

--- a/presentations/project1_presentation.pptx
+++ b/presentations/project1_presentation.pptx
@@ -5713,8 +5713,8 @@
         </p:nvSpPr>
         <p:spPr>
           <a:xfrm>
-            <a:off x="539952" y="526396"/>
-            <a:ext cx="9000720" cy="429348"/>
+            <a:off x="539952" y="519471"/>
+            <a:ext cx="9000720" cy="443198"/>
           </a:xfrm>
         </p:spPr>
         <p:txBody>
@@ -5722,12 +5722,20 @@
           <a:lstStyle/>
           <a:p>
             <a:r>
+              <a:rPr lang="en-US" sz="3200" dirty="0">
+                <a:solidFill>
+                  <a:schemeClr val="tx1"/>
+                </a:solidFill>
+              </a:rPr>
+              <a:t>Ram 1500 </a:t>
+            </a:r>
+            <a:r>
               <a:rPr lang="en-US" dirty="0">
                 <a:solidFill>
                   <a:schemeClr val="tx1"/>
                 </a:solidFill>
               </a:rPr>
-              <a:t>Example model output (Derrik’s truck)</a:t>
+              <a:t>Example (Derrik’s truck)</a:t>
             </a:r>
           </a:p>
         </p:txBody>
@@ -5750,7 +5758,7 @@
         </p:nvSpPr>
         <p:spPr>
           <a:xfrm>
-            <a:off x="360000" y="1600806"/>
+            <a:off x="359952" y="1189989"/>
             <a:ext cx="9360720" cy="3656386"/>
           </a:xfrm>
         </p:spPr>
@@ -5961,8 +5969,8 @@
         </p:nvSpPr>
         <p:spPr>
           <a:xfrm>
-            <a:off x="539952" y="526396"/>
-            <a:ext cx="9000720" cy="429348"/>
+            <a:off x="539952" y="519471"/>
+            <a:ext cx="9000720" cy="443198"/>
           </a:xfrm>
         </p:spPr>
         <p:txBody>
@@ -5970,12 +5978,20 @@
           <a:lstStyle/>
           <a:p>
             <a:r>
+              <a:rPr lang="en-US" sz="3200" dirty="0">
+                <a:solidFill>
+                  <a:schemeClr val="tx1"/>
+                </a:solidFill>
+              </a:rPr>
+              <a:t>Honda Accord</a:t>
+            </a:r>
+            <a:r>
               <a:rPr lang="en-US" dirty="0">
                 <a:solidFill>
                   <a:schemeClr val="tx1"/>
                 </a:solidFill>
               </a:rPr>
-              <a:t>Another model example</a:t>
+              <a:t> Example</a:t>
             </a:r>
           </a:p>
         </p:txBody>
@@ -5998,8 +6014,8 @@
         </p:nvSpPr>
         <p:spPr>
           <a:xfrm>
-            <a:off x="359952" y="1317812"/>
-            <a:ext cx="8568895" cy="4132729"/>
+            <a:off x="403570" y="962669"/>
+            <a:ext cx="9180720" cy="4132729"/>
           </a:xfrm>
         </p:spPr>
         <p:txBody>
@@ -6209,8 +6225,8 @@
         </p:nvSpPr>
         <p:spPr>
           <a:xfrm>
-            <a:off x="539952" y="526396"/>
-            <a:ext cx="9000720" cy="429348"/>
+            <a:off x="539952" y="519471"/>
+            <a:ext cx="9000720" cy="443198"/>
           </a:xfrm>
         </p:spPr>
         <p:txBody>
@@ -6218,12 +6234,20 @@
           <a:lstStyle/>
           <a:p>
             <a:r>
+              <a:rPr lang="en-US" sz="3200" dirty="0">
+                <a:solidFill>
+                  <a:schemeClr val="tx1"/>
+                </a:solidFill>
+              </a:rPr>
+              <a:t>Toyota Tacoma</a:t>
+            </a:r>
+            <a:r>
               <a:rPr lang="en-US" dirty="0">
                 <a:solidFill>
                   <a:schemeClr val="tx1"/>
                 </a:solidFill>
               </a:rPr>
-              <a:t>Another Example Model </a:t>
+              <a:t> Example</a:t>
             </a:r>
           </a:p>
         </p:txBody>
@@ -6246,7 +6270,7 @@
         </p:nvSpPr>
         <p:spPr>
           <a:xfrm>
-            <a:off x="359952" y="1609771"/>
+            <a:off x="359952" y="1119441"/>
             <a:ext cx="9360720" cy="3656386"/>
           </a:xfrm>
         </p:spPr>
@@ -6848,7 +6872,7 @@
               <a:buChar char=""/>
             </a:pPr>
             <a:r>
-              <a:rPr lang="en-US" sz="3200" b="0" u="none" strike="noStrike">
+              <a:rPr lang="en-US" sz="3200" b="0" u="none" strike="noStrike" dirty="0">
                 <a:solidFill>
                   <a:srgbClr val="000000"/>
                 </a:solidFill>
@@ -6857,9 +6881,25 @@
                 <a:latin typeface="Arial"/>
                 <a:ea typeface="DejaVu Sans"/>
               </a:rPr>
-              <a:t>Investigate adding original MSRP data for each vehicle model</a:t>
-            </a:r>
-            <a:endParaRPr lang="en-US" sz="3200" b="0" u="none" strike="noStrike">
+              <a:t>Investigate adding original MSRP, accident history, and local/other economic data for each vehicle model</a:t>
+            </a:r>
+          </a:p>
+          <a:p>
+            <a:pPr marL="228600" indent="-228600" algn="l" defTabSz="914400">
+              <a:lnSpc>
+                <a:spcPct val="90000"/>
+              </a:lnSpc>
+              <a:spcBef>
+                <a:spcPts val="1417"/>
+              </a:spcBef>
+              <a:buClr>
+                <a:srgbClr val="000000"/>
+              </a:buClr>
+              <a:buSzPct val="45000"/>
+              <a:buFont typeface="Wingdings" charset="2"/>
+              <a:buChar char=""/>
+            </a:pPr>
+            <a:endParaRPr lang="en-US" sz="3200" b="0" u="none" strike="noStrike" dirty="0">
               <a:solidFill>
                 <a:srgbClr val="000000"/>
               </a:solidFill>
@@ -6881,7 +6921,7 @@
               </a:spcBef>
               <a:buNone/>
             </a:pPr>
-            <a:endParaRPr lang="en-US" sz="3200" b="0" u="none" strike="noStrike">
+            <a:endParaRPr lang="en-US" sz="3200" b="0" u="none" strike="noStrike" dirty="0">
               <a:solidFill>
                 <a:srgbClr val="000000"/>
               </a:solidFill>

--- a/presentations/project1_presentation.pptx
+++ b/presentations/project1_presentation.pptx
@@ -139,15 +139,6 @@
 </p:cmAuthorLst>
 </file>
 
-<file path=ppt/comments/comment1.xml><?xml version="1.0" encoding="utf-8"?>
-<p:cmLst xmlns:a="http://schemas.openxmlformats.org/drawingml/2006/main" xmlns:r="http://schemas.openxmlformats.org/officeDocument/2006/relationships" xmlns:p="http://schemas.openxmlformats.org/presentationml/2006/main">
-  <p:cm authorId="0" dt="2026-06-13T19:08:30" idx="1">
-    <p:pos x="0" y="0"/>
-    <p:text>The model estimates that each additional year of age decreases vehicle value by approximately 13.8%, while every additional 10,000 miles reduces value by approximately 2.2%. Vehicle condition had a smaller but statistically significant effect, increasing value by approximately 2.0% for each one-point improvement in condition rating. </p:text>
-  </p:cm>
-</p:cmLst>
-</file>
-
 <file path=ppt/notesMasters/notesMaster1.xml><?xml version="1.0" encoding="utf-8"?>
 <p:notesMaster xmlns:a="http://schemas.openxmlformats.org/drawingml/2006/main" xmlns:r="http://schemas.openxmlformats.org/officeDocument/2006/relationships" xmlns:p="http://schemas.openxmlformats.org/presentationml/2006/main">
   <p:cSld>
@@ -632,6 +623,143 @@
       </p:grpSpPr>
       <p:sp>
         <p:nvSpPr>
+          <p:cNvPr id="2" name="Slide Image Placeholder 1"/>
+          <p:cNvSpPr>
+            <a:spLocks noGrp="1" noRot="1" noChangeAspect="1"/>
+          </p:cNvSpPr>
+          <p:nvPr>
+            <p:ph type="sldImg"/>
+          </p:nvPr>
+        </p:nvSpPr>
+        <p:spPr>
+          <a:xfrm>
+            <a:off x="1009650" y="846138"/>
+            <a:ext cx="5753100" cy="3236912"/>
+          </a:xfrm>
+        </p:spPr>
+      </p:sp>
+      <p:sp>
+        <p:nvSpPr>
+          <p:cNvPr id="3" name="Notes Placeholder 2"/>
+          <p:cNvSpPr>
+            <a:spLocks noGrp="1"/>
+          </p:cNvSpPr>
+          <p:nvPr>
+            <p:ph type="body" idx="1"/>
+          </p:nvPr>
+        </p:nvSpPr>
+        <p:spPr/>
+        <p:txBody>
+          <a:bodyPr/>
+          <a:lstStyle/>
+          <a:p>
+            <a:pPr marL="0" marR="0" lvl="0" indent="0" algn="l" defTabSz="914400" rtl="0" eaLnBrk="1" fontAlgn="auto" latinLnBrk="0" hangingPunct="1">
+              <a:lnSpc>
+                <a:spcPct val="100000"/>
+              </a:lnSpc>
+              <a:spcBef>
+                <a:spcPts val="0"/>
+              </a:spcBef>
+              <a:spcAft>
+                <a:spcPts val="0"/>
+              </a:spcAft>
+              <a:buClrTx/>
+              <a:buSzTx/>
+              <a:buFontTx/>
+              <a:buNone/>
+              <a:tabLst/>
+              <a:defRPr/>
+            </a:pPr>
+            <a:r>
+              <a:rPr lang="en-US" sz="1200" kern="1200" dirty="0">
+                <a:solidFill>
+                  <a:schemeClr val="tx1"/>
+                </a:solidFill>
+                <a:effectLst/>
+                <a:latin typeface="+mn-lt"/>
+                <a:ea typeface="+mn-ea"/>
+                <a:cs typeface="+mn-cs"/>
+              </a:rPr>
+              <a:t>The model estimates that each additional year of age decreases vehicle value by approximately 13.8%, while every additional 10,000 miles reduces value by approximately 2.2%. Vehicle condition had a smaller but statistically significant effect, increasing value by approximately 2.0% for each one-point improvement in condition rating. </a:t>
+            </a:r>
+          </a:p>
+          <a:p>
+            <a:endParaRPr lang="en-US" dirty="0"/>
+          </a:p>
+        </p:txBody>
+      </p:sp>
+      <p:sp>
+        <p:nvSpPr>
+          <p:cNvPr id="4" name="Slide Number Placeholder 3"/>
+          <p:cNvSpPr>
+            <a:spLocks noGrp="1"/>
+          </p:cNvSpPr>
+          <p:nvPr>
+            <p:ph type="sldNum" idx="15"/>
+          </p:nvPr>
+        </p:nvSpPr>
+        <p:spPr/>
+        <p:txBody>
+          <a:bodyPr/>
+          <a:lstStyle/>
+          <a:p>
+            <a:pPr indent="0" algn="r">
+              <a:buNone/>
+            </a:pPr>
+            <a:fld id="{F10A6092-1556-4449-B3DC-2C9E6481C092}" type="slidenum">
+              <a:rPr lang="en-US" sz="1400" b="0" u="none" strike="noStrike" smtClean="0">
+                <a:solidFill>
+                  <a:srgbClr val="000000"/>
+                </a:solidFill>
+                <a:effectLst/>
+                <a:uFillTx/>
+                <a:latin typeface="Times New Roman"/>
+              </a:rPr>
+              <a:t>3</a:t>
+            </a:fld>
+            <a:endParaRPr lang="en-US" sz="1400" b="0" u="none" strike="noStrike">
+              <a:solidFill>
+                <a:srgbClr val="FFFFFF"/>
+              </a:solidFill>
+              <a:effectLst/>
+              <a:uFillTx/>
+              <a:latin typeface="Times New Roman"/>
+            </a:endParaRPr>
+          </a:p>
+        </p:txBody>
+      </p:sp>
+    </p:spTree>
+    <p:extLst>
+      <p:ext uri="{BB962C8B-B14F-4D97-AF65-F5344CB8AC3E}">
+        <p14:creationId xmlns:p14="http://schemas.microsoft.com/office/powerpoint/2010/main" val="1396591272"/>
+      </p:ext>
+    </p:extLst>
+  </p:cSld>
+  <p:clrMapOvr>
+    <a:masterClrMapping/>
+  </p:clrMapOvr>
+</p:notes>
+</file>
+
+<file path=ppt/notesSlides/notesSlide2.xml><?xml version="1.0" encoding="utf-8"?>
+<p:notes xmlns:a="http://schemas.openxmlformats.org/drawingml/2006/main" xmlns:r="http://schemas.openxmlformats.org/officeDocument/2006/relationships" xmlns:p="http://schemas.openxmlformats.org/presentationml/2006/main">
+  <p:cSld>
+    <p:spTree>
+      <p:nvGrpSpPr>
+        <p:cNvPr id="1" name=""/>
+        <p:cNvGrpSpPr/>
+        <p:nvPr/>
+      </p:nvGrpSpPr>
+      <p:grpSpPr>
+        <a:xfrm>
+          <a:off x="0" y="0"/>
+          <a:ext cx="0" cy="0"/>
+          <a:chOff x="0" y="0"/>
+          <a:chExt cx="0" cy="0"/>
+        </a:xfrm>
+      </p:grpSpPr>
+      <p:sp>
+        <p:nvSpPr>
           <p:cNvPr id="70" name="PlaceHolder 1"/>
           <p:cNvSpPr>
             <a:spLocks noGrp="1" noRot="1" noChangeAspect="1"/>
@@ -652,6 +780,13 @@
             <a:noFill/>
           </a:ln>
         </p:spPr>
+        <p:txBody>
+          <a:bodyPr/>
+          <a:lstStyle/>
+          <a:p>
+            <a:endParaRPr lang="en-US"/>
+          </a:p>
+        </p:txBody>
       </p:sp>
       <p:sp>
         <p:nvSpPr>
@@ -8076,7 +8211,7 @@
               </a:tabLst>
             </a:pPr>
             <a:r>
-              <a:rPr lang="en-US" sz="4400" b="0" u="none" strike="noStrike">
+              <a:rPr lang="en-US" sz="4400" b="0" u="none" strike="noStrike" dirty="0">
                 <a:solidFill>
                   <a:srgbClr val="000000"/>
                 </a:solidFill>
@@ -8087,7 +8222,7 @@
               </a:rPr>
               <a:t>Executive Summary</a:t>
             </a:r>
-            <a:endParaRPr lang="en-US" sz="4400" b="0" u="none" strike="noStrike">
+            <a:endParaRPr lang="en-US" sz="4400" b="0" u="none" strike="noStrike" dirty="0">
               <a:solidFill>
                 <a:srgbClr val="DD4100"/>
               </a:solidFill>
@@ -8145,7 +8280,7 @@
               <a:buChar char=""/>
             </a:pPr>
             <a:r>
-              <a:rPr lang="en-US" sz="3200" b="0" u="none" strike="noStrike">
+              <a:rPr lang="en-US" sz="3200" b="0" u="none" strike="noStrike" dirty="0">
                 <a:solidFill>
                   <a:srgbClr val="000000"/>
                 </a:solidFill>
@@ -8156,7 +8291,7 @@
               </a:rPr>
               <a:t>Vehicle age was the strongest continuous predictor of resale value. </a:t>
             </a:r>
-            <a:endParaRPr lang="en-US" sz="3200" b="0" u="none" strike="noStrike">
+            <a:endParaRPr lang="en-US" sz="3200" b="0" u="none" strike="noStrike" dirty="0">
               <a:solidFill>
                 <a:srgbClr val="009BDD"/>
               </a:solidFill>
@@ -8178,7 +8313,7 @@
               <a:buChar char=""/>
             </a:pPr>
             <a:r>
-              <a:rPr lang="en-US" sz="3200" b="0" u="none" strike="noStrike">
+              <a:rPr lang="en-US" sz="3200" b="0" u="none" strike="noStrike" dirty="0">
                 <a:solidFill>
                   <a:srgbClr val="000000"/>
                 </a:solidFill>
@@ -8187,9 +8322,9 @@
                 <a:latin typeface="Arial"/>
                 <a:ea typeface="DejaVu Sans"/>
               </a:rPr>
-              <a:t>Each additional year of age decreases vehicle value by approximately 13.8%</a:t>
-            </a:r>
-            <a:endParaRPr lang="en-US" sz="3200" b="0" u="none" strike="noStrike">
+              <a:t>Each additional year of age decreases vehicle value by approximately 12.8%</a:t>
+            </a:r>
+            <a:endParaRPr lang="en-US" sz="3200" b="0" u="none" strike="noStrike" dirty="0">
               <a:solidFill>
                 <a:srgbClr val="009BDD"/>
               </a:solidFill>
@@ -8211,7 +8346,7 @@
               <a:buChar char=""/>
             </a:pPr>
             <a:r>
-              <a:rPr lang="en-US" sz="3200" b="0" u="none" strike="noStrike">
+              <a:rPr lang="en-US" sz="3200" b="0" u="none" strike="noStrike" dirty="0">
                 <a:solidFill>
                   <a:srgbClr val="000000"/>
                 </a:solidFill>
@@ -8220,9 +8355,31 @@
                 <a:latin typeface="Arial"/>
                 <a:ea typeface="DejaVu Sans"/>
               </a:rPr>
-              <a:t>Every additional 10,000 miles reduces value by approximately 2.2%.</a:t>
-            </a:r>
-            <a:endParaRPr lang="en-US" sz="3200" b="0" u="none" strike="noStrike">
+              <a:t>Every additional 10,000 miles reduces value by approximately </a:t>
+            </a:r>
+            <a:r>
+              <a:rPr lang="en-US" sz="3200" dirty="0">
+                <a:solidFill>
+                  <a:srgbClr val="000000"/>
+                </a:solidFill>
+                <a:latin typeface="Arial"/>
+                <a:ea typeface="DejaVu Sans"/>
+              </a:rPr>
+              <a:t>5.1</a:t>
+            </a:r>
+            <a:r>
+              <a:rPr lang="en-US" sz="3200" b="0" u="none" strike="noStrike" dirty="0">
+                <a:solidFill>
+                  <a:srgbClr val="000000"/>
+                </a:solidFill>
+                <a:effectLst/>
+                <a:uFillTx/>
+                <a:latin typeface="Arial"/>
+                <a:ea typeface="DejaVu Sans"/>
+              </a:rPr>
+              <a:t>%.</a:t>
+            </a:r>
+            <a:endParaRPr lang="en-US" sz="3200" b="0" u="none" strike="noStrike" dirty="0">
               <a:solidFill>
                 <a:srgbClr val="009BDD"/>
               </a:solidFill>
@@ -8244,7 +8401,7 @@
               <a:buChar char=""/>
             </a:pPr>
             <a:r>
-              <a:rPr lang="en-US" sz="3200" b="0" u="none" strike="noStrike">
+              <a:rPr lang="en-US" sz="3200" b="0" u="none" strike="noStrike" dirty="0">
                 <a:solidFill>
                   <a:srgbClr val="000000"/>
                 </a:solidFill>
@@ -8253,9 +8410,31 @@
                 <a:latin typeface="Arial"/>
                 <a:ea typeface="DejaVu Sans"/>
               </a:rPr>
-              <a:t>Vehicle condition increased value by approximately 2.0% for each one-point improvement in condition rating. </a:t>
-            </a:r>
-            <a:endParaRPr lang="en-US" sz="3200" b="0" u="none" strike="noStrike">
+              <a:t>Vehicle condition increased value by approximately </a:t>
+            </a:r>
+            <a:r>
+              <a:rPr lang="en-US" sz="3200" dirty="0">
+                <a:solidFill>
+                  <a:srgbClr val="000000"/>
+                </a:solidFill>
+                <a:latin typeface="Arial"/>
+                <a:ea typeface="DejaVu Sans"/>
+              </a:rPr>
+              <a:t>0</a:t>
+            </a:r>
+            <a:r>
+              <a:rPr lang="en-US" sz="3200" b="0" u="none" strike="noStrike" dirty="0">
+                <a:solidFill>
+                  <a:srgbClr val="000000"/>
+                </a:solidFill>
+                <a:effectLst/>
+                <a:uFillTx/>
+                <a:latin typeface="Arial"/>
+                <a:ea typeface="DejaVu Sans"/>
+              </a:rPr>
+              <a:t>.7% for each one-point improvement in condition rating. </a:t>
+            </a:r>
+            <a:endParaRPr lang="en-US" sz="3200" b="0" u="none" strike="noStrike" dirty="0">
               <a:solidFill>
                 <a:srgbClr val="009BDD"/>
               </a:solidFill>
@@ -8283,7 +8462,7 @@
               <a:buChar char=""/>
             </a:pPr>
             <a:r>
-              <a:rPr lang="en-US" sz="3200" b="0" u="none" strike="noStrike">
+              <a:rPr lang="en-US" sz="3200" b="0" u="none" strike="noStrike" dirty="0">
                 <a:solidFill>
                   <a:srgbClr val="000000"/>
                 </a:solidFill>
@@ -8294,7 +8473,7 @@
               </a:rPr>
               <a:t>Model type had the largest overall impact on value, with heavy-duty pickup trucks consistently commanding the highest prices. </a:t>
             </a:r>
-            <a:endParaRPr lang="en-US" sz="3200" b="0" u="none" strike="noStrike">
+            <a:endParaRPr lang="en-US" sz="3200" b="0" u="none" strike="noStrike" dirty="0">
               <a:solidFill>
                 <a:srgbClr val="009BDD"/>
               </a:solidFill>
@@ -8322,7 +8501,7 @@
               <a:buChar char=""/>
             </a:pPr>
             <a:r>
-              <a:rPr lang="en-US" sz="3200" b="0" u="none" strike="noStrike">
+              <a:rPr lang="en-US" sz="3200" b="0" u="none" strike="noStrike" dirty="0">
                 <a:solidFill>
                   <a:srgbClr val="000000"/>
                 </a:solidFill>
@@ -8333,7 +8512,7 @@
               </a:rPr>
               <a:t>These results suggest that dealerships should prioritize younger vehicles and high-demand truck models when acquiring inventory because those factors have the greatest influence on resale value.</a:t>
             </a:r>
-            <a:endParaRPr lang="en-US" sz="3200" b="0" u="none" strike="noStrike">
+            <a:endParaRPr lang="en-US" sz="3200" b="0" u="none" strike="noStrike" dirty="0">
               <a:solidFill>
                 <a:srgbClr val="009BDD"/>
               </a:solidFill>
@@ -8847,7 +9026,7 @@
               </a:tabLst>
             </a:pPr>
             <a:r>
-              <a:rPr lang="en-US" sz="4400" b="0" u="none" strike="noStrike">
+              <a:rPr lang="en-US" sz="4400" b="0" u="none" strike="noStrike" dirty="0">
                 <a:solidFill>
                   <a:srgbClr val="000000"/>
                 </a:solidFill>
@@ -8858,7 +9037,7 @@
               </a:rPr>
               <a:t>Data Preparation</a:t>
             </a:r>
-            <a:endParaRPr lang="en-US" sz="4400" b="0" u="none" strike="noStrike">
+            <a:endParaRPr lang="en-US" sz="4400" b="0" u="none" strike="noStrike" dirty="0">
               <a:solidFill>
                 <a:srgbClr val="DD4100"/>
               </a:solidFill>
@@ -8881,7 +9060,7 @@
         </p:nvSpPr>
         <p:spPr>
           <a:xfrm>
-            <a:off x="504360" y="1365120"/>
+            <a:off x="504672" y="1365120"/>
             <a:ext cx="9071280" cy="3676680"/>
           </a:xfrm>
           <a:prstGeom prst="rect">
@@ -8925,31 +9104,7 @@
                 <a:latin typeface="Arial"/>
                 <a:ea typeface="DejaVu Sans"/>
               </a:rPr>
-              <a:t>Normalized make: ‘ford truck’, ‘ford </a:t>
-            </a:r>
-            <a:r>
-              <a:rPr lang="en-US" sz="1200" b="0" u="none" strike="noStrike" dirty="0" err="1">
-                <a:solidFill>
-                  <a:srgbClr val="000000"/>
-                </a:solidFill>
-                <a:effectLst/>
-                <a:uFillTx/>
-                <a:latin typeface="Arial"/>
-                <a:ea typeface="DejaVu Sans"/>
-              </a:rPr>
-              <a:t>tk</a:t>
-            </a:r>
-            <a:r>
-              <a:rPr lang="en-US" sz="1200" b="0" u="none" strike="noStrike" dirty="0">
-                <a:solidFill>
-                  <a:srgbClr val="000000"/>
-                </a:solidFill>
-                <a:effectLst/>
-                <a:uFillTx/>
-                <a:latin typeface="Arial"/>
-                <a:ea typeface="DejaVu Sans"/>
-              </a:rPr>
-              <a:t>’ changed to ‘ford’</a:t>
+              <a:t>Normalized make: ‘ford truck’, ‘ford tk’ changed to ‘ford’</a:t>
             </a:r>
             <a:endParaRPr lang="en-US" sz="1200" b="0" u="none" strike="noStrike" dirty="0">
               <a:solidFill>
@@ -8988,31 +9143,7 @@
                 <a:latin typeface="Arial"/>
                 <a:ea typeface="DejaVu Sans"/>
               </a:rPr>
-              <a:t>Normalized body: model specifies bodies such as ‘</a:t>
-            </a:r>
-            <a:r>
-              <a:rPr lang="en-US" sz="1200" b="0" u="none" strike="noStrike" dirty="0" err="1">
-                <a:solidFill>
-                  <a:srgbClr val="000000"/>
-                </a:solidFill>
-                <a:effectLst/>
-                <a:uFillTx/>
-                <a:latin typeface="Arial"/>
-                <a:ea typeface="DejaVu Sans"/>
-              </a:rPr>
-              <a:t>cts</a:t>
-            </a:r>
-            <a:r>
-              <a:rPr lang="en-US" sz="1200" b="0" u="none" strike="noStrike" dirty="0">
-                <a:solidFill>
-                  <a:srgbClr val="000000"/>
-                </a:solidFill>
-                <a:effectLst/>
-                <a:uFillTx/>
-                <a:latin typeface="Arial"/>
-                <a:ea typeface="DejaVu Sans"/>
-              </a:rPr>
-              <a:t> coupe’ and ‘g37 convertible’ changed to ‘coupe’ and ‘convertible’</a:t>
+              <a:t>Normalized body: model specifies bodies such as ‘cts coupe’ and ‘g37 convertible’ changed to ‘coupe’ and ‘convertible’</a:t>
             </a:r>
             <a:endParaRPr lang="en-US" sz="1200" b="0" u="none" strike="noStrike" dirty="0">
               <a:solidFill>
@@ -9168,7 +9299,7 @@
                 <a:latin typeface="Arial"/>
                 <a:ea typeface="DejaVu Sans"/>
               </a:rPr>
-              <a:t>Dropped redundant features for multicollinearity – make, body</a:t>
+              <a:t>Transmission and color were ignored due to insignificance</a:t>
             </a:r>
             <a:endParaRPr lang="en-US" sz="1200" b="0" u="none" strike="noStrike" dirty="0">
               <a:solidFill>
@@ -9207,45 +9338,6 @@
                 <a:latin typeface="Arial"/>
                 <a:ea typeface="DejaVu Sans"/>
               </a:rPr>
-              <a:t>Transmission and color were ignored due to insignificance</a:t>
-            </a:r>
-            <a:endParaRPr lang="en-US" sz="1200" b="0" u="none" strike="noStrike" dirty="0">
-              <a:solidFill>
-                <a:srgbClr val="009BDD"/>
-              </a:solidFill>
-              <a:effectLst/>
-              <a:uFillTx/>
-              <a:latin typeface="Times New Roman"/>
-            </a:endParaRPr>
-          </a:p>
-          <a:p>
-            <a:pPr marL="432000" indent="-324000" algn="l" defTabSz="914400">
-              <a:lnSpc>
-                <a:spcPct val="40000"/>
-              </a:lnSpc>
-              <a:spcBef>
-                <a:spcPts val="1191"/>
-              </a:spcBef>
-              <a:spcAft>
-                <a:spcPts val="992"/>
-              </a:spcAft>
-              <a:buClr>
-                <a:srgbClr val="000000"/>
-              </a:buClr>
-              <a:buSzPct val="45000"/>
-              <a:buFont typeface="Wingdings" charset="2"/>
-              <a:buChar char=""/>
-            </a:pPr>
-            <a:r>
-              <a:rPr lang="en-US" sz="1200" b="0" u="none" strike="noStrike" dirty="0">
-                <a:solidFill>
-                  <a:srgbClr val="000000"/>
-                </a:solidFill>
-                <a:effectLst/>
-                <a:uFillTx/>
-                <a:latin typeface="Arial"/>
-                <a:ea typeface="DejaVu Sans"/>
-              </a:rPr>
               <a:t>MMR (Manheim Market Report) was dropped as it was essentially an estimate of the value that we are modeling</a:t>
             </a:r>
             <a:endParaRPr lang="en-US" sz="1200" dirty="0">
@@ -9287,6 +9379,16 @@
               <a:t>After cleaning the data, our analysis and conclusions were based on </a:t>
             </a:r>
             <a:r>
+              <a:rPr lang="en-US" sz="1200" b="1" dirty="0">
+                <a:solidFill>
+                  <a:srgbClr val="000000"/>
+                </a:solidFill>
+                <a:latin typeface="Arial"/>
+                <a:ea typeface="DejaVu Sans"/>
+              </a:rPr>
+              <a:t>50</a:t>
+            </a:r>
+            <a:r>
               <a:rPr lang="en-US" sz="1200" b="1" u="none" strike="noStrike" dirty="0">
                 <a:solidFill>
                   <a:srgbClr val="000000"/>
@@ -9296,7 +9398,7 @@
                 <a:latin typeface="Arial"/>
                 <a:ea typeface="DejaVu Sans"/>
               </a:rPr>
-              <a:t>1700</a:t>
+              <a:t>00</a:t>
             </a:r>
             <a:r>
               <a:rPr lang="en-US" sz="1200" b="0" u="none" strike="noStrike" dirty="0">
@@ -9308,7 +9410,7 @@
                 <a:latin typeface="Arial"/>
                 <a:ea typeface="DejaVu Sans"/>
               </a:rPr>
-              <a:t> observations from the state of Utah.</a:t>
+              <a:t> observations of a stratified sample of the data</a:t>
             </a:r>
             <a:endParaRPr lang="en-US" sz="1200" b="0" u="none" strike="noStrike" dirty="0">
               <a:solidFill>
